--- a/output/SATUUU99-Brand-Deck.pptx
+++ b/output/SATUUU99-Brand-Deck.pptx
@@ -1,39 +1,134 @@
 
 <file path=ppt/presentation.xml><?xml version="1.0" encoding="utf-8"?>
-<p:presentation xmlns:p="http://schemas.openxmlformats.org/presentationml/2006/main">
+<p:presentation xmlns:a="http://schemas.openxmlformats.org/drawingml/2006/main" xmlns:r="http://schemas.openxmlformats.org/officeDocument/2006/relationships" xmlns:p="http://schemas.openxmlformats.org/presentationml/2006/main">
   <p:sldMasterIdLst>
-    <p:sldMasterId xmlns:r="http://schemas.openxmlformats.org/officeDocument/2006/relationships" id="2147483648" r:id="R14be6168d9424ba7"/>
+    <p:sldMasterId id="2147483648" r:id="rId1"/>
   </p:sldMasterIdLst>
   <p:notesMasterIdLst>
-    <p:notesMasterId xmlns:r="http://schemas.openxmlformats.org/officeDocument/2006/relationships" r:id="Rc114f092575c4059"/>
+    <p:notesMasterId r:id="rId16"/>
   </p:notesMasterIdLst>
   <p:sldIdLst>
-    <p:sldId xmlns:r="http://schemas.openxmlformats.org/officeDocument/2006/relationships" id="256" r:id="R7592298e08054485"/>
-    <p:sldId xmlns:r="http://schemas.openxmlformats.org/officeDocument/2006/relationships" id="257" r:id="Rf1ae9a3a8c0c4c39"/>
-    <p:sldId xmlns:r="http://schemas.openxmlformats.org/officeDocument/2006/relationships" id="258" r:id="R34bdde0c600947ae"/>
-    <p:sldId xmlns:r="http://schemas.openxmlformats.org/officeDocument/2006/relationships" id="259" r:id="Re6fc3b4da1a24300"/>
-    <p:sldId xmlns:r="http://schemas.openxmlformats.org/officeDocument/2006/relationships" id="260" r:id="R55b93904788245ba"/>
-    <p:sldId xmlns:r="http://schemas.openxmlformats.org/officeDocument/2006/relationships" id="261" r:id="R0aff83ff70db468b"/>
-    <p:sldId xmlns:r="http://schemas.openxmlformats.org/officeDocument/2006/relationships" id="262" r:id="R7614ffc4acd34a08"/>
-    <p:sldId xmlns:r="http://schemas.openxmlformats.org/officeDocument/2006/relationships" id="263" r:id="R7159e3791a8941d3"/>
-    <p:sldId xmlns:r="http://schemas.openxmlformats.org/officeDocument/2006/relationships" id="264" r:id="R16405136ae944463"/>
-    <p:sldId xmlns:r="http://schemas.openxmlformats.org/officeDocument/2006/relationships" id="265" r:id="R3b57bbdb71d0423a"/>
-    <p:sldId xmlns:r="http://schemas.openxmlformats.org/officeDocument/2006/relationships" id="266" r:id="R021c4a90fae64b84"/>
-    <p:sldId xmlns:r="http://schemas.openxmlformats.org/officeDocument/2006/relationships" id="267" r:id="Rbc5dac710e7c4be4"/>
-    <p:sldId xmlns:r="http://schemas.openxmlformats.org/officeDocument/2006/relationships" id="268" r:id="R91f7a541ff654821"/>
-    <p:sldId xmlns:r="http://schemas.openxmlformats.org/officeDocument/2006/relationships" id="269" r:id="R9bfe82fc9f374c11"/>
+    <p:sldId id="256" r:id="rId2"/>
+    <p:sldId id="257" r:id="rId3"/>
+    <p:sldId id="258" r:id="rId4"/>
+    <p:sldId id="259" r:id="rId5"/>
+    <p:sldId id="260" r:id="rId6"/>
+    <p:sldId id="261" r:id="rId7"/>
+    <p:sldId id="262" r:id="rId8"/>
+    <p:sldId id="263" r:id="rId9"/>
+    <p:sldId id="264" r:id="rId10"/>
+    <p:sldId id="265" r:id="rId11"/>
+    <p:sldId id="266" r:id="rId12"/>
+    <p:sldId id="267" r:id="rId13"/>
+    <p:sldId id="268" r:id="rId14"/>
+    <p:sldId id="269" r:id="rId15"/>
   </p:sldIdLst>
   <p:sldSz cx="15240000" cy="8572500"/>
   <p:notesSz cx="6858000" cy="9144000"/>
+  <p:defaultTextStyle>
+    <a:defPPr>
+      <a:defRPr lang="en-DE"/>
+    </a:defPPr>
+    <a:lvl1pPr marL="0" algn="l" defTabSz="914400" rtl="0" eaLnBrk="1" latinLnBrk="0" hangingPunct="1">
+      <a:defRPr sz="1800" kern="1200">
+        <a:solidFill>
+          <a:schemeClr val="tx1"/>
+        </a:solidFill>
+        <a:latin typeface="+mn-lt"/>
+        <a:ea typeface="+mn-ea"/>
+        <a:cs typeface="+mn-cs"/>
+      </a:defRPr>
+    </a:lvl1pPr>
+    <a:lvl2pPr marL="457200" algn="l" defTabSz="914400" rtl="0" eaLnBrk="1" latinLnBrk="0" hangingPunct="1">
+      <a:defRPr sz="1800" kern="1200">
+        <a:solidFill>
+          <a:schemeClr val="tx1"/>
+        </a:solidFill>
+        <a:latin typeface="+mn-lt"/>
+        <a:ea typeface="+mn-ea"/>
+        <a:cs typeface="+mn-cs"/>
+      </a:defRPr>
+    </a:lvl2pPr>
+    <a:lvl3pPr marL="914400" algn="l" defTabSz="914400" rtl="0" eaLnBrk="1" latinLnBrk="0" hangingPunct="1">
+      <a:defRPr sz="1800" kern="1200">
+        <a:solidFill>
+          <a:schemeClr val="tx1"/>
+        </a:solidFill>
+        <a:latin typeface="+mn-lt"/>
+        <a:ea typeface="+mn-ea"/>
+        <a:cs typeface="+mn-cs"/>
+      </a:defRPr>
+    </a:lvl3pPr>
+    <a:lvl4pPr marL="1371600" algn="l" defTabSz="914400" rtl="0" eaLnBrk="1" latinLnBrk="0" hangingPunct="1">
+      <a:defRPr sz="1800" kern="1200">
+        <a:solidFill>
+          <a:schemeClr val="tx1"/>
+        </a:solidFill>
+        <a:latin typeface="+mn-lt"/>
+        <a:ea typeface="+mn-ea"/>
+        <a:cs typeface="+mn-cs"/>
+      </a:defRPr>
+    </a:lvl4pPr>
+    <a:lvl5pPr marL="1828800" algn="l" defTabSz="914400" rtl="0" eaLnBrk="1" latinLnBrk="0" hangingPunct="1">
+      <a:defRPr sz="1800" kern="1200">
+        <a:solidFill>
+          <a:schemeClr val="tx1"/>
+        </a:solidFill>
+        <a:latin typeface="+mn-lt"/>
+        <a:ea typeface="+mn-ea"/>
+        <a:cs typeface="+mn-cs"/>
+      </a:defRPr>
+    </a:lvl5pPr>
+    <a:lvl6pPr marL="2286000" algn="l" defTabSz="914400" rtl="0" eaLnBrk="1" latinLnBrk="0" hangingPunct="1">
+      <a:defRPr sz="1800" kern="1200">
+        <a:solidFill>
+          <a:schemeClr val="tx1"/>
+        </a:solidFill>
+        <a:latin typeface="+mn-lt"/>
+        <a:ea typeface="+mn-ea"/>
+        <a:cs typeface="+mn-cs"/>
+      </a:defRPr>
+    </a:lvl6pPr>
+    <a:lvl7pPr marL="2743200" algn="l" defTabSz="914400" rtl="0" eaLnBrk="1" latinLnBrk="0" hangingPunct="1">
+      <a:defRPr sz="1800" kern="1200">
+        <a:solidFill>
+          <a:schemeClr val="tx1"/>
+        </a:solidFill>
+        <a:latin typeface="+mn-lt"/>
+        <a:ea typeface="+mn-ea"/>
+        <a:cs typeface="+mn-cs"/>
+      </a:defRPr>
+    </a:lvl7pPr>
+    <a:lvl8pPr marL="3200400" algn="l" defTabSz="914400" rtl="0" eaLnBrk="1" latinLnBrk="0" hangingPunct="1">
+      <a:defRPr sz="1800" kern="1200">
+        <a:solidFill>
+          <a:schemeClr val="tx1"/>
+        </a:solidFill>
+        <a:latin typeface="+mn-lt"/>
+        <a:ea typeface="+mn-ea"/>
+        <a:cs typeface="+mn-cs"/>
+      </a:defRPr>
+    </a:lvl8pPr>
+    <a:lvl9pPr marL="3657600" algn="l" defTabSz="914400" rtl="0" eaLnBrk="1" latinLnBrk="0" hangingPunct="1">
+      <a:defRPr sz="1800" kern="1200">
+        <a:solidFill>
+          <a:schemeClr val="tx1"/>
+        </a:solidFill>
+        <a:latin typeface="+mn-lt"/>
+        <a:ea typeface="+mn-ea"/>
+        <a:cs typeface="+mn-cs"/>
+      </a:defRPr>
+    </a:lvl9pPr>
+  </p:defaultTextStyle>
 </p:presentation>
 </file>
 
 <file path=ppt/notesMasters/notesMaster1.xml><?xml version="1.0" encoding="utf-8"?>
-<p:notesMaster xmlns:p="http://schemas.openxmlformats.org/presentationml/2006/main">
+<p:notesMaster xmlns:a="http://schemas.openxmlformats.org/drawingml/2006/main" xmlns:r="http://schemas.openxmlformats.org/officeDocument/2006/relationships" xmlns:p="http://schemas.openxmlformats.org/presentationml/2006/main">
   <p:cSld>
     <p:bg>
       <p:bgRef idx="1001">
-        <a:schemeClr xmlns:a="http://schemas.openxmlformats.org/drawingml/2006/main" val="bg1"/>
+        <a:schemeClr val="bg1"/>
       </p:bgRef>
     </p:bg>
     <p:spTree>
@@ -43,380 +138,164 @@
         <p:nvPr/>
       </p:nvGrpSpPr>
       <p:grpSpPr>
-        <a:xfrm xmlns:a="http://schemas.openxmlformats.org/drawingml/2006/main"/>
+        <a:xfrm>
+          <a:off x="0" y="0"/>
+          <a:ext cx="0" cy="0"/>
+          <a:chOff x="0" y="0"/>
+          <a:chExt cx="0" cy="0"/>
+        </a:xfrm>
       </p:grpSpPr>
       <p:sp>
         <p:nvSpPr>
           <p:cNvPr id="2" name="Header Placeholder"/>
-          <p:cNvSpPr/>
+          <p:cNvSpPr>
+            <a:spLocks noGrp="1"/>
+          </p:cNvSpPr>
           <p:nvPr>
             <p:ph type="hdr" sz="quarter"/>
           </p:nvPr>
         </p:nvSpPr>
         <p:spPr>
-          <a:prstGeom xmlns:a="http://schemas.openxmlformats.org/drawingml/2006/main" prst="rect">
-            <a:avLst/>
-          </a:prstGeom>
-        </p:spPr>
-        <p:txBody>
-          <a:bodyPr xmlns:a="http://schemas.openxmlformats.org/drawingml/2006/main"/>
-          <a:lstStyle xmlns:a="http://schemas.openxmlformats.org/drawingml/2006/main"/>
-          <a:p xmlns:a="http://schemas.openxmlformats.org/drawingml/2006/main"/>
+          <a:prstGeom prst="rect">
+            <a:avLst/>
+          </a:prstGeom>
+        </p:spPr>
+        <p:txBody>
+          <a:bodyPr/>
+          <a:lstStyle/>
+          <a:p>
+            <a:endParaRPr/>
+          </a:p>
         </p:txBody>
       </p:sp>
       <p:sp>
         <p:nvSpPr>
           <p:cNvPr id="3" name="Date Placeholder"/>
-          <p:cNvSpPr/>
+          <p:cNvSpPr>
+            <a:spLocks noGrp="1"/>
+          </p:cNvSpPr>
           <p:nvPr>
             <p:ph type="dt" sz="quarter" idx="1"/>
           </p:nvPr>
         </p:nvSpPr>
         <p:spPr>
-          <a:prstGeom xmlns:a="http://schemas.openxmlformats.org/drawingml/2006/main" prst="rect">
-            <a:avLst/>
-          </a:prstGeom>
-        </p:spPr>
-        <p:txBody>
-          <a:bodyPr xmlns:a="http://schemas.openxmlformats.org/drawingml/2006/main"/>
-          <a:lstStyle xmlns:a="http://schemas.openxmlformats.org/drawingml/2006/main"/>
-          <a:p xmlns:a="http://schemas.openxmlformats.org/drawingml/2006/main"/>
+          <a:prstGeom prst="rect">
+            <a:avLst/>
+          </a:prstGeom>
+        </p:spPr>
+        <p:txBody>
+          <a:bodyPr/>
+          <a:lstStyle/>
+          <a:p>
+            <a:endParaRPr/>
+          </a:p>
         </p:txBody>
       </p:sp>
       <p:sp>
         <p:nvSpPr>
           <p:cNvPr id="4" name="Slide Image Placeholder"/>
-          <p:cNvSpPr/>
+          <p:cNvSpPr>
+            <a:spLocks noGrp="1" noRot="1" noChangeAspect="1"/>
+          </p:cNvSpPr>
           <p:nvPr>
             <p:ph type="sldImg" idx="2"/>
           </p:nvPr>
         </p:nvSpPr>
         <p:spPr>
-          <a:prstGeom xmlns:a="http://schemas.openxmlformats.org/drawingml/2006/main" prst="rect">
-            <a:avLst/>
-          </a:prstGeom>
-        </p:spPr>
-        <p:txBody>
-          <a:bodyPr xmlns:a="http://schemas.openxmlformats.org/drawingml/2006/main"/>
-          <a:lstStyle xmlns:a="http://schemas.openxmlformats.org/drawingml/2006/main"/>
-          <a:p xmlns:a="http://schemas.openxmlformats.org/drawingml/2006/main"/>
+          <a:prstGeom prst="rect">
+            <a:avLst/>
+          </a:prstGeom>
+        </p:spPr>
+        <p:txBody>
+          <a:bodyPr/>
+          <a:lstStyle/>
+          <a:p>
+            <a:endParaRPr/>
+          </a:p>
         </p:txBody>
       </p:sp>
       <p:sp>
         <p:nvSpPr>
           <p:cNvPr id="5" name="Notes Placeholder"/>
-          <p:cNvSpPr/>
+          <p:cNvSpPr>
+            <a:spLocks noGrp="1"/>
+          </p:cNvSpPr>
           <p:nvPr>
             <p:ph type="body" sz="quarter" idx="3"/>
           </p:nvPr>
         </p:nvSpPr>
         <p:spPr>
-          <a:prstGeom xmlns:a="http://schemas.openxmlformats.org/drawingml/2006/main" prst="rect">
-            <a:avLst/>
-          </a:prstGeom>
-        </p:spPr>
-        <p:txBody>
-          <a:bodyPr xmlns:a="http://schemas.openxmlformats.org/drawingml/2006/main"/>
-          <a:lstStyle xmlns:a="http://schemas.openxmlformats.org/drawingml/2006/main"/>
-          <a:p xmlns:a="http://schemas.openxmlformats.org/drawingml/2006/main"/>
+          <a:prstGeom prst="rect">
+            <a:avLst/>
+          </a:prstGeom>
+        </p:spPr>
+        <p:txBody>
+          <a:bodyPr/>
+          <a:lstStyle/>
+          <a:p>
+            <a:endParaRPr/>
+          </a:p>
         </p:txBody>
       </p:sp>
       <p:sp>
         <p:nvSpPr>
           <p:cNvPr id="6" name="Footer Placeholder"/>
-          <p:cNvSpPr/>
+          <p:cNvSpPr>
+            <a:spLocks noGrp="1"/>
+          </p:cNvSpPr>
           <p:nvPr>
             <p:ph type="ftr" sz="quarter" idx="4"/>
           </p:nvPr>
         </p:nvSpPr>
         <p:spPr>
-          <a:prstGeom xmlns:a="http://schemas.openxmlformats.org/drawingml/2006/main" prst="rect">
-            <a:avLst/>
-          </a:prstGeom>
-        </p:spPr>
-        <p:txBody>
-          <a:bodyPr xmlns:a="http://schemas.openxmlformats.org/drawingml/2006/main"/>
-          <a:lstStyle xmlns:a="http://schemas.openxmlformats.org/drawingml/2006/main"/>
-          <a:p xmlns:a="http://schemas.openxmlformats.org/drawingml/2006/main"/>
+          <a:prstGeom prst="rect">
+            <a:avLst/>
+          </a:prstGeom>
+        </p:spPr>
+        <p:txBody>
+          <a:bodyPr/>
+          <a:lstStyle/>
+          <a:p>
+            <a:endParaRPr/>
+          </a:p>
         </p:txBody>
       </p:sp>
       <p:sp>
         <p:nvSpPr>
           <p:cNvPr id="7" name="Slide Number Placeholder"/>
-          <p:cNvSpPr/>
+          <p:cNvSpPr>
+            <a:spLocks noGrp="1"/>
+          </p:cNvSpPr>
           <p:nvPr>
             <p:ph type="sldNum" sz="quarter" idx="5"/>
           </p:nvPr>
         </p:nvSpPr>
         <p:spPr>
-          <a:prstGeom xmlns:a="http://schemas.openxmlformats.org/drawingml/2006/main" prst="rect">
-            <a:avLst/>
-          </a:prstGeom>
-        </p:spPr>
-        <p:txBody>
-          <a:bodyPr xmlns:a="http://schemas.openxmlformats.org/drawingml/2006/main"/>
-          <a:lstStyle xmlns:a="http://schemas.openxmlformats.org/drawingml/2006/main"/>
-          <a:p xmlns:a="http://schemas.openxmlformats.org/drawingml/2006/main"/>
+          <a:prstGeom prst="rect">
+            <a:avLst/>
+          </a:prstGeom>
+        </p:spPr>
+        <p:txBody>
+          <a:bodyPr/>
+          <a:lstStyle/>
+          <a:p>
+            <a:endParaRPr/>
+          </a:p>
         </p:txBody>
       </p:sp>
     </p:spTree>
   </p:cSld>
   <p:clrMap bg1="lt1" tx1="dk1" bg2="lt2" tx2="dk2" accent1="accent1" accent2="accent2" accent3="accent3" accent4="accent4" accent5="accent5" accent6="accent6" hlink="hlink" folHlink="folHlink"/>
   <p:notesStyle>
-    <a:lvl1pPr xmlns:a="http://schemas.openxmlformats.org/drawingml/2006/main" marL="0" algn="l" defTabSz="914400" rtl="0" eaLnBrk="1" latinLnBrk="0" hangingPunct="1">
+    <a:lvl1pPr marL="0" algn="l" defTabSz="914400" rtl="0" eaLnBrk="1" latinLnBrk="0" hangingPunct="1">
       <a:defRPr sz="1200" kern="1200"/>
     </a:lvl1pPr>
   </p:notesStyle>
 </p:notesMaster>
 </file>
 
-<file path=ppt/notesMasters/theme/theme3.xml><?xml version="1.0" encoding="utf-8"?>
-<a:theme xmlns:a="http://schemas.openxmlformats.org/drawingml/2006/main" name="ChatGPT">
-  <a:themeElements>
-    <a:clrScheme name="ChatGPT">
-      <a:dk1>
-        <a:srgbClr val="000000"/>
-      </a:dk1>
-      <a:lt1>
-        <a:srgbClr val="FFFFFF"/>
-      </a:lt1>
-      <a:dk2>
-        <a:srgbClr val="0E2841"/>
-      </a:dk2>
-      <a:lt2>
-        <a:srgbClr val="E8E8E8"/>
-      </a:lt2>
-      <a:accent1>
-        <a:srgbClr val="156082"/>
-      </a:accent1>
-      <a:accent2>
-        <a:srgbClr val="E97132"/>
-      </a:accent2>
-      <a:accent3>
-        <a:srgbClr val="196B24"/>
-      </a:accent3>
-      <a:accent4>
-        <a:srgbClr val="0F9ED5"/>
-      </a:accent4>
-      <a:accent5>
-        <a:srgbClr val="A02B93"/>
-      </a:accent5>
-      <a:accent6>
-        <a:srgbClr val="4EA72E"/>
-      </a:accent6>
-      <a:hlink>
-        <a:srgbClr val="467886"/>
-      </a:hlink>
-      <a:folHlink>
-        <a:srgbClr val="96607D"/>
-      </a:folHlink>
-    </a:clrScheme>
-    <a:fontScheme name="Office">
-      <a:majorFont>
-        <a:latin typeface="Calibri Light"/>
-        <a:ea typeface="Calibri Light"/>
-        <a:cs typeface="Calibri Light"/>
-      </a:majorFont>
-      <a:minorFont>
-        <a:latin typeface="Calibri"/>
-        <a:ea typeface="Calibri"/>
-        <a:cs typeface="Calibri"/>
-      </a:minorFont>
-    </a:fontScheme>
-    <a:fmtScheme name="ChatGPT">
-      <a:fillStyleLst>
-        <a:solidFill>
-          <a:schemeClr val="phClr"/>
-        </a:solidFill>
-        <a:gradFill>
-          <a:gsLst>
-            <a:gs pos="0">
-              <a:schemeClr val="phClr">
-                <a:tint val="67000"/>
-                <a:lumMod val="110000"/>
-                <a:satMod val="105000"/>
-              </a:schemeClr>
-            </a:gs>
-            <a:gs pos="50000">
-              <a:schemeClr val="phClr">
-                <a:tint val="73000"/>
-                <a:lumMod val="105000"/>
-                <a:satMod val="103000"/>
-              </a:schemeClr>
-            </a:gs>
-            <a:gs pos="100000">
-              <a:schemeClr val="phClr">
-                <a:tint val="81000"/>
-                <a:lumMod val="105000"/>
-                <a:satMod val="109000"/>
-              </a:schemeClr>
-            </a:gs>
-          </a:gsLst>
-          <a:lin ang="5400000" scaled="0"/>
-        </a:gradFill>
-        <a:gradFill>
-          <a:gsLst>
-            <a:gs pos="0">
-              <a:schemeClr val="phClr">
-                <a:tint val="94000"/>
-                <a:lumMod val="102000"/>
-                <a:satMod val="103000"/>
-              </a:schemeClr>
-            </a:gs>
-            <a:gs pos="50000">
-              <a:schemeClr val="phClr">
-                <a:shade val="100000"/>
-                <a:lumMod val="100000"/>
-                <a:satMod val="110000"/>
-              </a:schemeClr>
-            </a:gs>
-            <a:gs pos="100000">
-              <a:schemeClr val="phClr">
-                <a:shade val="78000"/>
-                <a:lumMod val="99000"/>
-                <a:satMod val="120000"/>
-              </a:schemeClr>
-            </a:gs>
-          </a:gsLst>
-          <a:lin ang="5400000" scaled="0"/>
-        </a:gradFill>
-      </a:fillStyleLst>
-      <a:lnStyleLst>
-        <a:ln w="12700">
-          <a:solidFill>
-            <a:schemeClr val="phClr"/>
-          </a:solidFill>
-          <a:prstDash val="solid"/>
-        </a:ln>
-        <a:ln w="19050">
-          <a:solidFill>
-            <a:schemeClr val="phClr"/>
-          </a:solidFill>
-          <a:prstDash val="solid"/>
-        </a:ln>
-        <a:ln w="25400">
-          <a:solidFill>
-            <a:schemeClr val="phClr"/>
-          </a:solidFill>
-          <a:prstDash val="solid"/>
-        </a:ln>
-      </a:lnStyleLst>
-      <a:effectStyleLst>
-        <a:effectStyle>
-          <a:effectLst/>
-        </a:effectStyle>
-        <a:effectStyle>
-          <a:effectLst/>
-        </a:effectStyle>
-        <a:effectStyle>
-          <a:effectLst>
-            <a:outerShdw blurRad="57150" dist="19050" dir="5400000">
-              <a:srgbClr val="000000">
-                <a:alpha val="16000"/>
-              </a:srgbClr>
-            </a:outerShdw>
-          </a:effectLst>
-        </a:effectStyle>
-        <a:effectStyle>
-          <a:effectLst>
-            <a:outerShdw blurRad="19050" dist="9525" dir="5400000">
-              <a:srgbClr val="000000">
-                <a:alpha val="6000"/>
-              </a:srgbClr>
-            </a:outerShdw>
-          </a:effectLst>
-        </a:effectStyle>
-        <a:effectStyle>
-          <a:effectLst>
-            <a:outerShdw blurRad="28575" dist="9525" dir="5400000">
-              <a:srgbClr val="000000">
-                <a:alpha val="8000"/>
-              </a:srgbClr>
-            </a:outerShdw>
-          </a:effectLst>
-        </a:effectStyle>
-        <a:effectStyle>
-          <a:effectLst>
-            <a:outerShdw blurRad="57150" dist="19050" dir="5400000">
-              <a:srgbClr val="000000">
-                <a:alpha val="10000"/>
-              </a:srgbClr>
-            </a:outerShdw>
-          </a:effectLst>
-        </a:effectStyle>
-        <a:effectStyle>
-          <a:effectLst>
-            <a:outerShdw blurRad="114300" dist="38100" dir="5400000">
-              <a:srgbClr val="000000">
-                <a:alpha val="12000"/>
-              </a:srgbClr>
-            </a:outerShdw>
-          </a:effectLst>
-        </a:effectStyle>
-        <a:effectStyle>
-          <a:effectLst>
-            <a:outerShdw blurRad="171450" dist="57150" dir="5400000">
-              <a:srgbClr val="000000">
-                <a:alpha val="16000"/>
-              </a:srgbClr>
-            </a:outerShdw>
-          </a:effectLst>
-        </a:effectStyle>
-        <a:effectStyle>
-          <a:effectLst>
-            <a:outerShdw blurRad="266700" dist="95250" dir="5400000">
-              <a:srgbClr val="000000">
-                <a:alpha val="24000"/>
-              </a:srgbClr>
-            </a:outerShdw>
-          </a:effectLst>
-        </a:effectStyle>
-      </a:effectStyleLst>
-      <a:bgFillStyleLst>
-        <a:solidFill>
-          <a:schemeClr val="phClr"/>
-        </a:solidFill>
-        <a:solidFill>
-          <a:schemeClr val="phClr">
-            <a:tint val="95000"/>
-            <a:satMod val="170000"/>
-          </a:schemeClr>
-        </a:solidFill>
-        <a:gradFill>
-          <a:gsLst>
-            <a:gs pos="0">
-              <a:schemeClr val="phClr">
-                <a:tint val="93000"/>
-                <a:shade val="98000"/>
-                <a:lumMod val="102000"/>
-                <a:satMod val="150000"/>
-              </a:schemeClr>
-            </a:gs>
-            <a:gs pos="50000">
-              <a:schemeClr val="phClr">
-                <a:tint val="98000"/>
-                <a:shade val="90000"/>
-                <a:lumMod val="103000"/>
-                <a:satMod val="130000"/>
-              </a:schemeClr>
-            </a:gs>
-            <a:gs pos="100000">
-              <a:schemeClr val="phClr">
-                <a:shade val="63000"/>
-                <a:satMod val="120000"/>
-              </a:schemeClr>
-            </a:gs>
-          </a:gsLst>
-          <a:lin ang="5400000" scaled="0"/>
-        </a:gradFill>
-      </a:bgFillStyleLst>
-    </a:fmtScheme>
-  </a:themeElements>
-</a:theme>
-</file>
-
 <file path=ppt/notesSlides/notesSlide1.xml><?xml version="1.0" encoding="utf-8"?>
-<p:notes xmlns:p="http://schemas.openxmlformats.org/presentationml/2006/main">
+<p:notes xmlns:a="http://schemas.openxmlformats.org/drawingml/2006/main" xmlns:r="http://schemas.openxmlformats.org/officeDocument/2006/relationships" xmlns:p="http://schemas.openxmlformats.org/presentationml/2006/main">
   <p:cSld>
     <p:spTree>
       <p:nvGrpSpPr>
@@ -425,16 +304,21 @@
         <p:nvPr/>
       </p:nvGrpSpPr>
       <p:grpSpPr>
-        <a:xfrm xmlns:a="http://schemas.openxmlformats.org/drawingml/2006/main"/>
+        <a:xfrm>
+          <a:off x="0" y="0"/>
+          <a:ext cx="0" cy="0"/>
+          <a:chOff x="0" y="0"/>
+          <a:chExt cx="0" cy="0"/>
+        </a:xfrm>
       </p:grpSpPr>
       <p:sp>
         <p:nvSpPr>
           <p:cNvPr id="2" name="Slide Image Placeholder 1"/>
           <p:cNvSpPr>
-            <a:spLocks xmlns:a="http://schemas.openxmlformats.org/drawingml/2006/main" noGrp="1"/>
+            <a:spLocks noGrp="1" noRot="1" noChangeAspect="1"/>
           </p:cNvSpPr>
           <p:nvPr>
-            <p:ph type="sldImg" idx="0"/>
+            <p:ph type="sldImg"/>
           </p:nvPr>
         </p:nvSpPr>
         <p:spPr/>
@@ -443,7 +327,7 @@
         <p:nvSpPr>
           <p:cNvPr id="3" name="Notes Placeholder 2"/>
           <p:cNvSpPr>
-            <a:spLocks xmlns:a="http://schemas.openxmlformats.org/drawingml/2006/main" noGrp="1"/>
+            <a:spLocks noGrp="1"/>
           </p:cNvSpPr>
           <p:nvPr>
             <p:ph type="body" idx="1"/>
@@ -451,9 +335,9 @@
         </p:nvSpPr>
         <p:spPr/>
         <p:txBody>
-          <a:bodyPr xmlns:a="http://schemas.openxmlformats.org/drawingml/2006/main"/>
-          <a:lstStyle xmlns:a="http://schemas.openxmlformats.org/drawingml/2006/main"/>
-          <a:p xmlns:a="http://schemas.openxmlformats.org/drawingml/2006/main">
+          <a:bodyPr/>
+          <a:lstStyle/>
+          <a:p>
             <a:r>
               <a:t>Brand source: user-provided SATUUU99 identity boards, 0406AABD-1B31-4585-A3C9-0834773E0AB6.PNG and 1EA5F5B3-5B3A-4519-9F4E-639ABB2B8651.PNG. Artwork and mockups extracted from supplied reference images. Existing spa mood images from the project are generated concept imagery, not documentary photographs. Layout, typography and body copy recreated as editable elements. Brand guidance beyond the reference is proposed implementation guidance.</a:t>
             </a:r>
@@ -464,7 +348,7 @@
         <p:nvSpPr>
           <p:cNvPr id="4" name="Slide Number Placeholder 3"/>
           <p:cNvSpPr>
-            <a:spLocks xmlns:a="http://schemas.openxmlformats.org/drawingml/2006/main" noGrp="1"/>
+            <a:spLocks noGrp="1"/>
           </p:cNvSpPr>
           <p:nvPr>
             <p:ph type="sldNum" idx="5"/>
@@ -472,21 +356,23 @@
         </p:nvSpPr>
         <p:spPr/>
         <p:txBody>
-          <a:bodyPr xmlns:a="http://schemas.openxmlformats.org/drawingml/2006/main"/>
-          <a:lstStyle xmlns:a="http://schemas.openxmlformats.org/drawingml/2006/main"/>
-          <a:p xmlns:a="http://schemas.openxmlformats.org/drawingml/2006/main"/>
+          <a:bodyPr/>
+          <a:lstStyle/>
+          <a:p>
+            <a:endParaRPr/>
+          </a:p>
         </p:txBody>
       </p:sp>
     </p:spTree>
   </p:cSld>
   <p:clrMapOvr>
-    <a:masterClrMapping xmlns:a="http://schemas.openxmlformats.org/drawingml/2006/main"/>
+    <a:masterClrMapping/>
   </p:clrMapOvr>
 </p:notes>
 </file>
 
 <file path=ppt/notesSlides/notesSlide10.xml><?xml version="1.0" encoding="utf-8"?>
-<p:notes xmlns:p="http://schemas.openxmlformats.org/presentationml/2006/main">
+<p:notes xmlns:a="http://schemas.openxmlformats.org/drawingml/2006/main" xmlns:r="http://schemas.openxmlformats.org/officeDocument/2006/relationships" xmlns:p="http://schemas.openxmlformats.org/presentationml/2006/main">
   <p:cSld>
     <p:spTree>
       <p:nvGrpSpPr>
@@ -495,16 +381,21 @@
         <p:nvPr/>
       </p:nvGrpSpPr>
       <p:grpSpPr>
-        <a:xfrm xmlns:a="http://schemas.openxmlformats.org/drawingml/2006/main"/>
+        <a:xfrm>
+          <a:off x="0" y="0"/>
+          <a:ext cx="0" cy="0"/>
+          <a:chOff x="0" y="0"/>
+          <a:chExt cx="0" cy="0"/>
+        </a:xfrm>
       </p:grpSpPr>
       <p:sp>
         <p:nvSpPr>
           <p:cNvPr id="2" name="Slide Image Placeholder 1"/>
           <p:cNvSpPr>
-            <a:spLocks xmlns:a="http://schemas.openxmlformats.org/drawingml/2006/main" noGrp="1"/>
+            <a:spLocks noGrp="1" noRot="1" noChangeAspect="1"/>
           </p:cNvSpPr>
           <p:nvPr>
-            <p:ph type="sldImg" idx="0"/>
+            <p:ph type="sldImg"/>
           </p:nvPr>
         </p:nvSpPr>
         <p:spPr/>
@@ -513,7 +404,7 @@
         <p:nvSpPr>
           <p:cNvPr id="3" name="Notes Placeholder 2"/>
           <p:cNvSpPr>
-            <a:spLocks xmlns:a="http://schemas.openxmlformats.org/drawingml/2006/main" noGrp="1"/>
+            <a:spLocks noGrp="1"/>
           </p:cNvSpPr>
           <p:nvPr>
             <p:ph type="body" idx="1"/>
@@ -521,9 +412,9 @@
         </p:nvSpPr>
         <p:spPr/>
         <p:txBody>
-          <a:bodyPr xmlns:a="http://schemas.openxmlformats.org/drawingml/2006/main"/>
-          <a:lstStyle xmlns:a="http://schemas.openxmlformats.org/drawingml/2006/main"/>
-          <a:p xmlns:a="http://schemas.openxmlformats.org/drawingml/2006/main">
+          <a:bodyPr/>
+          <a:lstStyle/>
+          <a:p>
             <a:r>
               <a:t>Brand source: user-provided SATUUU99 identity boards, 0406AABD-1B31-4585-A3C9-0834773E0AB6.PNG and 1EA5F5B3-5B3A-4519-9F4E-639ABB2B8651.PNG. Artwork and mockups extracted from supplied reference images. Existing spa mood images from the project are generated concept imagery, not documentary photographs. Layout, typography and body copy recreated as editable elements. Brand guidance beyond the reference is proposed implementation guidance.</a:t>
             </a:r>
@@ -534,7 +425,7 @@
         <p:nvSpPr>
           <p:cNvPr id="4" name="Slide Number Placeholder 3"/>
           <p:cNvSpPr>
-            <a:spLocks xmlns:a="http://schemas.openxmlformats.org/drawingml/2006/main" noGrp="1"/>
+            <a:spLocks noGrp="1"/>
           </p:cNvSpPr>
           <p:nvPr>
             <p:ph type="sldNum" idx="5"/>
@@ -542,21 +433,23 @@
         </p:nvSpPr>
         <p:spPr/>
         <p:txBody>
-          <a:bodyPr xmlns:a="http://schemas.openxmlformats.org/drawingml/2006/main"/>
-          <a:lstStyle xmlns:a="http://schemas.openxmlformats.org/drawingml/2006/main"/>
-          <a:p xmlns:a="http://schemas.openxmlformats.org/drawingml/2006/main"/>
+          <a:bodyPr/>
+          <a:lstStyle/>
+          <a:p>
+            <a:endParaRPr/>
+          </a:p>
         </p:txBody>
       </p:sp>
     </p:spTree>
   </p:cSld>
   <p:clrMapOvr>
-    <a:masterClrMapping xmlns:a="http://schemas.openxmlformats.org/drawingml/2006/main"/>
+    <a:masterClrMapping/>
   </p:clrMapOvr>
 </p:notes>
 </file>
 
 <file path=ppt/notesSlides/notesSlide11.xml><?xml version="1.0" encoding="utf-8"?>
-<p:notes xmlns:p="http://schemas.openxmlformats.org/presentationml/2006/main">
+<p:notes xmlns:a="http://schemas.openxmlformats.org/drawingml/2006/main" xmlns:r="http://schemas.openxmlformats.org/officeDocument/2006/relationships" xmlns:p="http://schemas.openxmlformats.org/presentationml/2006/main">
   <p:cSld>
     <p:spTree>
       <p:nvGrpSpPr>
@@ -565,16 +458,21 @@
         <p:nvPr/>
       </p:nvGrpSpPr>
       <p:grpSpPr>
-        <a:xfrm xmlns:a="http://schemas.openxmlformats.org/drawingml/2006/main"/>
+        <a:xfrm>
+          <a:off x="0" y="0"/>
+          <a:ext cx="0" cy="0"/>
+          <a:chOff x="0" y="0"/>
+          <a:chExt cx="0" cy="0"/>
+        </a:xfrm>
       </p:grpSpPr>
       <p:sp>
         <p:nvSpPr>
           <p:cNvPr id="2" name="Slide Image Placeholder 1"/>
           <p:cNvSpPr>
-            <a:spLocks xmlns:a="http://schemas.openxmlformats.org/drawingml/2006/main" noGrp="1"/>
+            <a:spLocks noGrp="1" noRot="1" noChangeAspect="1"/>
           </p:cNvSpPr>
           <p:nvPr>
-            <p:ph type="sldImg" idx="0"/>
+            <p:ph type="sldImg"/>
           </p:nvPr>
         </p:nvSpPr>
         <p:spPr/>
@@ -583,7 +481,7 @@
         <p:nvSpPr>
           <p:cNvPr id="3" name="Notes Placeholder 2"/>
           <p:cNvSpPr>
-            <a:spLocks xmlns:a="http://schemas.openxmlformats.org/drawingml/2006/main" noGrp="1"/>
+            <a:spLocks noGrp="1"/>
           </p:cNvSpPr>
           <p:nvPr>
             <p:ph type="body" idx="1"/>
@@ -591,9 +489,9 @@
         </p:nvSpPr>
         <p:spPr/>
         <p:txBody>
-          <a:bodyPr xmlns:a="http://schemas.openxmlformats.org/drawingml/2006/main"/>
-          <a:lstStyle xmlns:a="http://schemas.openxmlformats.org/drawingml/2006/main"/>
-          <a:p xmlns:a="http://schemas.openxmlformats.org/drawingml/2006/main">
+          <a:bodyPr/>
+          <a:lstStyle/>
+          <a:p>
             <a:r>
               <a:t>Brand source: user-provided SATUUU99 identity boards, 0406AABD-1B31-4585-A3C9-0834773E0AB6.PNG and 1EA5F5B3-5B3A-4519-9F4E-639ABB2B8651.PNG. Artwork and mockups extracted from supplied reference images. Existing spa mood images from the project are generated concept imagery, not documentary photographs. Layout, typography and body copy recreated as editable elements. Brand guidance beyond the reference is proposed implementation guidance.</a:t>
             </a:r>
@@ -604,7 +502,7 @@
         <p:nvSpPr>
           <p:cNvPr id="4" name="Slide Number Placeholder 3"/>
           <p:cNvSpPr>
-            <a:spLocks xmlns:a="http://schemas.openxmlformats.org/drawingml/2006/main" noGrp="1"/>
+            <a:spLocks noGrp="1"/>
           </p:cNvSpPr>
           <p:nvPr>
             <p:ph type="sldNum" idx="5"/>
@@ -612,21 +510,23 @@
         </p:nvSpPr>
         <p:spPr/>
         <p:txBody>
-          <a:bodyPr xmlns:a="http://schemas.openxmlformats.org/drawingml/2006/main"/>
-          <a:lstStyle xmlns:a="http://schemas.openxmlformats.org/drawingml/2006/main"/>
-          <a:p xmlns:a="http://schemas.openxmlformats.org/drawingml/2006/main"/>
+          <a:bodyPr/>
+          <a:lstStyle/>
+          <a:p>
+            <a:endParaRPr/>
+          </a:p>
         </p:txBody>
       </p:sp>
     </p:spTree>
   </p:cSld>
   <p:clrMapOvr>
-    <a:masterClrMapping xmlns:a="http://schemas.openxmlformats.org/drawingml/2006/main"/>
+    <a:masterClrMapping/>
   </p:clrMapOvr>
 </p:notes>
 </file>
 
 <file path=ppt/notesSlides/notesSlide12.xml><?xml version="1.0" encoding="utf-8"?>
-<p:notes xmlns:p="http://schemas.openxmlformats.org/presentationml/2006/main">
+<p:notes xmlns:a="http://schemas.openxmlformats.org/drawingml/2006/main" xmlns:r="http://schemas.openxmlformats.org/officeDocument/2006/relationships" xmlns:p="http://schemas.openxmlformats.org/presentationml/2006/main">
   <p:cSld>
     <p:spTree>
       <p:nvGrpSpPr>
@@ -635,16 +535,21 @@
         <p:nvPr/>
       </p:nvGrpSpPr>
       <p:grpSpPr>
-        <a:xfrm xmlns:a="http://schemas.openxmlformats.org/drawingml/2006/main"/>
+        <a:xfrm>
+          <a:off x="0" y="0"/>
+          <a:ext cx="0" cy="0"/>
+          <a:chOff x="0" y="0"/>
+          <a:chExt cx="0" cy="0"/>
+        </a:xfrm>
       </p:grpSpPr>
       <p:sp>
         <p:nvSpPr>
           <p:cNvPr id="2" name="Slide Image Placeholder 1"/>
           <p:cNvSpPr>
-            <a:spLocks xmlns:a="http://schemas.openxmlformats.org/drawingml/2006/main" noGrp="1"/>
+            <a:spLocks noGrp="1" noRot="1" noChangeAspect="1"/>
           </p:cNvSpPr>
           <p:nvPr>
-            <p:ph type="sldImg" idx="0"/>
+            <p:ph type="sldImg"/>
           </p:nvPr>
         </p:nvSpPr>
         <p:spPr/>
@@ -653,7 +558,7 @@
         <p:nvSpPr>
           <p:cNvPr id="3" name="Notes Placeholder 2"/>
           <p:cNvSpPr>
-            <a:spLocks xmlns:a="http://schemas.openxmlformats.org/drawingml/2006/main" noGrp="1"/>
+            <a:spLocks noGrp="1"/>
           </p:cNvSpPr>
           <p:nvPr>
             <p:ph type="body" idx="1"/>
@@ -661,9 +566,9 @@
         </p:nvSpPr>
         <p:spPr/>
         <p:txBody>
-          <a:bodyPr xmlns:a="http://schemas.openxmlformats.org/drawingml/2006/main"/>
-          <a:lstStyle xmlns:a="http://schemas.openxmlformats.org/drawingml/2006/main"/>
-          <a:p xmlns:a="http://schemas.openxmlformats.org/drawingml/2006/main">
+          <a:bodyPr/>
+          <a:lstStyle/>
+          <a:p>
             <a:r>
               <a:t>Brand source: user-provided SATUUU99 identity boards, 0406AABD-1B31-4585-A3C9-0834773E0AB6.PNG and 1EA5F5B3-5B3A-4519-9F4E-639ABB2B8651.PNG. Artwork and mockups extracted from supplied reference images. Existing spa mood images from the project are generated concept imagery, not documentary photographs. Layout, typography and body copy recreated as editable elements. Brand guidance beyond the reference is proposed implementation guidance.</a:t>
             </a:r>
@@ -674,7 +579,7 @@
         <p:nvSpPr>
           <p:cNvPr id="4" name="Slide Number Placeholder 3"/>
           <p:cNvSpPr>
-            <a:spLocks xmlns:a="http://schemas.openxmlformats.org/drawingml/2006/main" noGrp="1"/>
+            <a:spLocks noGrp="1"/>
           </p:cNvSpPr>
           <p:nvPr>
             <p:ph type="sldNum" idx="5"/>
@@ -682,21 +587,23 @@
         </p:nvSpPr>
         <p:spPr/>
         <p:txBody>
-          <a:bodyPr xmlns:a="http://schemas.openxmlformats.org/drawingml/2006/main"/>
-          <a:lstStyle xmlns:a="http://schemas.openxmlformats.org/drawingml/2006/main"/>
-          <a:p xmlns:a="http://schemas.openxmlformats.org/drawingml/2006/main"/>
+          <a:bodyPr/>
+          <a:lstStyle/>
+          <a:p>
+            <a:endParaRPr/>
+          </a:p>
         </p:txBody>
       </p:sp>
     </p:spTree>
   </p:cSld>
   <p:clrMapOvr>
-    <a:masterClrMapping xmlns:a="http://schemas.openxmlformats.org/drawingml/2006/main"/>
+    <a:masterClrMapping/>
   </p:clrMapOvr>
 </p:notes>
 </file>
 
 <file path=ppt/notesSlides/notesSlide13.xml><?xml version="1.0" encoding="utf-8"?>
-<p:notes xmlns:p="http://schemas.openxmlformats.org/presentationml/2006/main">
+<p:notes xmlns:a="http://schemas.openxmlformats.org/drawingml/2006/main" xmlns:r="http://schemas.openxmlformats.org/officeDocument/2006/relationships" xmlns:p="http://schemas.openxmlformats.org/presentationml/2006/main">
   <p:cSld>
     <p:spTree>
       <p:nvGrpSpPr>
@@ -705,16 +612,21 @@
         <p:nvPr/>
       </p:nvGrpSpPr>
       <p:grpSpPr>
-        <a:xfrm xmlns:a="http://schemas.openxmlformats.org/drawingml/2006/main"/>
+        <a:xfrm>
+          <a:off x="0" y="0"/>
+          <a:ext cx="0" cy="0"/>
+          <a:chOff x="0" y="0"/>
+          <a:chExt cx="0" cy="0"/>
+        </a:xfrm>
       </p:grpSpPr>
       <p:sp>
         <p:nvSpPr>
           <p:cNvPr id="2" name="Slide Image Placeholder 1"/>
           <p:cNvSpPr>
-            <a:spLocks xmlns:a="http://schemas.openxmlformats.org/drawingml/2006/main" noGrp="1"/>
+            <a:spLocks noGrp="1" noRot="1" noChangeAspect="1"/>
           </p:cNvSpPr>
           <p:nvPr>
-            <p:ph type="sldImg" idx="0"/>
+            <p:ph type="sldImg"/>
           </p:nvPr>
         </p:nvSpPr>
         <p:spPr/>
@@ -723,7 +635,7 @@
         <p:nvSpPr>
           <p:cNvPr id="3" name="Notes Placeholder 2"/>
           <p:cNvSpPr>
-            <a:spLocks xmlns:a="http://schemas.openxmlformats.org/drawingml/2006/main" noGrp="1"/>
+            <a:spLocks noGrp="1"/>
           </p:cNvSpPr>
           <p:nvPr>
             <p:ph type="body" idx="1"/>
@@ -731,9 +643,9 @@
         </p:nvSpPr>
         <p:spPr/>
         <p:txBody>
-          <a:bodyPr xmlns:a="http://schemas.openxmlformats.org/drawingml/2006/main"/>
-          <a:lstStyle xmlns:a="http://schemas.openxmlformats.org/drawingml/2006/main"/>
-          <a:p xmlns:a="http://schemas.openxmlformats.org/drawingml/2006/main">
+          <a:bodyPr/>
+          <a:lstStyle/>
+          <a:p>
             <a:r>
               <a:t>Brand source: user-provided SATUUU99 identity boards, 0406AABD-1B31-4585-A3C9-0834773E0AB6.PNG and 1EA5F5B3-5B3A-4519-9F4E-639ABB2B8651.PNG. Artwork and mockups extracted from supplied reference images. Existing spa mood images from the project are generated concept imagery, not documentary photographs. Layout, typography and body copy recreated as editable elements. Brand guidance beyond the reference is proposed implementation guidance.</a:t>
             </a:r>
@@ -744,7 +656,7 @@
         <p:nvSpPr>
           <p:cNvPr id="4" name="Slide Number Placeholder 3"/>
           <p:cNvSpPr>
-            <a:spLocks xmlns:a="http://schemas.openxmlformats.org/drawingml/2006/main" noGrp="1"/>
+            <a:spLocks noGrp="1"/>
           </p:cNvSpPr>
           <p:nvPr>
             <p:ph type="sldNum" idx="5"/>
@@ -752,21 +664,23 @@
         </p:nvSpPr>
         <p:spPr/>
         <p:txBody>
-          <a:bodyPr xmlns:a="http://schemas.openxmlformats.org/drawingml/2006/main"/>
-          <a:lstStyle xmlns:a="http://schemas.openxmlformats.org/drawingml/2006/main"/>
-          <a:p xmlns:a="http://schemas.openxmlformats.org/drawingml/2006/main"/>
+          <a:bodyPr/>
+          <a:lstStyle/>
+          <a:p>
+            <a:endParaRPr/>
+          </a:p>
         </p:txBody>
       </p:sp>
     </p:spTree>
   </p:cSld>
   <p:clrMapOvr>
-    <a:masterClrMapping xmlns:a="http://schemas.openxmlformats.org/drawingml/2006/main"/>
+    <a:masterClrMapping/>
   </p:clrMapOvr>
 </p:notes>
 </file>
 
 <file path=ppt/notesSlides/notesSlide14.xml><?xml version="1.0" encoding="utf-8"?>
-<p:notes xmlns:p="http://schemas.openxmlformats.org/presentationml/2006/main">
+<p:notes xmlns:a="http://schemas.openxmlformats.org/drawingml/2006/main" xmlns:r="http://schemas.openxmlformats.org/officeDocument/2006/relationships" xmlns:p="http://schemas.openxmlformats.org/presentationml/2006/main">
   <p:cSld>
     <p:spTree>
       <p:nvGrpSpPr>
@@ -775,16 +689,21 @@
         <p:nvPr/>
       </p:nvGrpSpPr>
       <p:grpSpPr>
-        <a:xfrm xmlns:a="http://schemas.openxmlformats.org/drawingml/2006/main"/>
+        <a:xfrm>
+          <a:off x="0" y="0"/>
+          <a:ext cx="0" cy="0"/>
+          <a:chOff x="0" y="0"/>
+          <a:chExt cx="0" cy="0"/>
+        </a:xfrm>
       </p:grpSpPr>
       <p:sp>
         <p:nvSpPr>
           <p:cNvPr id="2" name="Slide Image Placeholder 1"/>
           <p:cNvSpPr>
-            <a:spLocks xmlns:a="http://schemas.openxmlformats.org/drawingml/2006/main" noGrp="1"/>
+            <a:spLocks noGrp="1" noRot="1" noChangeAspect="1"/>
           </p:cNvSpPr>
           <p:nvPr>
-            <p:ph type="sldImg" idx="0"/>
+            <p:ph type="sldImg"/>
           </p:nvPr>
         </p:nvSpPr>
         <p:spPr/>
@@ -793,7 +712,7 @@
         <p:nvSpPr>
           <p:cNvPr id="3" name="Notes Placeholder 2"/>
           <p:cNvSpPr>
-            <a:spLocks xmlns:a="http://schemas.openxmlformats.org/drawingml/2006/main" noGrp="1"/>
+            <a:spLocks noGrp="1"/>
           </p:cNvSpPr>
           <p:nvPr>
             <p:ph type="body" idx="1"/>
@@ -801,9 +720,9 @@
         </p:nvSpPr>
         <p:spPr/>
         <p:txBody>
-          <a:bodyPr xmlns:a="http://schemas.openxmlformats.org/drawingml/2006/main"/>
-          <a:lstStyle xmlns:a="http://schemas.openxmlformats.org/drawingml/2006/main"/>
-          <a:p xmlns:a="http://schemas.openxmlformats.org/drawingml/2006/main">
+          <a:bodyPr/>
+          <a:lstStyle/>
+          <a:p>
             <a:r>
               <a:t>Brand source: user-provided SATUUU99 identity boards, 0406AABD-1B31-4585-A3C9-0834773E0AB6.PNG and 1EA5F5B3-5B3A-4519-9F4E-639ABB2B8651.PNG. Artwork and mockups extracted from supplied reference images. Existing spa mood images from the project are generated concept imagery, not documentary photographs. Layout, typography and body copy recreated as editable elements. Brand guidance beyond the reference is proposed implementation guidance.</a:t>
             </a:r>
@@ -814,7 +733,7 @@
         <p:nvSpPr>
           <p:cNvPr id="4" name="Slide Number Placeholder 3"/>
           <p:cNvSpPr>
-            <a:spLocks xmlns:a="http://schemas.openxmlformats.org/drawingml/2006/main" noGrp="1"/>
+            <a:spLocks noGrp="1"/>
           </p:cNvSpPr>
           <p:nvPr>
             <p:ph type="sldNum" idx="5"/>
@@ -822,21 +741,23 @@
         </p:nvSpPr>
         <p:spPr/>
         <p:txBody>
-          <a:bodyPr xmlns:a="http://schemas.openxmlformats.org/drawingml/2006/main"/>
-          <a:lstStyle xmlns:a="http://schemas.openxmlformats.org/drawingml/2006/main"/>
-          <a:p xmlns:a="http://schemas.openxmlformats.org/drawingml/2006/main"/>
+          <a:bodyPr/>
+          <a:lstStyle/>
+          <a:p>
+            <a:endParaRPr/>
+          </a:p>
         </p:txBody>
       </p:sp>
     </p:spTree>
   </p:cSld>
   <p:clrMapOvr>
-    <a:masterClrMapping xmlns:a="http://schemas.openxmlformats.org/drawingml/2006/main"/>
+    <a:masterClrMapping/>
   </p:clrMapOvr>
 </p:notes>
 </file>
 
 <file path=ppt/notesSlides/notesSlide2.xml><?xml version="1.0" encoding="utf-8"?>
-<p:notes xmlns:p="http://schemas.openxmlformats.org/presentationml/2006/main">
+<p:notes xmlns:a="http://schemas.openxmlformats.org/drawingml/2006/main" xmlns:r="http://schemas.openxmlformats.org/officeDocument/2006/relationships" xmlns:p="http://schemas.openxmlformats.org/presentationml/2006/main">
   <p:cSld>
     <p:spTree>
       <p:nvGrpSpPr>
@@ -845,16 +766,21 @@
         <p:nvPr/>
       </p:nvGrpSpPr>
       <p:grpSpPr>
-        <a:xfrm xmlns:a="http://schemas.openxmlformats.org/drawingml/2006/main"/>
+        <a:xfrm>
+          <a:off x="0" y="0"/>
+          <a:ext cx="0" cy="0"/>
+          <a:chOff x="0" y="0"/>
+          <a:chExt cx="0" cy="0"/>
+        </a:xfrm>
       </p:grpSpPr>
       <p:sp>
         <p:nvSpPr>
           <p:cNvPr id="2" name="Slide Image Placeholder 1"/>
           <p:cNvSpPr>
-            <a:spLocks xmlns:a="http://schemas.openxmlformats.org/drawingml/2006/main" noGrp="1"/>
+            <a:spLocks noGrp="1" noRot="1" noChangeAspect="1"/>
           </p:cNvSpPr>
           <p:nvPr>
-            <p:ph type="sldImg" idx="0"/>
+            <p:ph type="sldImg"/>
           </p:nvPr>
         </p:nvSpPr>
         <p:spPr/>
@@ -863,7 +789,7 @@
         <p:nvSpPr>
           <p:cNvPr id="3" name="Notes Placeholder 2"/>
           <p:cNvSpPr>
-            <a:spLocks xmlns:a="http://schemas.openxmlformats.org/drawingml/2006/main" noGrp="1"/>
+            <a:spLocks noGrp="1"/>
           </p:cNvSpPr>
           <p:nvPr>
             <p:ph type="body" idx="1"/>
@@ -871,9 +797,9 @@
         </p:nvSpPr>
         <p:spPr/>
         <p:txBody>
-          <a:bodyPr xmlns:a="http://schemas.openxmlformats.org/drawingml/2006/main"/>
-          <a:lstStyle xmlns:a="http://schemas.openxmlformats.org/drawingml/2006/main"/>
-          <a:p xmlns:a="http://schemas.openxmlformats.org/drawingml/2006/main">
+          <a:bodyPr/>
+          <a:lstStyle/>
+          <a:p>
             <a:r>
               <a:t>Brand source: user-provided SATUUU99 identity boards, 0406AABD-1B31-4585-A3C9-0834773E0AB6.PNG and 1EA5F5B3-5B3A-4519-9F4E-639ABB2B8651.PNG. Artwork and mockups extracted from supplied reference images. Existing spa mood images from the project are generated concept imagery, not documentary photographs. Layout, typography and body copy recreated as editable elements. Brand guidance beyond the reference is proposed implementation guidance.</a:t>
             </a:r>
@@ -884,7 +810,7 @@
         <p:nvSpPr>
           <p:cNvPr id="4" name="Slide Number Placeholder 3"/>
           <p:cNvSpPr>
-            <a:spLocks xmlns:a="http://schemas.openxmlformats.org/drawingml/2006/main" noGrp="1"/>
+            <a:spLocks noGrp="1"/>
           </p:cNvSpPr>
           <p:nvPr>
             <p:ph type="sldNum" idx="5"/>
@@ -892,21 +818,23 @@
         </p:nvSpPr>
         <p:spPr/>
         <p:txBody>
-          <a:bodyPr xmlns:a="http://schemas.openxmlformats.org/drawingml/2006/main"/>
-          <a:lstStyle xmlns:a="http://schemas.openxmlformats.org/drawingml/2006/main"/>
-          <a:p xmlns:a="http://schemas.openxmlformats.org/drawingml/2006/main"/>
+          <a:bodyPr/>
+          <a:lstStyle/>
+          <a:p>
+            <a:endParaRPr/>
+          </a:p>
         </p:txBody>
       </p:sp>
     </p:spTree>
   </p:cSld>
   <p:clrMapOvr>
-    <a:masterClrMapping xmlns:a="http://schemas.openxmlformats.org/drawingml/2006/main"/>
+    <a:masterClrMapping/>
   </p:clrMapOvr>
 </p:notes>
 </file>
 
 <file path=ppt/notesSlides/notesSlide3.xml><?xml version="1.0" encoding="utf-8"?>
-<p:notes xmlns:p="http://schemas.openxmlformats.org/presentationml/2006/main">
+<p:notes xmlns:a="http://schemas.openxmlformats.org/drawingml/2006/main" xmlns:r="http://schemas.openxmlformats.org/officeDocument/2006/relationships" xmlns:p="http://schemas.openxmlformats.org/presentationml/2006/main">
   <p:cSld>
     <p:spTree>
       <p:nvGrpSpPr>
@@ -915,16 +843,21 @@
         <p:nvPr/>
       </p:nvGrpSpPr>
       <p:grpSpPr>
-        <a:xfrm xmlns:a="http://schemas.openxmlformats.org/drawingml/2006/main"/>
+        <a:xfrm>
+          <a:off x="0" y="0"/>
+          <a:ext cx="0" cy="0"/>
+          <a:chOff x="0" y="0"/>
+          <a:chExt cx="0" cy="0"/>
+        </a:xfrm>
       </p:grpSpPr>
       <p:sp>
         <p:nvSpPr>
           <p:cNvPr id="2" name="Slide Image Placeholder 1"/>
           <p:cNvSpPr>
-            <a:spLocks xmlns:a="http://schemas.openxmlformats.org/drawingml/2006/main" noGrp="1"/>
+            <a:spLocks noGrp="1" noRot="1" noChangeAspect="1"/>
           </p:cNvSpPr>
           <p:nvPr>
-            <p:ph type="sldImg" idx="0"/>
+            <p:ph type="sldImg"/>
           </p:nvPr>
         </p:nvSpPr>
         <p:spPr/>
@@ -933,7 +866,7 @@
         <p:nvSpPr>
           <p:cNvPr id="3" name="Notes Placeholder 2"/>
           <p:cNvSpPr>
-            <a:spLocks xmlns:a="http://schemas.openxmlformats.org/drawingml/2006/main" noGrp="1"/>
+            <a:spLocks noGrp="1"/>
           </p:cNvSpPr>
           <p:nvPr>
             <p:ph type="body" idx="1"/>
@@ -941,9 +874,9 @@
         </p:nvSpPr>
         <p:spPr/>
         <p:txBody>
-          <a:bodyPr xmlns:a="http://schemas.openxmlformats.org/drawingml/2006/main"/>
-          <a:lstStyle xmlns:a="http://schemas.openxmlformats.org/drawingml/2006/main"/>
-          <a:p xmlns:a="http://schemas.openxmlformats.org/drawingml/2006/main">
+          <a:bodyPr/>
+          <a:lstStyle/>
+          <a:p>
             <a:r>
               <a:t>Brand source: user-provided SATUUU99 identity boards, 0406AABD-1B31-4585-A3C9-0834773E0AB6.PNG and 1EA5F5B3-5B3A-4519-9F4E-639ABB2B8651.PNG. Artwork and mockups extracted from supplied reference images. Existing spa mood images from the project are generated concept imagery, not documentary photographs. Layout, typography and body copy recreated as editable elements. Brand guidance beyond the reference is proposed implementation guidance.</a:t>
             </a:r>
@@ -954,7 +887,7 @@
         <p:nvSpPr>
           <p:cNvPr id="4" name="Slide Number Placeholder 3"/>
           <p:cNvSpPr>
-            <a:spLocks xmlns:a="http://schemas.openxmlformats.org/drawingml/2006/main" noGrp="1"/>
+            <a:spLocks noGrp="1"/>
           </p:cNvSpPr>
           <p:nvPr>
             <p:ph type="sldNum" idx="5"/>
@@ -962,21 +895,23 @@
         </p:nvSpPr>
         <p:spPr/>
         <p:txBody>
-          <a:bodyPr xmlns:a="http://schemas.openxmlformats.org/drawingml/2006/main"/>
-          <a:lstStyle xmlns:a="http://schemas.openxmlformats.org/drawingml/2006/main"/>
-          <a:p xmlns:a="http://schemas.openxmlformats.org/drawingml/2006/main"/>
+          <a:bodyPr/>
+          <a:lstStyle/>
+          <a:p>
+            <a:endParaRPr/>
+          </a:p>
         </p:txBody>
       </p:sp>
     </p:spTree>
   </p:cSld>
   <p:clrMapOvr>
-    <a:masterClrMapping xmlns:a="http://schemas.openxmlformats.org/drawingml/2006/main"/>
+    <a:masterClrMapping/>
   </p:clrMapOvr>
 </p:notes>
 </file>
 
 <file path=ppt/notesSlides/notesSlide4.xml><?xml version="1.0" encoding="utf-8"?>
-<p:notes xmlns:p="http://schemas.openxmlformats.org/presentationml/2006/main">
+<p:notes xmlns:a="http://schemas.openxmlformats.org/drawingml/2006/main" xmlns:r="http://schemas.openxmlformats.org/officeDocument/2006/relationships" xmlns:p="http://schemas.openxmlformats.org/presentationml/2006/main">
   <p:cSld>
     <p:spTree>
       <p:nvGrpSpPr>
@@ -985,16 +920,21 @@
         <p:nvPr/>
       </p:nvGrpSpPr>
       <p:grpSpPr>
-        <a:xfrm xmlns:a="http://schemas.openxmlformats.org/drawingml/2006/main"/>
+        <a:xfrm>
+          <a:off x="0" y="0"/>
+          <a:ext cx="0" cy="0"/>
+          <a:chOff x="0" y="0"/>
+          <a:chExt cx="0" cy="0"/>
+        </a:xfrm>
       </p:grpSpPr>
       <p:sp>
         <p:nvSpPr>
           <p:cNvPr id="2" name="Slide Image Placeholder 1"/>
           <p:cNvSpPr>
-            <a:spLocks xmlns:a="http://schemas.openxmlformats.org/drawingml/2006/main" noGrp="1"/>
+            <a:spLocks noGrp="1" noRot="1" noChangeAspect="1"/>
           </p:cNvSpPr>
           <p:nvPr>
-            <p:ph type="sldImg" idx="0"/>
+            <p:ph type="sldImg"/>
           </p:nvPr>
         </p:nvSpPr>
         <p:spPr/>
@@ -1003,7 +943,7 @@
         <p:nvSpPr>
           <p:cNvPr id="3" name="Notes Placeholder 2"/>
           <p:cNvSpPr>
-            <a:spLocks xmlns:a="http://schemas.openxmlformats.org/drawingml/2006/main" noGrp="1"/>
+            <a:spLocks noGrp="1"/>
           </p:cNvSpPr>
           <p:nvPr>
             <p:ph type="body" idx="1"/>
@@ -1011,9 +951,9 @@
         </p:nvSpPr>
         <p:spPr/>
         <p:txBody>
-          <a:bodyPr xmlns:a="http://schemas.openxmlformats.org/drawingml/2006/main"/>
-          <a:lstStyle xmlns:a="http://schemas.openxmlformats.org/drawingml/2006/main"/>
-          <a:p xmlns:a="http://schemas.openxmlformats.org/drawingml/2006/main">
+          <a:bodyPr/>
+          <a:lstStyle/>
+          <a:p>
             <a:r>
               <a:t>Brand source: user-provided SATUUU99 identity boards, 0406AABD-1B31-4585-A3C9-0834773E0AB6.PNG and 1EA5F5B3-5B3A-4519-9F4E-639ABB2B8651.PNG. Artwork and mockups extracted from supplied reference images. Existing spa mood images from the project are generated concept imagery, not documentary photographs. Layout, typography and body copy recreated as editable elements. Brand guidance beyond the reference is proposed implementation guidance.</a:t>
             </a:r>
@@ -1024,7 +964,7 @@
         <p:nvSpPr>
           <p:cNvPr id="4" name="Slide Number Placeholder 3"/>
           <p:cNvSpPr>
-            <a:spLocks xmlns:a="http://schemas.openxmlformats.org/drawingml/2006/main" noGrp="1"/>
+            <a:spLocks noGrp="1"/>
           </p:cNvSpPr>
           <p:nvPr>
             <p:ph type="sldNum" idx="5"/>
@@ -1032,21 +972,23 @@
         </p:nvSpPr>
         <p:spPr/>
         <p:txBody>
-          <a:bodyPr xmlns:a="http://schemas.openxmlformats.org/drawingml/2006/main"/>
-          <a:lstStyle xmlns:a="http://schemas.openxmlformats.org/drawingml/2006/main"/>
-          <a:p xmlns:a="http://schemas.openxmlformats.org/drawingml/2006/main"/>
+          <a:bodyPr/>
+          <a:lstStyle/>
+          <a:p>
+            <a:endParaRPr/>
+          </a:p>
         </p:txBody>
       </p:sp>
     </p:spTree>
   </p:cSld>
   <p:clrMapOvr>
-    <a:masterClrMapping xmlns:a="http://schemas.openxmlformats.org/drawingml/2006/main"/>
+    <a:masterClrMapping/>
   </p:clrMapOvr>
 </p:notes>
 </file>
 
 <file path=ppt/notesSlides/notesSlide5.xml><?xml version="1.0" encoding="utf-8"?>
-<p:notes xmlns:p="http://schemas.openxmlformats.org/presentationml/2006/main">
+<p:notes xmlns:a="http://schemas.openxmlformats.org/drawingml/2006/main" xmlns:r="http://schemas.openxmlformats.org/officeDocument/2006/relationships" xmlns:p="http://schemas.openxmlformats.org/presentationml/2006/main">
   <p:cSld>
     <p:spTree>
       <p:nvGrpSpPr>
@@ -1055,16 +997,21 @@
         <p:nvPr/>
       </p:nvGrpSpPr>
       <p:grpSpPr>
-        <a:xfrm xmlns:a="http://schemas.openxmlformats.org/drawingml/2006/main"/>
+        <a:xfrm>
+          <a:off x="0" y="0"/>
+          <a:ext cx="0" cy="0"/>
+          <a:chOff x="0" y="0"/>
+          <a:chExt cx="0" cy="0"/>
+        </a:xfrm>
       </p:grpSpPr>
       <p:sp>
         <p:nvSpPr>
           <p:cNvPr id="2" name="Slide Image Placeholder 1"/>
           <p:cNvSpPr>
-            <a:spLocks xmlns:a="http://schemas.openxmlformats.org/drawingml/2006/main" noGrp="1"/>
+            <a:spLocks noGrp="1" noRot="1" noChangeAspect="1"/>
           </p:cNvSpPr>
           <p:nvPr>
-            <p:ph type="sldImg" idx="0"/>
+            <p:ph type="sldImg"/>
           </p:nvPr>
         </p:nvSpPr>
         <p:spPr/>
@@ -1073,7 +1020,7 @@
         <p:nvSpPr>
           <p:cNvPr id="3" name="Notes Placeholder 2"/>
           <p:cNvSpPr>
-            <a:spLocks xmlns:a="http://schemas.openxmlformats.org/drawingml/2006/main" noGrp="1"/>
+            <a:spLocks noGrp="1"/>
           </p:cNvSpPr>
           <p:nvPr>
             <p:ph type="body" idx="1"/>
@@ -1081,9 +1028,9 @@
         </p:nvSpPr>
         <p:spPr/>
         <p:txBody>
-          <a:bodyPr xmlns:a="http://schemas.openxmlformats.org/drawingml/2006/main"/>
-          <a:lstStyle xmlns:a="http://schemas.openxmlformats.org/drawingml/2006/main"/>
-          <a:p xmlns:a="http://schemas.openxmlformats.org/drawingml/2006/main">
+          <a:bodyPr/>
+          <a:lstStyle/>
+          <a:p>
             <a:r>
               <a:t>Brand source: user-provided SATUUU99 identity boards, 0406AABD-1B31-4585-A3C9-0834773E0AB6.PNG and 1EA5F5B3-5B3A-4519-9F4E-639ABB2B8651.PNG. Artwork and mockups extracted from supplied reference images. Existing spa mood images from the project are generated concept imagery, not documentary photographs. Layout, typography and body copy recreated as editable elements. Brand guidance beyond the reference is proposed implementation guidance.</a:t>
             </a:r>
@@ -1094,7 +1041,7 @@
         <p:nvSpPr>
           <p:cNvPr id="4" name="Slide Number Placeholder 3"/>
           <p:cNvSpPr>
-            <a:spLocks xmlns:a="http://schemas.openxmlformats.org/drawingml/2006/main" noGrp="1"/>
+            <a:spLocks noGrp="1"/>
           </p:cNvSpPr>
           <p:nvPr>
             <p:ph type="sldNum" idx="5"/>
@@ -1102,21 +1049,23 @@
         </p:nvSpPr>
         <p:spPr/>
         <p:txBody>
-          <a:bodyPr xmlns:a="http://schemas.openxmlformats.org/drawingml/2006/main"/>
-          <a:lstStyle xmlns:a="http://schemas.openxmlformats.org/drawingml/2006/main"/>
-          <a:p xmlns:a="http://schemas.openxmlformats.org/drawingml/2006/main"/>
+          <a:bodyPr/>
+          <a:lstStyle/>
+          <a:p>
+            <a:endParaRPr/>
+          </a:p>
         </p:txBody>
       </p:sp>
     </p:spTree>
   </p:cSld>
   <p:clrMapOvr>
-    <a:masterClrMapping xmlns:a="http://schemas.openxmlformats.org/drawingml/2006/main"/>
+    <a:masterClrMapping/>
   </p:clrMapOvr>
 </p:notes>
 </file>
 
 <file path=ppt/notesSlides/notesSlide6.xml><?xml version="1.0" encoding="utf-8"?>
-<p:notes xmlns:p="http://schemas.openxmlformats.org/presentationml/2006/main">
+<p:notes xmlns:a="http://schemas.openxmlformats.org/drawingml/2006/main" xmlns:r="http://schemas.openxmlformats.org/officeDocument/2006/relationships" xmlns:p="http://schemas.openxmlformats.org/presentationml/2006/main">
   <p:cSld>
     <p:spTree>
       <p:nvGrpSpPr>
@@ -1125,16 +1074,21 @@
         <p:nvPr/>
       </p:nvGrpSpPr>
       <p:grpSpPr>
-        <a:xfrm xmlns:a="http://schemas.openxmlformats.org/drawingml/2006/main"/>
+        <a:xfrm>
+          <a:off x="0" y="0"/>
+          <a:ext cx="0" cy="0"/>
+          <a:chOff x="0" y="0"/>
+          <a:chExt cx="0" cy="0"/>
+        </a:xfrm>
       </p:grpSpPr>
       <p:sp>
         <p:nvSpPr>
           <p:cNvPr id="2" name="Slide Image Placeholder 1"/>
           <p:cNvSpPr>
-            <a:spLocks xmlns:a="http://schemas.openxmlformats.org/drawingml/2006/main" noGrp="1"/>
+            <a:spLocks noGrp="1" noRot="1" noChangeAspect="1"/>
           </p:cNvSpPr>
           <p:nvPr>
-            <p:ph type="sldImg" idx="0"/>
+            <p:ph type="sldImg"/>
           </p:nvPr>
         </p:nvSpPr>
         <p:spPr/>
@@ -1143,7 +1097,7 @@
         <p:nvSpPr>
           <p:cNvPr id="3" name="Notes Placeholder 2"/>
           <p:cNvSpPr>
-            <a:spLocks xmlns:a="http://schemas.openxmlformats.org/drawingml/2006/main" noGrp="1"/>
+            <a:spLocks noGrp="1"/>
           </p:cNvSpPr>
           <p:nvPr>
             <p:ph type="body" idx="1"/>
@@ -1151,9 +1105,9 @@
         </p:nvSpPr>
         <p:spPr/>
         <p:txBody>
-          <a:bodyPr xmlns:a="http://schemas.openxmlformats.org/drawingml/2006/main"/>
-          <a:lstStyle xmlns:a="http://schemas.openxmlformats.org/drawingml/2006/main"/>
-          <a:p xmlns:a="http://schemas.openxmlformats.org/drawingml/2006/main">
+          <a:bodyPr/>
+          <a:lstStyle/>
+          <a:p>
             <a:r>
               <a:t>Brand source: user-provided SATUUU99 identity boards, 0406AABD-1B31-4585-A3C9-0834773E0AB6.PNG and 1EA5F5B3-5B3A-4519-9F4E-639ABB2B8651.PNG. Artwork and mockups extracted from supplied reference images. Existing spa mood images from the project are generated concept imagery, not documentary photographs. Layout, typography and body copy recreated as editable elements. Brand guidance beyond the reference is proposed implementation guidance.</a:t>
             </a:r>
@@ -1164,7 +1118,7 @@
         <p:nvSpPr>
           <p:cNvPr id="4" name="Slide Number Placeholder 3"/>
           <p:cNvSpPr>
-            <a:spLocks xmlns:a="http://schemas.openxmlformats.org/drawingml/2006/main" noGrp="1"/>
+            <a:spLocks noGrp="1"/>
           </p:cNvSpPr>
           <p:nvPr>
             <p:ph type="sldNum" idx="5"/>
@@ -1172,21 +1126,23 @@
         </p:nvSpPr>
         <p:spPr/>
         <p:txBody>
-          <a:bodyPr xmlns:a="http://schemas.openxmlformats.org/drawingml/2006/main"/>
-          <a:lstStyle xmlns:a="http://schemas.openxmlformats.org/drawingml/2006/main"/>
-          <a:p xmlns:a="http://schemas.openxmlformats.org/drawingml/2006/main"/>
+          <a:bodyPr/>
+          <a:lstStyle/>
+          <a:p>
+            <a:endParaRPr/>
+          </a:p>
         </p:txBody>
       </p:sp>
     </p:spTree>
   </p:cSld>
   <p:clrMapOvr>
-    <a:masterClrMapping xmlns:a="http://schemas.openxmlformats.org/drawingml/2006/main"/>
+    <a:masterClrMapping/>
   </p:clrMapOvr>
 </p:notes>
 </file>
 
 <file path=ppt/notesSlides/notesSlide7.xml><?xml version="1.0" encoding="utf-8"?>
-<p:notes xmlns:p="http://schemas.openxmlformats.org/presentationml/2006/main">
+<p:notes xmlns:a="http://schemas.openxmlformats.org/drawingml/2006/main" xmlns:r="http://schemas.openxmlformats.org/officeDocument/2006/relationships" xmlns:p="http://schemas.openxmlformats.org/presentationml/2006/main">
   <p:cSld>
     <p:spTree>
       <p:nvGrpSpPr>
@@ -1195,16 +1151,21 @@
         <p:nvPr/>
       </p:nvGrpSpPr>
       <p:grpSpPr>
-        <a:xfrm xmlns:a="http://schemas.openxmlformats.org/drawingml/2006/main"/>
+        <a:xfrm>
+          <a:off x="0" y="0"/>
+          <a:ext cx="0" cy="0"/>
+          <a:chOff x="0" y="0"/>
+          <a:chExt cx="0" cy="0"/>
+        </a:xfrm>
       </p:grpSpPr>
       <p:sp>
         <p:nvSpPr>
           <p:cNvPr id="2" name="Slide Image Placeholder 1"/>
           <p:cNvSpPr>
-            <a:spLocks xmlns:a="http://schemas.openxmlformats.org/drawingml/2006/main" noGrp="1"/>
+            <a:spLocks noGrp="1" noRot="1" noChangeAspect="1"/>
           </p:cNvSpPr>
           <p:nvPr>
-            <p:ph type="sldImg" idx="0"/>
+            <p:ph type="sldImg"/>
           </p:nvPr>
         </p:nvSpPr>
         <p:spPr/>
@@ -1213,7 +1174,7 @@
         <p:nvSpPr>
           <p:cNvPr id="3" name="Notes Placeholder 2"/>
           <p:cNvSpPr>
-            <a:spLocks xmlns:a="http://schemas.openxmlformats.org/drawingml/2006/main" noGrp="1"/>
+            <a:spLocks noGrp="1"/>
           </p:cNvSpPr>
           <p:nvPr>
             <p:ph type="body" idx="1"/>
@@ -1221,9 +1182,9 @@
         </p:nvSpPr>
         <p:spPr/>
         <p:txBody>
-          <a:bodyPr xmlns:a="http://schemas.openxmlformats.org/drawingml/2006/main"/>
-          <a:lstStyle xmlns:a="http://schemas.openxmlformats.org/drawingml/2006/main"/>
-          <a:p xmlns:a="http://schemas.openxmlformats.org/drawingml/2006/main">
+          <a:bodyPr/>
+          <a:lstStyle/>
+          <a:p>
             <a:r>
               <a:t>Brand source: user-provided SATUUU99 identity boards, 0406AABD-1B31-4585-A3C9-0834773E0AB6.PNG and 1EA5F5B3-5B3A-4519-9F4E-639ABB2B8651.PNG. Artwork and mockups extracted from supplied reference images. Existing spa mood images from the project are generated concept imagery, not documentary photographs. Layout, typography and body copy recreated as editable elements. Brand guidance beyond the reference is proposed implementation guidance.</a:t>
             </a:r>
@@ -1234,7 +1195,7 @@
         <p:nvSpPr>
           <p:cNvPr id="4" name="Slide Number Placeholder 3"/>
           <p:cNvSpPr>
-            <a:spLocks xmlns:a="http://schemas.openxmlformats.org/drawingml/2006/main" noGrp="1"/>
+            <a:spLocks noGrp="1"/>
           </p:cNvSpPr>
           <p:nvPr>
             <p:ph type="sldNum" idx="5"/>
@@ -1242,21 +1203,23 @@
         </p:nvSpPr>
         <p:spPr/>
         <p:txBody>
-          <a:bodyPr xmlns:a="http://schemas.openxmlformats.org/drawingml/2006/main"/>
-          <a:lstStyle xmlns:a="http://schemas.openxmlformats.org/drawingml/2006/main"/>
-          <a:p xmlns:a="http://schemas.openxmlformats.org/drawingml/2006/main"/>
+          <a:bodyPr/>
+          <a:lstStyle/>
+          <a:p>
+            <a:endParaRPr/>
+          </a:p>
         </p:txBody>
       </p:sp>
     </p:spTree>
   </p:cSld>
   <p:clrMapOvr>
-    <a:masterClrMapping xmlns:a="http://schemas.openxmlformats.org/drawingml/2006/main"/>
+    <a:masterClrMapping/>
   </p:clrMapOvr>
 </p:notes>
 </file>
 
 <file path=ppt/notesSlides/notesSlide8.xml><?xml version="1.0" encoding="utf-8"?>
-<p:notes xmlns:p="http://schemas.openxmlformats.org/presentationml/2006/main">
+<p:notes xmlns:a="http://schemas.openxmlformats.org/drawingml/2006/main" xmlns:r="http://schemas.openxmlformats.org/officeDocument/2006/relationships" xmlns:p="http://schemas.openxmlformats.org/presentationml/2006/main">
   <p:cSld>
     <p:spTree>
       <p:nvGrpSpPr>
@@ -1265,16 +1228,21 @@
         <p:nvPr/>
       </p:nvGrpSpPr>
       <p:grpSpPr>
-        <a:xfrm xmlns:a="http://schemas.openxmlformats.org/drawingml/2006/main"/>
+        <a:xfrm>
+          <a:off x="0" y="0"/>
+          <a:ext cx="0" cy="0"/>
+          <a:chOff x="0" y="0"/>
+          <a:chExt cx="0" cy="0"/>
+        </a:xfrm>
       </p:grpSpPr>
       <p:sp>
         <p:nvSpPr>
           <p:cNvPr id="2" name="Slide Image Placeholder 1"/>
           <p:cNvSpPr>
-            <a:spLocks xmlns:a="http://schemas.openxmlformats.org/drawingml/2006/main" noGrp="1"/>
+            <a:spLocks noGrp="1" noRot="1" noChangeAspect="1"/>
           </p:cNvSpPr>
           <p:nvPr>
-            <p:ph type="sldImg" idx="0"/>
+            <p:ph type="sldImg"/>
           </p:nvPr>
         </p:nvSpPr>
         <p:spPr/>
@@ -1283,7 +1251,7 @@
         <p:nvSpPr>
           <p:cNvPr id="3" name="Notes Placeholder 2"/>
           <p:cNvSpPr>
-            <a:spLocks xmlns:a="http://schemas.openxmlformats.org/drawingml/2006/main" noGrp="1"/>
+            <a:spLocks noGrp="1"/>
           </p:cNvSpPr>
           <p:nvPr>
             <p:ph type="body" idx="1"/>
@@ -1291,9 +1259,9 @@
         </p:nvSpPr>
         <p:spPr/>
         <p:txBody>
-          <a:bodyPr xmlns:a="http://schemas.openxmlformats.org/drawingml/2006/main"/>
-          <a:lstStyle xmlns:a="http://schemas.openxmlformats.org/drawingml/2006/main"/>
-          <a:p xmlns:a="http://schemas.openxmlformats.org/drawingml/2006/main">
+          <a:bodyPr/>
+          <a:lstStyle/>
+          <a:p>
             <a:r>
               <a:t>Brand source: user-provided SATUUU99 identity boards, 0406AABD-1B31-4585-A3C9-0834773E0AB6.PNG and 1EA5F5B3-5B3A-4519-9F4E-639ABB2B8651.PNG. Artwork and mockups extracted from supplied reference images. Existing spa mood images from the project are generated concept imagery, not documentary photographs. Layout, typography and body copy recreated as editable elements. Brand guidance beyond the reference is proposed implementation guidance.</a:t>
             </a:r>
@@ -1304,7 +1272,7 @@
         <p:nvSpPr>
           <p:cNvPr id="4" name="Slide Number Placeholder 3"/>
           <p:cNvSpPr>
-            <a:spLocks xmlns:a="http://schemas.openxmlformats.org/drawingml/2006/main" noGrp="1"/>
+            <a:spLocks noGrp="1"/>
           </p:cNvSpPr>
           <p:nvPr>
             <p:ph type="sldNum" idx="5"/>
@@ -1312,21 +1280,23 @@
         </p:nvSpPr>
         <p:spPr/>
         <p:txBody>
-          <a:bodyPr xmlns:a="http://schemas.openxmlformats.org/drawingml/2006/main"/>
-          <a:lstStyle xmlns:a="http://schemas.openxmlformats.org/drawingml/2006/main"/>
-          <a:p xmlns:a="http://schemas.openxmlformats.org/drawingml/2006/main"/>
+          <a:bodyPr/>
+          <a:lstStyle/>
+          <a:p>
+            <a:endParaRPr/>
+          </a:p>
         </p:txBody>
       </p:sp>
     </p:spTree>
   </p:cSld>
   <p:clrMapOvr>
-    <a:masterClrMapping xmlns:a="http://schemas.openxmlformats.org/drawingml/2006/main"/>
+    <a:masterClrMapping/>
   </p:clrMapOvr>
 </p:notes>
 </file>
 
 <file path=ppt/notesSlides/notesSlide9.xml><?xml version="1.0" encoding="utf-8"?>
-<p:notes xmlns:p="http://schemas.openxmlformats.org/presentationml/2006/main">
+<p:notes xmlns:a="http://schemas.openxmlformats.org/drawingml/2006/main" xmlns:r="http://schemas.openxmlformats.org/officeDocument/2006/relationships" xmlns:p="http://schemas.openxmlformats.org/presentationml/2006/main">
   <p:cSld>
     <p:spTree>
       <p:nvGrpSpPr>
@@ -1335,16 +1305,21 @@
         <p:nvPr/>
       </p:nvGrpSpPr>
       <p:grpSpPr>
-        <a:xfrm xmlns:a="http://schemas.openxmlformats.org/drawingml/2006/main"/>
+        <a:xfrm>
+          <a:off x="0" y="0"/>
+          <a:ext cx="0" cy="0"/>
+          <a:chOff x="0" y="0"/>
+          <a:chExt cx="0" cy="0"/>
+        </a:xfrm>
       </p:grpSpPr>
       <p:sp>
         <p:nvSpPr>
           <p:cNvPr id="2" name="Slide Image Placeholder 1"/>
           <p:cNvSpPr>
-            <a:spLocks xmlns:a="http://schemas.openxmlformats.org/drawingml/2006/main" noGrp="1"/>
+            <a:spLocks noGrp="1" noRot="1" noChangeAspect="1"/>
           </p:cNvSpPr>
           <p:nvPr>
-            <p:ph type="sldImg" idx="0"/>
+            <p:ph type="sldImg"/>
           </p:nvPr>
         </p:nvSpPr>
         <p:spPr/>
@@ -1353,7 +1328,7 @@
         <p:nvSpPr>
           <p:cNvPr id="3" name="Notes Placeholder 2"/>
           <p:cNvSpPr>
-            <a:spLocks xmlns:a="http://schemas.openxmlformats.org/drawingml/2006/main" noGrp="1"/>
+            <a:spLocks noGrp="1"/>
           </p:cNvSpPr>
           <p:nvPr>
             <p:ph type="body" idx="1"/>
@@ -1361,9 +1336,9 @@
         </p:nvSpPr>
         <p:spPr/>
         <p:txBody>
-          <a:bodyPr xmlns:a="http://schemas.openxmlformats.org/drawingml/2006/main"/>
-          <a:lstStyle xmlns:a="http://schemas.openxmlformats.org/drawingml/2006/main"/>
-          <a:p xmlns:a="http://schemas.openxmlformats.org/drawingml/2006/main">
+          <a:bodyPr/>
+          <a:lstStyle/>
+          <a:p>
             <a:r>
               <a:t>Brand source: user-provided SATUUU99 identity boards, 0406AABD-1B31-4585-A3C9-0834773E0AB6.PNG and 1EA5F5B3-5B3A-4519-9F4E-639ABB2B8651.PNG. Artwork and mockups extracted from supplied reference images. Existing spa mood images from the project are generated concept imagery, not documentary photographs. Layout, typography and body copy recreated as editable elements. Brand guidance beyond the reference is proposed implementation guidance.</a:t>
             </a:r>
@@ -1374,7 +1349,7 @@
         <p:nvSpPr>
           <p:cNvPr id="4" name="Slide Number Placeholder 3"/>
           <p:cNvSpPr>
-            <a:spLocks xmlns:a="http://schemas.openxmlformats.org/drawingml/2006/main" noGrp="1"/>
+            <a:spLocks noGrp="1"/>
           </p:cNvSpPr>
           <p:nvPr>
             <p:ph type="sldNum" idx="5"/>
@@ -1382,21 +1357,23 @@
         </p:nvSpPr>
         <p:spPr/>
         <p:txBody>
-          <a:bodyPr xmlns:a="http://schemas.openxmlformats.org/drawingml/2006/main"/>
-          <a:lstStyle xmlns:a="http://schemas.openxmlformats.org/drawingml/2006/main"/>
-          <a:p xmlns:a="http://schemas.openxmlformats.org/drawingml/2006/main"/>
+          <a:bodyPr/>
+          <a:lstStyle/>
+          <a:p>
+            <a:endParaRPr/>
+          </a:p>
         </p:txBody>
       </p:sp>
     </p:spTree>
   </p:cSld>
   <p:clrMapOvr>
-    <a:masterClrMapping xmlns:a="http://schemas.openxmlformats.org/drawingml/2006/main"/>
+    <a:masterClrMapping/>
   </p:clrMapOvr>
 </p:notes>
 </file>
 
 <file path=ppt/slideLayouts/slideLayout1.xml><?xml version="1.0" encoding="utf-8"?>
-<p:sldLayout xmlns:p="http://schemas.openxmlformats.org/presentationml/2006/main" type="title">
+<p:sldLayout xmlns:a="http://schemas.openxmlformats.org/drawingml/2006/main" xmlns:r="http://schemas.openxmlformats.org/officeDocument/2006/relationships" xmlns:p="http://schemas.openxmlformats.org/presentationml/2006/main" type="title">
   <p:cSld name="Title Slide">
     <p:spTree>
       <p:nvGrpSpPr>
@@ -1405,19 +1382,27 @@
         <p:nvPr/>
       </p:nvGrpSpPr>
       <p:grpSpPr>
-        <a:xfrm xmlns:a="http://schemas.openxmlformats.org/drawingml/2006/main"/>
+        <a:xfrm>
+          <a:off x="0" y="0"/>
+          <a:ext cx="0" cy="0"/>
+          <a:chOff x="0" y="0"/>
+          <a:chExt cx="0" cy="0"/>
+        </a:xfrm>
       </p:grpSpPr>
     </p:spTree>
   </p:cSld>
+  <p:clrMapOvr>
+    <a:masterClrMapping/>
+  </p:clrMapOvr>
 </p:sldLayout>
 </file>
 
 <file path=ppt/slideMasters/slideMaster1.xml><?xml version="1.0" encoding="utf-8"?>
-<p:sldMaster xmlns:p="http://schemas.openxmlformats.org/presentationml/2006/main">
+<p:sldMaster xmlns:a="http://schemas.openxmlformats.org/drawingml/2006/main" xmlns:r="http://schemas.openxmlformats.org/officeDocument/2006/relationships" xmlns:p="http://schemas.openxmlformats.org/presentationml/2006/main">
   <p:cSld name="Master">
     <p:bg>
       <p:bgRef idx="1001">
-        <a:schemeClr xmlns:a="http://schemas.openxmlformats.org/drawingml/2006/main" val="bg1"/>
+        <a:schemeClr val="bg1"/>
       </p:bgRef>
     </p:bg>
     <p:spTree>
@@ -1427,17 +1412,22 @@
         <p:nvPr/>
       </p:nvGrpSpPr>
       <p:grpSpPr>
-        <a:xfrm xmlns:a="http://schemas.openxmlformats.org/drawingml/2006/main"/>
+        <a:xfrm>
+          <a:off x="0" y="0"/>
+          <a:ext cx="0" cy="0"/>
+          <a:chOff x="0" y="0"/>
+          <a:chExt cx="0" cy="0"/>
+        </a:xfrm>
       </p:grpSpPr>
     </p:spTree>
   </p:cSld>
   <p:clrMap bg1="lt1" tx1="dk1" bg2="lt2" tx2="dk2" accent1="accent1" accent2="accent2" accent3="accent3" accent4="accent4" accent5="accent5" accent6="accent6" hlink="hlink" folHlink="folHlink"/>
   <p:sldLayoutIdLst>
-    <p:sldLayoutId xmlns:r="http://schemas.openxmlformats.org/officeDocument/2006/relationships" id="2147483649" r:id="R64b9dac26daf4ee3"/>
+    <p:sldLayoutId id="2147483649" r:id="rId1"/>
   </p:sldLayoutIdLst>
   <p:txStyles>
     <p:titleStyle>
-      <a:lvl1pPr xmlns:a="http://schemas.openxmlformats.org/drawingml/2006/main" algn="l">
+      <a:lvl1pPr algn="l">
         <a:lnSpc>
           <a:spcPct val="90000"/>
         </a:lnSpc>
@@ -1456,7 +1446,7 @@
       </a:lvl1pPr>
     </p:titleStyle>
     <p:bodyStyle>
-      <a:lvl1pPr xmlns:a="http://schemas.openxmlformats.org/drawingml/2006/main" marL="228600" indent="-228600" algn="l">
+      <a:lvl1pPr marL="228600" indent="-228600" algn="l">
         <a:lnSpc>
           <a:spcPct val="90000"/>
         </a:lnSpc>
@@ -1473,7 +1463,7 @@
           <a:cs typeface="+mn-lt"/>
         </a:defRPr>
       </a:lvl1pPr>
-      <a:lvl2pPr xmlns:a="http://schemas.openxmlformats.org/drawingml/2006/main" marL="685800" indent="-228600" algn="l">
+      <a:lvl2pPr marL="685800" indent="-228600" algn="l">
         <a:lnSpc>
           <a:spcPct val="90000"/>
         </a:lnSpc>
@@ -1490,7 +1480,7 @@
           <a:cs typeface="+mn-lt"/>
         </a:defRPr>
       </a:lvl2pPr>
-      <a:lvl3pPr xmlns:a="http://schemas.openxmlformats.org/drawingml/2006/main" marL="1143000" indent="-228600" algn="l">
+      <a:lvl3pPr marL="1143000" indent="-228600" algn="l">
         <a:lnSpc>
           <a:spcPct val="90000"/>
         </a:lnSpc>
@@ -1507,7 +1497,7 @@
           <a:cs typeface="+mn-lt"/>
         </a:defRPr>
       </a:lvl3pPr>
-      <a:lvl4pPr xmlns:a="http://schemas.openxmlformats.org/drawingml/2006/main" marL="1600200" indent="-228600" algn="l">
+      <a:lvl4pPr marL="1600200" indent="-228600" algn="l">
         <a:lnSpc>
           <a:spcPct val="90000"/>
         </a:lnSpc>
@@ -1524,7 +1514,7 @@
           <a:cs typeface="+mn-lt"/>
         </a:defRPr>
       </a:lvl4pPr>
-      <a:lvl5pPr xmlns:a="http://schemas.openxmlformats.org/drawingml/2006/main" marL="2057400" indent="-228600" algn="l">
+      <a:lvl5pPr marL="2057400" indent="-228600" algn="l">
         <a:lnSpc>
           <a:spcPct val="90000"/>
         </a:lnSpc>
@@ -1541,7 +1531,7 @@
           <a:cs typeface="+mn-lt"/>
         </a:defRPr>
       </a:lvl5pPr>
-      <a:lvl6pPr xmlns:a="http://schemas.openxmlformats.org/drawingml/2006/main" marL="2514600" indent="-228600" algn="l">
+      <a:lvl6pPr marL="2514600" indent="-228600" algn="l">
         <a:lnSpc>
           <a:spcPct val="90000"/>
         </a:lnSpc>
@@ -1558,7 +1548,7 @@
           <a:cs typeface="+mn-lt"/>
         </a:defRPr>
       </a:lvl6pPr>
-      <a:lvl7pPr xmlns:a="http://schemas.openxmlformats.org/drawingml/2006/main" marL="2971800" indent="-228600" algn="l">
+      <a:lvl7pPr marL="2971800" indent="-228600" algn="l">
         <a:lnSpc>
           <a:spcPct val="90000"/>
         </a:lnSpc>
@@ -1575,7 +1565,7 @@
           <a:cs typeface="+mn-lt"/>
         </a:defRPr>
       </a:lvl7pPr>
-      <a:lvl8pPr xmlns:a="http://schemas.openxmlformats.org/drawingml/2006/main" marL="3429000" indent="-228600" algn="l">
+      <a:lvl8pPr marL="3429000" indent="-228600" algn="l">
         <a:lnSpc>
           <a:spcPct val="90000"/>
         </a:lnSpc>
@@ -1592,7 +1582,7 @@
           <a:cs typeface="+mn-lt"/>
         </a:defRPr>
       </a:lvl8pPr>
-      <a:lvl9pPr xmlns:a="http://schemas.openxmlformats.org/drawingml/2006/main" marL="3886200" indent="-228600" algn="l">
+      <a:lvl9pPr marL="3886200" indent="-228600" algn="l">
         <a:lnSpc>
           <a:spcPct val="90000"/>
         </a:lnSpc>
@@ -1611,7 +1601,7 @@
       </a:lvl9pPr>
     </p:bodyStyle>
     <p:otherStyle>
-      <a:lvl1pPr xmlns:a="http://schemas.openxmlformats.org/drawingml/2006/main" marL="0" algn="l">
+      <a:lvl1pPr marL="0" algn="l">
         <a:buNone/>
         <a:defRPr sz="1800">
           <a:solidFill>
@@ -1622,7 +1612,7 @@
           <a:cs typeface="+mn-lt"/>
         </a:defRPr>
       </a:lvl1pPr>
-      <a:lvl2pPr xmlns:a="http://schemas.openxmlformats.org/drawingml/2006/main" marL="457200" algn="l">
+      <a:lvl2pPr marL="457200" algn="l">
         <a:buNone/>
         <a:defRPr sz="1800">
           <a:solidFill>
@@ -1633,7 +1623,7 @@
           <a:cs typeface="+mn-lt"/>
         </a:defRPr>
       </a:lvl2pPr>
-      <a:lvl3pPr xmlns:a="http://schemas.openxmlformats.org/drawingml/2006/main" marL="914400" algn="l">
+      <a:lvl3pPr marL="914400" algn="l">
         <a:buNone/>
         <a:defRPr sz="1800">
           <a:solidFill>
@@ -1644,7 +1634,7 @@
           <a:cs typeface="+mn-lt"/>
         </a:defRPr>
       </a:lvl3pPr>
-      <a:lvl4pPr xmlns:a="http://schemas.openxmlformats.org/drawingml/2006/main" marL="1371600" algn="l">
+      <a:lvl4pPr marL="1371600" algn="l">
         <a:buNone/>
         <a:defRPr sz="1800">
           <a:solidFill>
@@ -1655,7 +1645,7 @@
           <a:cs typeface="+mn-lt"/>
         </a:defRPr>
       </a:lvl4pPr>
-      <a:lvl5pPr xmlns:a="http://schemas.openxmlformats.org/drawingml/2006/main" marL="1828800" algn="l">
+      <a:lvl5pPr marL="1828800" algn="l">
         <a:buNone/>
         <a:defRPr sz="1800">
           <a:solidFill>
@@ -1666,7 +1656,7 @@
           <a:cs typeface="+mn-lt"/>
         </a:defRPr>
       </a:lvl5pPr>
-      <a:lvl6pPr xmlns:a="http://schemas.openxmlformats.org/drawingml/2006/main" marL="2286000" algn="l">
+      <a:lvl6pPr marL="2286000" algn="l">
         <a:buNone/>
         <a:defRPr sz="1800">
           <a:solidFill>
@@ -1677,7 +1667,7 @@
           <a:cs typeface="+mn-lt"/>
         </a:defRPr>
       </a:lvl6pPr>
-      <a:lvl7pPr xmlns:a="http://schemas.openxmlformats.org/drawingml/2006/main" marL="2743200" algn="l">
+      <a:lvl7pPr marL="2743200" algn="l">
         <a:buNone/>
         <a:defRPr sz="1800">
           <a:solidFill>
@@ -1688,7 +1678,7 @@
           <a:cs typeface="+mn-lt"/>
         </a:defRPr>
       </a:lvl7pPr>
-      <a:lvl8pPr xmlns:a="http://schemas.openxmlformats.org/drawingml/2006/main" marL="3200400" algn="l">
+      <a:lvl8pPr marL="3200400" algn="l">
         <a:buNone/>
         <a:defRPr sz="1800">
           <a:solidFill>
@@ -1699,7 +1689,7 @@
           <a:cs typeface="+mn-lt"/>
         </a:defRPr>
       </a:lvl8pPr>
-      <a:lvl9pPr xmlns:a="http://schemas.openxmlformats.org/drawingml/2006/main" marL="3657600" algn="l">
+      <a:lvl9pPr marL="3657600" algn="l">
         <a:buNone/>
         <a:defRPr sz="1800">
           <a:solidFill>
@@ -1715,259 +1705,15 @@
 </p:sldMaster>
 </file>
 
-<file path=ppt/slideMasters/theme/theme2.xml><?xml version="1.0" encoding="utf-8"?>
-<a:theme xmlns:a="http://schemas.openxmlformats.org/drawingml/2006/main" name="ChatGPT">
-  <a:themeElements>
-    <a:clrScheme name="ChatGPT">
-      <a:dk1>
-        <a:srgbClr val="000000"/>
-      </a:dk1>
-      <a:lt1>
-        <a:srgbClr val="FFFFFF"/>
-      </a:lt1>
-      <a:dk2>
-        <a:srgbClr val="0E2841"/>
-      </a:dk2>
-      <a:lt2>
-        <a:srgbClr val="E8E8E8"/>
-      </a:lt2>
-      <a:accent1>
-        <a:srgbClr val="156082"/>
-      </a:accent1>
-      <a:accent2>
-        <a:srgbClr val="E97132"/>
-      </a:accent2>
-      <a:accent3>
-        <a:srgbClr val="196B24"/>
-      </a:accent3>
-      <a:accent4>
-        <a:srgbClr val="0F9ED5"/>
-      </a:accent4>
-      <a:accent5>
-        <a:srgbClr val="A02B93"/>
-      </a:accent5>
-      <a:accent6>
-        <a:srgbClr val="4EA72E"/>
-      </a:accent6>
-      <a:hlink>
-        <a:srgbClr val="467886"/>
-      </a:hlink>
-      <a:folHlink>
-        <a:srgbClr val="96607D"/>
-      </a:folHlink>
-    </a:clrScheme>
-    <a:fontScheme name="Office">
-      <a:majorFont>
-        <a:latin typeface="Calibri Light"/>
-        <a:ea typeface="Calibri Light"/>
-        <a:cs typeface="Calibri Light"/>
-      </a:majorFont>
-      <a:minorFont>
-        <a:latin typeface="Calibri"/>
-        <a:ea typeface="Calibri"/>
-        <a:cs typeface="Calibri"/>
-      </a:minorFont>
-    </a:fontScheme>
-    <a:fmtScheme name="ChatGPT">
-      <a:fillStyleLst>
-        <a:solidFill>
-          <a:schemeClr val="phClr"/>
-        </a:solidFill>
-        <a:gradFill>
-          <a:gsLst>
-            <a:gs pos="0">
-              <a:schemeClr val="phClr">
-                <a:tint val="67000"/>
-                <a:lumMod val="110000"/>
-                <a:satMod val="105000"/>
-              </a:schemeClr>
-            </a:gs>
-            <a:gs pos="50000">
-              <a:schemeClr val="phClr">
-                <a:tint val="73000"/>
-                <a:lumMod val="105000"/>
-                <a:satMod val="103000"/>
-              </a:schemeClr>
-            </a:gs>
-            <a:gs pos="100000">
-              <a:schemeClr val="phClr">
-                <a:tint val="81000"/>
-                <a:lumMod val="105000"/>
-                <a:satMod val="109000"/>
-              </a:schemeClr>
-            </a:gs>
-          </a:gsLst>
-          <a:lin ang="5400000" scaled="0"/>
-        </a:gradFill>
-        <a:gradFill>
-          <a:gsLst>
-            <a:gs pos="0">
-              <a:schemeClr val="phClr">
-                <a:tint val="94000"/>
-                <a:lumMod val="102000"/>
-                <a:satMod val="103000"/>
-              </a:schemeClr>
-            </a:gs>
-            <a:gs pos="50000">
-              <a:schemeClr val="phClr">
-                <a:shade val="100000"/>
-                <a:lumMod val="100000"/>
-                <a:satMod val="110000"/>
-              </a:schemeClr>
-            </a:gs>
-            <a:gs pos="100000">
-              <a:schemeClr val="phClr">
-                <a:shade val="78000"/>
-                <a:lumMod val="99000"/>
-                <a:satMod val="120000"/>
-              </a:schemeClr>
-            </a:gs>
-          </a:gsLst>
-          <a:lin ang="5400000" scaled="0"/>
-        </a:gradFill>
-      </a:fillStyleLst>
-      <a:lnStyleLst>
-        <a:ln w="12700">
-          <a:solidFill>
-            <a:schemeClr val="phClr"/>
-          </a:solidFill>
-          <a:prstDash val="solid"/>
-        </a:ln>
-        <a:ln w="19050">
-          <a:solidFill>
-            <a:schemeClr val="phClr"/>
-          </a:solidFill>
-          <a:prstDash val="solid"/>
-        </a:ln>
-        <a:ln w="25400">
-          <a:solidFill>
-            <a:schemeClr val="phClr"/>
-          </a:solidFill>
-          <a:prstDash val="solid"/>
-        </a:ln>
-      </a:lnStyleLst>
-      <a:effectStyleLst>
-        <a:effectStyle>
-          <a:effectLst/>
-        </a:effectStyle>
-        <a:effectStyle>
-          <a:effectLst/>
-        </a:effectStyle>
-        <a:effectStyle>
-          <a:effectLst>
-            <a:outerShdw blurRad="57150" dist="19050" dir="5400000">
-              <a:srgbClr val="000000">
-                <a:alpha val="16000"/>
-              </a:srgbClr>
-            </a:outerShdw>
-          </a:effectLst>
-        </a:effectStyle>
-        <a:effectStyle>
-          <a:effectLst>
-            <a:outerShdw blurRad="19050" dist="9525" dir="5400000">
-              <a:srgbClr val="000000">
-                <a:alpha val="6000"/>
-              </a:srgbClr>
-            </a:outerShdw>
-          </a:effectLst>
-        </a:effectStyle>
-        <a:effectStyle>
-          <a:effectLst>
-            <a:outerShdw blurRad="28575" dist="9525" dir="5400000">
-              <a:srgbClr val="000000">
-                <a:alpha val="8000"/>
-              </a:srgbClr>
-            </a:outerShdw>
-          </a:effectLst>
-        </a:effectStyle>
-        <a:effectStyle>
-          <a:effectLst>
-            <a:outerShdw blurRad="57150" dist="19050" dir="5400000">
-              <a:srgbClr val="000000">
-                <a:alpha val="10000"/>
-              </a:srgbClr>
-            </a:outerShdw>
-          </a:effectLst>
-        </a:effectStyle>
-        <a:effectStyle>
-          <a:effectLst>
-            <a:outerShdw blurRad="114300" dist="38100" dir="5400000">
-              <a:srgbClr val="000000">
-                <a:alpha val="12000"/>
-              </a:srgbClr>
-            </a:outerShdw>
-          </a:effectLst>
-        </a:effectStyle>
-        <a:effectStyle>
-          <a:effectLst>
-            <a:outerShdw blurRad="171450" dist="57150" dir="5400000">
-              <a:srgbClr val="000000">
-                <a:alpha val="16000"/>
-              </a:srgbClr>
-            </a:outerShdw>
-          </a:effectLst>
-        </a:effectStyle>
-        <a:effectStyle>
-          <a:effectLst>
-            <a:outerShdw blurRad="266700" dist="95250" dir="5400000">
-              <a:srgbClr val="000000">
-                <a:alpha val="24000"/>
-              </a:srgbClr>
-            </a:outerShdw>
-          </a:effectLst>
-        </a:effectStyle>
-      </a:effectStyleLst>
-      <a:bgFillStyleLst>
-        <a:solidFill>
-          <a:schemeClr val="phClr"/>
-        </a:solidFill>
-        <a:solidFill>
-          <a:schemeClr val="phClr">
-            <a:tint val="95000"/>
-            <a:satMod val="170000"/>
-          </a:schemeClr>
-        </a:solidFill>
-        <a:gradFill>
-          <a:gsLst>
-            <a:gs pos="0">
-              <a:schemeClr val="phClr">
-                <a:tint val="93000"/>
-                <a:shade val="98000"/>
-                <a:lumMod val="102000"/>
-                <a:satMod val="150000"/>
-              </a:schemeClr>
-            </a:gs>
-            <a:gs pos="50000">
-              <a:schemeClr val="phClr">
-                <a:tint val="98000"/>
-                <a:shade val="90000"/>
-                <a:lumMod val="103000"/>
-                <a:satMod val="130000"/>
-              </a:schemeClr>
-            </a:gs>
-            <a:gs pos="100000">
-              <a:schemeClr val="phClr">
-                <a:shade val="63000"/>
-                <a:satMod val="120000"/>
-              </a:schemeClr>
-            </a:gs>
-          </a:gsLst>
-          <a:lin ang="5400000" scaled="0"/>
-        </a:gradFill>
-      </a:bgFillStyleLst>
-    </a:fmtScheme>
-  </a:themeElements>
-</a:theme>
-</file>
-
 <file path=ppt/slides/slide1.xml><?xml version="1.0" encoding="utf-8"?>
-<p:sld xmlns:p="http://schemas.openxmlformats.org/presentationml/2006/main">
+<p:sld xmlns:a="http://schemas.openxmlformats.org/drawingml/2006/main" xmlns:r="http://schemas.openxmlformats.org/officeDocument/2006/relationships" xmlns:p="http://schemas.openxmlformats.org/presentationml/2006/main">
   <p:cSld>
     <p:bg>
       <p:bgPr>
-        <a:solidFill xmlns:a="http://schemas.openxmlformats.org/drawingml/2006/main">
+        <a:solidFill>
           <a:srgbClr val="F6F3ED"/>
         </a:solidFill>
+        <a:effectLst/>
       </p:bgPr>
     </p:bg>
     <p:spTree>
@@ -1977,41 +1723,46 @@
         <p:nvPr/>
       </p:nvGrpSpPr>
       <p:grpSpPr>
-        <a:xfrm xmlns:a="http://schemas.openxmlformats.org/drawingml/2006/main"/>
+        <a:xfrm>
+          <a:off x="0" y="0"/>
+          <a:ext cx="0" cy="0"/>
+          <a:chOff x="0" y="0"/>
+          <a:chExt cx="0" cy="0"/>
+        </a:xfrm>
       </p:grpSpPr>
       <p:sp>
         <p:nvSpPr>
-          <p:cNvPr id="5" name="">
-            <a:extLst xmlns:a="http://schemas.openxmlformats.org/drawingml/2006/main">
+          <p:cNvPr id="5" name="Rectangle 4">
+            <a:extLst>
               <a:ext uri="{FF2B5EF4-FFF2-40B4-BE49-F238E27FC236}">
                 <a16:creationId xmlns:a16="http://schemas.microsoft.com/office/drawing/2014/main" id="{0E14C95A-AFF1-4F8C-A42C-15454F428CCF}"/>
               </a:ext>
             </a:extLst>
           </p:cNvPr>
           <p:cNvSpPr>
-            <a:spLocks xmlns:a="http://schemas.openxmlformats.org/drawingml/2006/main" noGrp="1"/>
-          </p:cNvSpPr>
-          <p:nvPr/>
-        </p:nvSpPr>
-        <p:spPr>
-          <a:xfrm xmlns:a="http://schemas.openxmlformats.org/drawingml/2006/main">
+            <a:spLocks noGrp="1"/>
+          </p:cNvSpPr>
+          <p:nvPr/>
+        </p:nvSpPr>
+        <p:spPr>
+          <a:xfrm>
             <a:off x="714375" y="457200"/>
             <a:ext cx="12858750" cy="304800"/>
           </a:xfrm>
-          <a:prstGeom xmlns:a="http://schemas.openxmlformats.org/drawingml/2006/main" prst="rect">
-            <a:avLst/>
-          </a:prstGeom>
-          <a:noFill xmlns:a="http://schemas.openxmlformats.org/drawingml/2006/main"/>
-          <a:ln xmlns:a="http://schemas.openxmlformats.org/drawingml/2006/main" w="0">
+          <a:prstGeom prst="rect">
+            <a:avLst/>
+          </a:prstGeom>
+          <a:noFill/>
+          <a:ln w="0">
             <a:noFill/>
           </a:ln>
         </p:spPr>
         <p:txBody>
-          <a:bodyPr xmlns:a="http://schemas.openxmlformats.org/drawingml/2006/main">
+          <a:bodyPr>
             <a:noAutofit/>
           </a:bodyPr>
-          <a:lstStyle xmlns:a="http://schemas.openxmlformats.org/drawingml/2006/main"/>
-          <a:p xmlns:a="http://schemas.openxmlformats.org/drawingml/2006/main">
+          <a:lstStyle/>
+          <a:p>
             <a:pPr>
               <a:defRPr sz="1125">
                 <a:solidFill>
@@ -2038,37 +1789,37 @@
       </p:sp>
       <p:sp>
         <p:nvSpPr>
-          <p:cNvPr id="2" name="">
-            <a:extLst xmlns:a="http://schemas.openxmlformats.org/drawingml/2006/main">
+          <p:cNvPr id="2" name="Rectangle 1">
+            <a:extLst>
               <a:ext uri="{FF2B5EF4-FFF2-40B4-BE49-F238E27FC236}">
                 <a16:creationId xmlns:a16="http://schemas.microsoft.com/office/drawing/2014/main" id="{013BF63D-BC37-4F73-B7D8-F3633421AD37}"/>
               </a:ext>
             </a:extLst>
           </p:cNvPr>
           <p:cNvSpPr>
-            <a:spLocks xmlns:a="http://schemas.openxmlformats.org/drawingml/2006/main" noGrp="1"/>
-          </p:cNvSpPr>
-          <p:nvPr/>
-        </p:nvSpPr>
-        <p:spPr>
-          <a:xfrm xmlns:a="http://schemas.openxmlformats.org/drawingml/2006/main">
+            <a:spLocks noGrp="1"/>
+          </p:cNvSpPr>
+          <p:nvPr/>
+        </p:nvSpPr>
+        <p:spPr>
+          <a:xfrm>
             <a:off x="13906500" y="7905750"/>
             <a:ext cx="666750" cy="285750"/>
           </a:xfrm>
-          <a:prstGeom xmlns:a="http://schemas.openxmlformats.org/drawingml/2006/main" prst="rect">
-            <a:avLst/>
-          </a:prstGeom>
-          <a:noFill xmlns:a="http://schemas.openxmlformats.org/drawingml/2006/main"/>
-          <a:ln xmlns:a="http://schemas.openxmlformats.org/drawingml/2006/main" w="0">
+          <a:prstGeom prst="rect">
+            <a:avLst/>
+          </a:prstGeom>
+          <a:noFill/>
+          <a:ln w="0">
             <a:noFill/>
           </a:ln>
         </p:spPr>
         <p:txBody>
-          <a:bodyPr xmlns:a="http://schemas.openxmlformats.org/drawingml/2006/main">
+          <a:bodyPr>
             <a:noAutofit/>
           </a:bodyPr>
-          <a:lstStyle xmlns:a="http://schemas.openxmlformats.org/drawingml/2006/main"/>
-          <a:p xmlns:a="http://schemas.openxmlformats.org/drawingml/2006/main">
+          <a:lstStyle/>
+          <a:p>
             <a:pPr>
               <a:defRPr sz="1125">
                 <a:solidFill>
@@ -2095,83 +1846,26 @@
       </p:sp>
       <p:pic>
         <p:nvPicPr>
-          <p:cNvPr id="7" name=""/>
+          <p:cNvPr id="7" name="Picture 6"/>
           <p:cNvPicPr>
-            <a:picLocks xmlns:a="http://schemas.openxmlformats.org/drawingml/2006/main" noChangeAspect="1"/>
+            <a:picLocks noChangeAspect="1"/>
           </p:cNvPicPr>
           <p:nvPr/>
         </p:nvPicPr>
         <p:blipFill>
-          <a:blip xmlns:r="http://schemas.openxmlformats.org/officeDocument/2006/relationships" xmlns:a="http://schemas.openxmlformats.org/drawingml/2006/main" r:embed="R8ce1f602dbe1439a"/>
-          <a:stretch xmlns:a="http://schemas.openxmlformats.org/drawingml/2006/main"/>
+          <a:blip r:embed="rId3"/>
+          <a:stretch/>
         </p:blipFill>
         <p:spPr>
-          <a:xfrm xmlns:a="http://schemas.openxmlformats.org/drawingml/2006/main">
+          <a:xfrm>
             <a:off x="4762500" y="1908086"/>
             <a:ext cx="5715000" cy="4051479"/>
           </a:xfrm>
-          <a:prstGeom xmlns:a="http://schemas.openxmlformats.org/drawingml/2006/main" prst="rect">
+          <a:prstGeom prst="rect">
             <a:avLst/>
           </a:prstGeom>
         </p:spPr>
       </p:pic>
-      <p:sp>
-        <p:nvSpPr>
-          <p:cNvPr id="4" name="">
-            <a:extLst xmlns:a="http://schemas.openxmlformats.org/drawingml/2006/main">
-              <a:ext uri="{FF2B5EF4-FFF2-40B4-BE49-F238E27FC236}">
-                <a16:creationId xmlns:a16="http://schemas.microsoft.com/office/drawing/2014/main" id="{8E52EB74-B6F3-4175-94EC-3D2FDF60D316}"/>
-              </a:ext>
-            </a:extLst>
-          </p:cNvPr>
-          <p:cNvSpPr>
-            <a:spLocks xmlns:a="http://schemas.openxmlformats.org/drawingml/2006/main" noGrp="1"/>
-          </p:cNvSpPr>
-          <p:nvPr/>
-        </p:nvSpPr>
-        <p:spPr>
-          <a:xfrm xmlns:a="http://schemas.openxmlformats.org/drawingml/2006/main">
-            <a:off x="5524500" y="7000875"/>
-            <a:ext cx="6667500" cy="381000"/>
-          </a:xfrm>
-          <a:prstGeom xmlns:a="http://schemas.openxmlformats.org/drawingml/2006/main" prst="rect">
-            <a:avLst/>
-          </a:prstGeom>
-          <a:noFill xmlns:a="http://schemas.openxmlformats.org/drawingml/2006/main"/>
-          <a:ln xmlns:a="http://schemas.openxmlformats.org/drawingml/2006/main" w="0">
-            <a:noFill/>
-          </a:ln>
-        </p:spPr>
-        <p:txBody>
-          <a:bodyPr xmlns:a="http://schemas.openxmlformats.org/drawingml/2006/main">
-            <a:noAutofit/>
-          </a:bodyPr>
-          <a:lstStyle xmlns:a="http://schemas.openxmlformats.org/drawingml/2006/main"/>
-          <a:p xmlns:a="http://schemas.openxmlformats.org/drawingml/2006/main">
-            <a:pPr>
-              <a:defRPr sz="1425">
-                <a:solidFill>
-                  <a:srgbClr val="3A332B"/>
-                </a:solidFill>
-                <a:latin typeface="Plus Jakarta Sans"/>
-                <a:ea typeface="Plus Jakarta Sans"/>
-                <a:cs typeface="Plus Jakarta Sans"/>
-              </a:defRPr>
-            </a:pPr>
-            <a:r>
-              <a:rPr sz="1425">
-                <a:solidFill>
-                  <a:srgbClr val="3A332B"/>
-                </a:solidFill>
-                <a:latin typeface="Plus Jakarta Sans"/>
-                <a:ea typeface="Plus Jakarta Sans"/>
-                <a:cs typeface="Plus Jakarta Sans"/>
-              </a:rPr>
-              <a:t>A MORE MEANINGFUL TOMORROW</a:t>
-            </a:r>
-          </a:p>
-        </p:txBody>
-      </p:sp>
     </p:spTree>
     <p:extLst>
       <p:ext uri="{BB962C8B-B14F-4D97-AF65-F5344CB8AC3E}">
@@ -2179,17 +1873,21 @@
       </p:ext>
     </p:extLst>
   </p:cSld>
+  <p:clrMapOvr>
+    <a:masterClrMapping/>
+  </p:clrMapOvr>
 </p:sld>
 </file>
 
 <file path=ppt/slides/slide10.xml><?xml version="1.0" encoding="utf-8"?>
-<p:sld xmlns:p="http://schemas.openxmlformats.org/presentationml/2006/main">
+<p:sld xmlns:a="http://schemas.openxmlformats.org/drawingml/2006/main" xmlns:r="http://schemas.openxmlformats.org/officeDocument/2006/relationships" xmlns:p="http://schemas.openxmlformats.org/presentationml/2006/main">
   <p:cSld>
     <p:bg>
       <p:bgPr>
-        <a:solidFill xmlns:a="http://schemas.openxmlformats.org/drawingml/2006/main">
+        <a:solidFill>
           <a:srgbClr val="F6F3ED"/>
         </a:solidFill>
+        <a:effectLst/>
       </p:bgPr>
     </p:bg>
     <p:spTree>
@@ -2199,41 +1897,46 @@
         <p:nvPr/>
       </p:nvGrpSpPr>
       <p:grpSpPr>
-        <a:xfrm xmlns:a="http://schemas.openxmlformats.org/drawingml/2006/main"/>
+        <a:xfrm>
+          <a:off x="0" y="0"/>
+          <a:ext cx="0" cy="0"/>
+          <a:chOff x="0" y="0"/>
+          <a:chExt cx="0" cy="0"/>
+        </a:xfrm>
       </p:grpSpPr>
       <p:sp>
         <p:nvSpPr>
-          <p:cNvPr id="9" name="">
-            <a:extLst xmlns:a="http://schemas.openxmlformats.org/drawingml/2006/main">
+          <p:cNvPr id="9" name="Rectangle 8">
+            <a:extLst>
               <a:ext uri="{FF2B5EF4-FFF2-40B4-BE49-F238E27FC236}">
                 <a16:creationId xmlns:a16="http://schemas.microsoft.com/office/drawing/2014/main" id="{489DDCAA-E481-41BB-B9EC-0BDDF6FDC31B}"/>
               </a:ext>
             </a:extLst>
           </p:cNvPr>
           <p:cNvSpPr>
-            <a:spLocks xmlns:a="http://schemas.openxmlformats.org/drawingml/2006/main" noGrp="1"/>
-          </p:cNvSpPr>
-          <p:nvPr/>
-        </p:nvSpPr>
-        <p:spPr>
-          <a:xfrm xmlns:a="http://schemas.openxmlformats.org/drawingml/2006/main">
+            <a:spLocks noGrp="1"/>
+          </p:cNvSpPr>
+          <p:nvPr/>
+        </p:nvSpPr>
+        <p:spPr>
+          <a:xfrm>
             <a:off x="714375" y="457200"/>
             <a:ext cx="12858750" cy="304800"/>
           </a:xfrm>
-          <a:prstGeom xmlns:a="http://schemas.openxmlformats.org/drawingml/2006/main" prst="rect">
-            <a:avLst/>
-          </a:prstGeom>
-          <a:noFill xmlns:a="http://schemas.openxmlformats.org/drawingml/2006/main"/>
-          <a:ln xmlns:a="http://schemas.openxmlformats.org/drawingml/2006/main" w="0">
+          <a:prstGeom prst="rect">
+            <a:avLst/>
+          </a:prstGeom>
+          <a:noFill/>
+          <a:ln w="0">
             <a:noFill/>
           </a:ln>
         </p:spPr>
         <p:txBody>
-          <a:bodyPr xmlns:a="http://schemas.openxmlformats.org/drawingml/2006/main">
+          <a:bodyPr>
             <a:noAutofit/>
           </a:bodyPr>
-          <a:lstStyle xmlns:a="http://schemas.openxmlformats.org/drawingml/2006/main"/>
-          <a:p xmlns:a="http://schemas.openxmlformats.org/drawingml/2006/main">
+          <a:lstStyle/>
+          <a:p>
             <a:pPr>
               <a:defRPr sz="1125">
                 <a:solidFill>
@@ -2260,37 +1963,37 @@
       </p:sp>
       <p:sp>
         <p:nvSpPr>
-          <p:cNvPr id="2" name="">
-            <a:extLst xmlns:a="http://schemas.openxmlformats.org/drawingml/2006/main">
+          <p:cNvPr id="2" name="Rectangle 1">
+            <a:extLst>
               <a:ext uri="{FF2B5EF4-FFF2-40B4-BE49-F238E27FC236}">
                 <a16:creationId xmlns:a16="http://schemas.microsoft.com/office/drawing/2014/main" id="{F6BBF3DA-636A-4D41-89A4-8BBFA2FA5AE6}"/>
               </a:ext>
             </a:extLst>
           </p:cNvPr>
           <p:cNvSpPr>
-            <a:spLocks xmlns:a="http://schemas.openxmlformats.org/drawingml/2006/main" noGrp="1"/>
-          </p:cNvSpPr>
-          <p:nvPr/>
-        </p:nvSpPr>
-        <p:spPr>
-          <a:xfrm xmlns:a="http://schemas.openxmlformats.org/drawingml/2006/main">
+            <a:spLocks noGrp="1"/>
+          </p:cNvSpPr>
+          <p:nvPr/>
+        </p:nvSpPr>
+        <p:spPr>
+          <a:xfrm>
             <a:off x="13906500" y="7905750"/>
             <a:ext cx="666750" cy="285750"/>
           </a:xfrm>
-          <a:prstGeom xmlns:a="http://schemas.openxmlformats.org/drawingml/2006/main" prst="rect">
-            <a:avLst/>
-          </a:prstGeom>
-          <a:noFill xmlns:a="http://schemas.openxmlformats.org/drawingml/2006/main"/>
-          <a:ln xmlns:a="http://schemas.openxmlformats.org/drawingml/2006/main" w="0">
+          <a:prstGeom prst="rect">
+            <a:avLst/>
+          </a:prstGeom>
+          <a:noFill/>
+          <a:ln w="0">
             <a:noFill/>
           </a:ln>
         </p:spPr>
         <p:txBody>
-          <a:bodyPr xmlns:a="http://schemas.openxmlformats.org/drawingml/2006/main">
+          <a:bodyPr>
             <a:noAutofit/>
           </a:bodyPr>
-          <a:lstStyle xmlns:a="http://schemas.openxmlformats.org/drawingml/2006/main"/>
-          <a:p xmlns:a="http://schemas.openxmlformats.org/drawingml/2006/main">
+          <a:lstStyle/>
+          <a:p>
             <a:pPr>
               <a:defRPr sz="1125">
                 <a:solidFill>
@@ -2317,112 +2020,112 @@
       </p:sp>
       <p:pic>
         <p:nvPicPr>
-          <p:cNvPr id="11" name=""/>
+          <p:cNvPr id="11" name="Picture 10"/>
           <p:cNvPicPr>
-            <a:picLocks xmlns:a="http://schemas.openxmlformats.org/drawingml/2006/main" noChangeAspect="1"/>
+            <a:picLocks noChangeAspect="1"/>
           </p:cNvPicPr>
           <p:nvPr/>
         </p:nvPicPr>
         <p:blipFill>
-          <a:blip xmlns:r="http://schemas.openxmlformats.org/officeDocument/2006/relationships" xmlns:a="http://schemas.openxmlformats.org/drawingml/2006/main" r:embed="R11110d01627d4d2d"/>
-          <a:srcRect xmlns:a="http://schemas.openxmlformats.org/drawingml/2006/main" l="0" t="5666" r="0" b="5666"/>
-          <a:stretch xmlns:a="http://schemas.openxmlformats.org/drawingml/2006/main">
-            <a:fillRect l="0" t="0" r="0" b="0"/>
+          <a:blip r:embed="rId3"/>
+          <a:srcRect t="5666" b="5666"/>
+          <a:stretch>
+            <a:fillRect/>
           </a:stretch>
         </p:blipFill>
         <p:spPr>
-          <a:xfrm xmlns:a="http://schemas.openxmlformats.org/drawingml/2006/main">
+          <a:xfrm>
             <a:off x="666750" y="1524000"/>
             <a:ext cx="4429125" cy="5048250"/>
           </a:xfrm>
-          <a:prstGeom xmlns:a="http://schemas.openxmlformats.org/drawingml/2006/main" prst="rect">
+          <a:prstGeom prst="rect">
             <a:avLst/>
           </a:prstGeom>
         </p:spPr>
       </p:pic>
       <p:pic>
         <p:nvPicPr>
-          <p:cNvPr id="12" name=""/>
+          <p:cNvPr id="12" name="Picture 11"/>
           <p:cNvPicPr>
-            <a:picLocks xmlns:a="http://schemas.openxmlformats.org/drawingml/2006/main" noChangeAspect="1"/>
+            <a:picLocks noChangeAspect="1"/>
           </p:cNvPicPr>
           <p:nvPr/>
         </p:nvPicPr>
         <p:blipFill>
-          <a:blip xmlns:r="http://schemas.openxmlformats.org/officeDocument/2006/relationships" xmlns:a="http://schemas.openxmlformats.org/drawingml/2006/main" r:embed="R305a1c28de754439"/>
-          <a:srcRect xmlns:a="http://schemas.openxmlformats.org/drawingml/2006/main" l="6930" t="0" r="6930" b="0"/>
-          <a:stretch xmlns:a="http://schemas.openxmlformats.org/drawingml/2006/main">
-            <a:fillRect l="0" t="0" r="0" b="0"/>
+          <a:blip r:embed="rId4"/>
+          <a:srcRect l="6930" r="6930"/>
+          <a:stretch>
+            <a:fillRect/>
           </a:stretch>
         </p:blipFill>
         <p:spPr>
-          <a:xfrm xmlns:a="http://schemas.openxmlformats.org/drawingml/2006/main">
+          <a:xfrm>
             <a:off x="5286375" y="1524000"/>
             <a:ext cx="4429125" cy="5048250"/>
           </a:xfrm>
-          <a:prstGeom xmlns:a="http://schemas.openxmlformats.org/drawingml/2006/main" prst="rect">
+          <a:prstGeom prst="rect">
             <a:avLst/>
           </a:prstGeom>
         </p:spPr>
       </p:pic>
       <p:pic>
         <p:nvPicPr>
-          <p:cNvPr id="13" name=""/>
+          <p:cNvPr id="13" name="Picture 12"/>
           <p:cNvPicPr>
-            <a:picLocks xmlns:a="http://schemas.openxmlformats.org/drawingml/2006/main" noChangeAspect="1"/>
+            <a:picLocks noChangeAspect="1"/>
           </p:cNvPicPr>
           <p:nvPr/>
         </p:nvPicPr>
         <p:blipFill>
-          <a:blip xmlns:r="http://schemas.openxmlformats.org/officeDocument/2006/relationships" xmlns:a="http://schemas.openxmlformats.org/drawingml/2006/main" r:embed="Rd8c888b1be2d47e9"/>
-          <a:srcRect xmlns:a="http://schemas.openxmlformats.org/drawingml/2006/main" l="10251" t="0" r="10251" b="0"/>
-          <a:stretch xmlns:a="http://schemas.openxmlformats.org/drawingml/2006/main">
-            <a:fillRect l="0" t="0" r="0" b="0"/>
+          <a:blip r:embed="rId5"/>
+          <a:srcRect l="10251" r="10251"/>
+          <a:stretch>
+            <a:fillRect/>
           </a:stretch>
         </p:blipFill>
         <p:spPr>
-          <a:xfrm xmlns:a="http://schemas.openxmlformats.org/drawingml/2006/main">
+          <a:xfrm>
             <a:off x="9906000" y="1524000"/>
             <a:ext cx="4667250" cy="5048250"/>
           </a:xfrm>
-          <a:prstGeom xmlns:a="http://schemas.openxmlformats.org/drawingml/2006/main" prst="rect">
+          <a:prstGeom prst="rect">
             <a:avLst/>
           </a:prstGeom>
         </p:spPr>
       </p:pic>
       <p:sp>
         <p:nvSpPr>
-          <p:cNvPr id="6" name="">
-            <a:extLst xmlns:a="http://schemas.openxmlformats.org/drawingml/2006/main">
+          <p:cNvPr id="6" name="Rectangle 5">
+            <a:extLst>
               <a:ext uri="{FF2B5EF4-FFF2-40B4-BE49-F238E27FC236}">
                 <a16:creationId xmlns:a16="http://schemas.microsoft.com/office/drawing/2014/main" id="{44C6F257-ABFF-43F3-831E-9FA563F3059D}"/>
               </a:ext>
             </a:extLst>
           </p:cNvPr>
           <p:cNvSpPr>
-            <a:spLocks xmlns:a="http://schemas.openxmlformats.org/drawingml/2006/main" noGrp="1"/>
-          </p:cNvSpPr>
-          <p:nvPr/>
-        </p:nvSpPr>
-        <p:spPr>
-          <a:xfrm xmlns:a="http://schemas.openxmlformats.org/drawingml/2006/main">
+            <a:spLocks noGrp="1"/>
+          </p:cNvSpPr>
+          <p:nvPr/>
+        </p:nvSpPr>
+        <p:spPr>
+          <a:xfrm>
             <a:off x="714375" y="6953250"/>
             <a:ext cx="4286250" cy="523875"/>
           </a:xfrm>
-          <a:prstGeom xmlns:a="http://schemas.openxmlformats.org/drawingml/2006/main" prst="rect">
-            <a:avLst/>
-          </a:prstGeom>
-          <a:noFill xmlns:a="http://schemas.openxmlformats.org/drawingml/2006/main"/>
-          <a:ln xmlns:a="http://schemas.openxmlformats.org/drawingml/2006/main" w="0">
+          <a:prstGeom prst="rect">
+            <a:avLst/>
+          </a:prstGeom>
+          <a:noFill/>
+          <a:ln w="0">
             <a:noFill/>
           </a:ln>
         </p:spPr>
         <p:txBody>
-          <a:bodyPr xmlns:a="http://schemas.openxmlformats.org/drawingml/2006/main">
+          <a:bodyPr>
             <a:noAutofit/>
           </a:bodyPr>
-          <a:lstStyle xmlns:a="http://schemas.openxmlformats.org/drawingml/2006/main"/>
-          <a:p xmlns:a="http://schemas.openxmlformats.org/drawingml/2006/main">
+          <a:lstStyle/>
+          <a:p>
             <a:pPr>
               <a:defRPr sz="2100">
                 <a:solidFill>
@@ -2449,37 +2152,37 @@
       </p:sp>
       <p:sp>
         <p:nvSpPr>
-          <p:cNvPr id="7" name="">
-            <a:extLst xmlns:a="http://schemas.openxmlformats.org/drawingml/2006/main">
+          <p:cNvPr id="7" name="Rectangle 6">
+            <a:extLst>
               <a:ext uri="{FF2B5EF4-FFF2-40B4-BE49-F238E27FC236}">
                 <a16:creationId xmlns:a16="http://schemas.microsoft.com/office/drawing/2014/main" id="{AC48DCC0-FB33-4E83-B3F1-7984651FC508}"/>
               </a:ext>
             </a:extLst>
           </p:cNvPr>
           <p:cNvSpPr>
-            <a:spLocks xmlns:a="http://schemas.openxmlformats.org/drawingml/2006/main" noGrp="1"/>
-          </p:cNvSpPr>
-          <p:nvPr/>
-        </p:nvSpPr>
-        <p:spPr>
-          <a:xfrm xmlns:a="http://schemas.openxmlformats.org/drawingml/2006/main">
+            <a:spLocks noGrp="1"/>
+          </p:cNvSpPr>
+          <p:nvPr/>
+        </p:nvSpPr>
+        <p:spPr>
+          <a:xfrm>
             <a:off x="5334000" y="6953250"/>
             <a:ext cx="4286250" cy="523875"/>
           </a:xfrm>
-          <a:prstGeom xmlns:a="http://schemas.openxmlformats.org/drawingml/2006/main" prst="rect">
-            <a:avLst/>
-          </a:prstGeom>
-          <a:noFill xmlns:a="http://schemas.openxmlformats.org/drawingml/2006/main"/>
-          <a:ln xmlns:a="http://schemas.openxmlformats.org/drawingml/2006/main" w="0">
+          <a:prstGeom prst="rect">
+            <a:avLst/>
+          </a:prstGeom>
+          <a:noFill/>
+          <a:ln w="0">
             <a:noFill/>
           </a:ln>
         </p:spPr>
         <p:txBody>
-          <a:bodyPr xmlns:a="http://schemas.openxmlformats.org/drawingml/2006/main">
+          <a:bodyPr>
             <a:noAutofit/>
           </a:bodyPr>
-          <a:lstStyle xmlns:a="http://schemas.openxmlformats.org/drawingml/2006/main"/>
-          <a:p xmlns:a="http://schemas.openxmlformats.org/drawingml/2006/main">
+          <a:lstStyle/>
+          <a:p>
             <a:pPr>
               <a:defRPr sz="2100">
                 <a:solidFill>
@@ -2506,37 +2209,37 @@
       </p:sp>
       <p:sp>
         <p:nvSpPr>
-          <p:cNvPr id="8" name="">
-            <a:extLst xmlns:a="http://schemas.openxmlformats.org/drawingml/2006/main">
+          <p:cNvPr id="8" name="Rectangle 7">
+            <a:extLst>
               <a:ext uri="{FF2B5EF4-FFF2-40B4-BE49-F238E27FC236}">
                 <a16:creationId xmlns:a16="http://schemas.microsoft.com/office/drawing/2014/main" id="{29A325C0-E070-48C9-893F-68525295C8DB}"/>
               </a:ext>
             </a:extLst>
           </p:cNvPr>
           <p:cNvSpPr>
-            <a:spLocks xmlns:a="http://schemas.openxmlformats.org/drawingml/2006/main" noGrp="1"/>
-          </p:cNvSpPr>
-          <p:nvPr/>
-        </p:nvSpPr>
-        <p:spPr>
-          <a:xfrm xmlns:a="http://schemas.openxmlformats.org/drawingml/2006/main">
+            <a:spLocks noGrp="1"/>
+          </p:cNvSpPr>
+          <p:nvPr/>
+        </p:nvSpPr>
+        <p:spPr>
+          <a:xfrm>
             <a:off x="9953625" y="6953250"/>
             <a:ext cx="4286250" cy="523875"/>
           </a:xfrm>
-          <a:prstGeom xmlns:a="http://schemas.openxmlformats.org/drawingml/2006/main" prst="rect">
-            <a:avLst/>
-          </a:prstGeom>
-          <a:noFill xmlns:a="http://schemas.openxmlformats.org/drawingml/2006/main"/>
-          <a:ln xmlns:a="http://schemas.openxmlformats.org/drawingml/2006/main" w="0">
+          <a:prstGeom prst="rect">
+            <a:avLst/>
+          </a:prstGeom>
+          <a:noFill/>
+          <a:ln w="0">
             <a:noFill/>
           </a:ln>
         </p:spPr>
         <p:txBody>
-          <a:bodyPr xmlns:a="http://schemas.openxmlformats.org/drawingml/2006/main">
+          <a:bodyPr>
             <a:noAutofit/>
           </a:bodyPr>
-          <a:lstStyle xmlns:a="http://schemas.openxmlformats.org/drawingml/2006/main"/>
-          <a:p xmlns:a="http://schemas.openxmlformats.org/drawingml/2006/main">
+          <a:lstStyle/>
+          <a:p>
             <a:pPr>
               <a:defRPr sz="2100">
                 <a:solidFill>
@@ -2568,17 +2271,21 @@
       </p:ext>
     </p:extLst>
   </p:cSld>
+  <p:clrMapOvr>
+    <a:masterClrMapping/>
+  </p:clrMapOvr>
 </p:sld>
 </file>
 
 <file path=ppt/slides/slide11.xml><?xml version="1.0" encoding="utf-8"?>
-<p:sld xmlns:p="http://schemas.openxmlformats.org/presentationml/2006/main">
+<p:sld xmlns:a="http://schemas.openxmlformats.org/drawingml/2006/main" xmlns:r="http://schemas.openxmlformats.org/officeDocument/2006/relationships" xmlns:p="http://schemas.openxmlformats.org/presentationml/2006/main">
   <p:cSld>
     <p:bg>
       <p:bgPr>
-        <a:solidFill xmlns:a="http://schemas.openxmlformats.org/drawingml/2006/main">
+        <a:solidFill>
           <a:srgbClr val="F6F3ED"/>
         </a:solidFill>
+        <a:effectLst/>
       </p:bgPr>
     </p:bg>
     <p:spTree>
@@ -2588,41 +2295,46 @@
         <p:nvPr/>
       </p:nvGrpSpPr>
       <p:grpSpPr>
-        <a:xfrm xmlns:a="http://schemas.openxmlformats.org/drawingml/2006/main"/>
+        <a:xfrm>
+          <a:off x="0" y="0"/>
+          <a:ext cx="0" cy="0"/>
+          <a:chOff x="0" y="0"/>
+          <a:chExt cx="0" cy="0"/>
+        </a:xfrm>
       </p:grpSpPr>
       <p:sp>
         <p:nvSpPr>
-          <p:cNvPr id="9" name="">
-            <a:extLst xmlns:a="http://schemas.openxmlformats.org/drawingml/2006/main">
+          <p:cNvPr id="9" name="Rectangle 8">
+            <a:extLst>
               <a:ext uri="{FF2B5EF4-FFF2-40B4-BE49-F238E27FC236}">
                 <a16:creationId xmlns:a16="http://schemas.microsoft.com/office/drawing/2014/main" id="{98637A0B-1A23-4276-967C-430967F9D685}"/>
               </a:ext>
             </a:extLst>
           </p:cNvPr>
           <p:cNvSpPr>
-            <a:spLocks xmlns:a="http://schemas.openxmlformats.org/drawingml/2006/main" noGrp="1"/>
-          </p:cNvSpPr>
-          <p:nvPr/>
-        </p:nvSpPr>
-        <p:spPr>
-          <a:xfrm xmlns:a="http://schemas.openxmlformats.org/drawingml/2006/main">
+            <a:spLocks noGrp="1"/>
+          </p:cNvSpPr>
+          <p:nvPr/>
+        </p:nvSpPr>
+        <p:spPr>
+          <a:xfrm>
             <a:off x="714375" y="457200"/>
             <a:ext cx="12858750" cy="304800"/>
           </a:xfrm>
-          <a:prstGeom xmlns:a="http://schemas.openxmlformats.org/drawingml/2006/main" prst="rect">
-            <a:avLst/>
-          </a:prstGeom>
-          <a:noFill xmlns:a="http://schemas.openxmlformats.org/drawingml/2006/main"/>
-          <a:ln xmlns:a="http://schemas.openxmlformats.org/drawingml/2006/main" w="0">
+          <a:prstGeom prst="rect">
+            <a:avLst/>
+          </a:prstGeom>
+          <a:noFill/>
+          <a:ln w="0">
             <a:noFill/>
           </a:ln>
         </p:spPr>
         <p:txBody>
-          <a:bodyPr xmlns:a="http://schemas.openxmlformats.org/drawingml/2006/main">
+          <a:bodyPr>
             <a:noAutofit/>
           </a:bodyPr>
-          <a:lstStyle xmlns:a="http://schemas.openxmlformats.org/drawingml/2006/main"/>
-          <a:p xmlns:a="http://schemas.openxmlformats.org/drawingml/2006/main">
+          <a:lstStyle/>
+          <a:p>
             <a:pPr>
               <a:defRPr sz="1125">
                 <a:solidFill>
@@ -2649,37 +2361,37 @@
       </p:sp>
       <p:sp>
         <p:nvSpPr>
-          <p:cNvPr id="2" name="">
-            <a:extLst xmlns:a="http://schemas.openxmlformats.org/drawingml/2006/main">
+          <p:cNvPr id="2" name="Rectangle 1">
+            <a:extLst>
               <a:ext uri="{FF2B5EF4-FFF2-40B4-BE49-F238E27FC236}">
                 <a16:creationId xmlns:a16="http://schemas.microsoft.com/office/drawing/2014/main" id="{AC15887D-AB7D-4BC3-9D16-CBA01729D20E}"/>
               </a:ext>
             </a:extLst>
           </p:cNvPr>
           <p:cNvSpPr>
-            <a:spLocks xmlns:a="http://schemas.openxmlformats.org/drawingml/2006/main" noGrp="1"/>
-          </p:cNvSpPr>
-          <p:nvPr/>
-        </p:nvSpPr>
-        <p:spPr>
-          <a:xfrm xmlns:a="http://schemas.openxmlformats.org/drawingml/2006/main">
+            <a:spLocks noGrp="1"/>
+          </p:cNvSpPr>
+          <p:nvPr/>
+        </p:nvSpPr>
+        <p:spPr>
+          <a:xfrm>
             <a:off x="13906500" y="7905750"/>
             <a:ext cx="666750" cy="285750"/>
           </a:xfrm>
-          <a:prstGeom xmlns:a="http://schemas.openxmlformats.org/drawingml/2006/main" prst="rect">
-            <a:avLst/>
-          </a:prstGeom>
-          <a:noFill xmlns:a="http://schemas.openxmlformats.org/drawingml/2006/main"/>
-          <a:ln xmlns:a="http://schemas.openxmlformats.org/drawingml/2006/main" w="0">
+          <a:prstGeom prst="rect">
+            <a:avLst/>
+          </a:prstGeom>
+          <a:noFill/>
+          <a:ln w="0">
             <a:noFill/>
           </a:ln>
         </p:spPr>
         <p:txBody>
-          <a:bodyPr xmlns:a="http://schemas.openxmlformats.org/drawingml/2006/main">
+          <a:bodyPr>
             <a:noAutofit/>
           </a:bodyPr>
-          <a:lstStyle xmlns:a="http://schemas.openxmlformats.org/drawingml/2006/main"/>
-          <a:p xmlns:a="http://schemas.openxmlformats.org/drawingml/2006/main">
+          <a:lstStyle/>
+          <a:p>
             <a:pPr>
               <a:defRPr sz="1125">
                 <a:solidFill>
@@ -2706,37 +2418,37 @@
       </p:sp>
       <p:sp>
         <p:nvSpPr>
-          <p:cNvPr id="3" name="">
-            <a:extLst xmlns:a="http://schemas.openxmlformats.org/drawingml/2006/main">
+          <p:cNvPr id="3" name="Rectangle 2">
+            <a:extLst>
               <a:ext uri="{FF2B5EF4-FFF2-40B4-BE49-F238E27FC236}">
                 <a16:creationId xmlns:a16="http://schemas.microsoft.com/office/drawing/2014/main" id="{1D9FD122-49F8-4C5D-816F-832C4506F7A7}"/>
               </a:ext>
             </a:extLst>
           </p:cNvPr>
           <p:cNvSpPr>
-            <a:spLocks xmlns:a="http://schemas.openxmlformats.org/drawingml/2006/main" noGrp="1"/>
-          </p:cNvSpPr>
-          <p:nvPr/>
-        </p:nvSpPr>
-        <p:spPr>
-          <a:xfrm xmlns:a="http://schemas.openxmlformats.org/drawingml/2006/main">
+            <a:spLocks noGrp="1"/>
+          </p:cNvSpPr>
+          <p:nvPr/>
+        </p:nvSpPr>
+        <p:spPr>
+          <a:xfrm>
             <a:off x="714375" y="1571625"/>
             <a:ext cx="6667500" cy="2857500"/>
           </a:xfrm>
-          <a:prstGeom xmlns:a="http://schemas.openxmlformats.org/drawingml/2006/main" prst="rect">
-            <a:avLst/>
-          </a:prstGeom>
-          <a:noFill xmlns:a="http://schemas.openxmlformats.org/drawingml/2006/main"/>
-          <a:ln xmlns:a="http://schemas.openxmlformats.org/drawingml/2006/main" w="0">
+          <a:prstGeom prst="rect">
+            <a:avLst/>
+          </a:prstGeom>
+          <a:noFill/>
+          <a:ln w="0">
             <a:noFill/>
           </a:ln>
         </p:spPr>
         <p:txBody>
-          <a:bodyPr xmlns:a="http://schemas.openxmlformats.org/drawingml/2006/main">
+          <a:bodyPr>
             <a:noAutofit/>
           </a:bodyPr>
-          <a:lstStyle xmlns:a="http://schemas.openxmlformats.org/drawingml/2006/main"/>
-          <a:p xmlns:a="http://schemas.openxmlformats.org/drawingml/2006/main">
+          <a:lstStyle/>
+          <a:p>
             <a:pPr>
               <a:defRPr sz="7200">
                 <a:solidFill>
@@ -2759,7 +2471,7 @@
               <a:t>A quieter kind</a:t>
             </a:r>
           </a:p>
-          <a:p xmlns:a="http://schemas.openxmlformats.org/drawingml/2006/main">
+          <a:p>
             <a:pPr>
               <a:defRPr sz="7200">
                 <a:solidFill>
@@ -2786,37 +2498,37 @@
       </p:sp>
       <p:sp>
         <p:nvSpPr>
-          <p:cNvPr id="4" name="">
-            <a:extLst xmlns:a="http://schemas.openxmlformats.org/drawingml/2006/main">
+          <p:cNvPr id="4" name="Rectangle 3">
+            <a:extLst>
               <a:ext uri="{FF2B5EF4-FFF2-40B4-BE49-F238E27FC236}">
                 <a16:creationId xmlns:a16="http://schemas.microsoft.com/office/drawing/2014/main" id="{EECA2783-4CF8-4E23-BD28-58DBCF84C4E4}"/>
               </a:ext>
             </a:extLst>
           </p:cNvPr>
           <p:cNvSpPr>
-            <a:spLocks xmlns:a="http://schemas.openxmlformats.org/drawingml/2006/main" noGrp="1"/>
-          </p:cNvSpPr>
-          <p:nvPr/>
-        </p:nvSpPr>
-        <p:spPr>
-          <a:xfrm xmlns:a="http://schemas.openxmlformats.org/drawingml/2006/main">
+            <a:spLocks noGrp="1"/>
+          </p:cNvSpPr>
+          <p:nvPr/>
+        </p:nvSpPr>
+        <p:spPr>
+          <a:xfrm>
             <a:off x="762000" y="5715000"/>
             <a:ext cx="6572250" cy="1238250"/>
           </a:xfrm>
-          <a:prstGeom xmlns:a="http://schemas.openxmlformats.org/drawingml/2006/main" prst="rect">
-            <a:avLst/>
-          </a:prstGeom>
-          <a:noFill xmlns:a="http://schemas.openxmlformats.org/drawingml/2006/main"/>
-          <a:ln xmlns:a="http://schemas.openxmlformats.org/drawingml/2006/main" w="0">
+          <a:prstGeom prst="rect">
+            <a:avLst/>
+          </a:prstGeom>
+          <a:noFill/>
+          <a:ln w="0">
             <a:noFill/>
           </a:ln>
         </p:spPr>
         <p:txBody>
-          <a:bodyPr xmlns:a="http://schemas.openxmlformats.org/drawingml/2006/main">
+          <a:bodyPr>
             <a:noAutofit/>
           </a:bodyPr>
-          <a:lstStyle xmlns:a="http://schemas.openxmlformats.org/drawingml/2006/main"/>
-          <a:p xmlns:a="http://schemas.openxmlformats.org/drawingml/2006/main">
+          <a:lstStyle/>
+          <a:p>
             <a:pPr>
               <a:defRPr sz="2100">
                 <a:solidFill>
@@ -2839,7 +2551,7 @@
               <a:t>Warm and personal. Clear about the details.</a:t>
             </a:r>
           </a:p>
-          <a:p xmlns:a="http://schemas.openxmlformats.org/drawingml/2006/main">
+          <a:p>
             <a:pPr>
               <a:defRPr sz="2100">
                 <a:solidFill>
@@ -2866,37 +2578,37 @@
       </p:sp>
       <p:sp>
         <p:nvSpPr>
-          <p:cNvPr id="5" name="">
-            <a:extLst xmlns:a="http://schemas.openxmlformats.org/drawingml/2006/main">
+          <p:cNvPr id="5" name="Rectangle 4">
+            <a:extLst>
               <a:ext uri="{FF2B5EF4-FFF2-40B4-BE49-F238E27FC236}">
                 <a16:creationId xmlns:a16="http://schemas.microsoft.com/office/drawing/2014/main" id="{20F8B223-E773-4758-9B74-A597E5AC637F}"/>
               </a:ext>
             </a:extLst>
           </p:cNvPr>
           <p:cNvSpPr>
-            <a:spLocks xmlns:a="http://schemas.openxmlformats.org/drawingml/2006/main" noGrp="1"/>
-          </p:cNvSpPr>
-          <p:nvPr/>
-        </p:nvSpPr>
-        <p:spPr>
-          <a:xfrm xmlns:a="http://schemas.openxmlformats.org/drawingml/2006/main">
+            <a:spLocks noGrp="1"/>
+          </p:cNvSpPr>
+          <p:nvPr/>
+        </p:nvSpPr>
+        <p:spPr>
+          <a:xfrm>
             <a:off x="8858250" y="1762125"/>
             <a:ext cx="5238750" cy="333375"/>
           </a:xfrm>
-          <a:prstGeom xmlns:a="http://schemas.openxmlformats.org/drawingml/2006/main" prst="rect">
-            <a:avLst/>
-          </a:prstGeom>
-          <a:noFill xmlns:a="http://schemas.openxmlformats.org/drawingml/2006/main"/>
-          <a:ln xmlns:a="http://schemas.openxmlformats.org/drawingml/2006/main" w="0">
+          <a:prstGeom prst="rect">
+            <a:avLst/>
+          </a:prstGeom>
+          <a:noFill/>
+          <a:ln w="0">
             <a:noFill/>
           </a:ln>
         </p:spPr>
         <p:txBody>
-          <a:bodyPr xmlns:a="http://schemas.openxmlformats.org/drawingml/2006/main">
+          <a:bodyPr>
             <a:noAutofit/>
           </a:bodyPr>
-          <a:lstStyle xmlns:a="http://schemas.openxmlformats.org/drawingml/2006/main"/>
-          <a:p xmlns:a="http://schemas.openxmlformats.org/drawingml/2006/main">
+          <a:lstStyle/>
+          <a:p>
             <a:pPr>
               <a:defRPr sz="1200">
                 <a:solidFill>
@@ -2923,37 +2635,37 @@
       </p:sp>
       <p:sp>
         <p:nvSpPr>
-          <p:cNvPr id="6" name="">
-            <a:extLst xmlns:a="http://schemas.openxmlformats.org/drawingml/2006/main">
+          <p:cNvPr id="6" name="Rectangle 5">
+            <a:extLst>
               <a:ext uri="{FF2B5EF4-FFF2-40B4-BE49-F238E27FC236}">
                 <a16:creationId xmlns:a16="http://schemas.microsoft.com/office/drawing/2014/main" id="{E8C6B33E-E044-45E5-A022-05712A926418}"/>
               </a:ext>
             </a:extLst>
           </p:cNvPr>
           <p:cNvSpPr>
-            <a:spLocks xmlns:a="http://schemas.openxmlformats.org/drawingml/2006/main" noGrp="1"/>
-          </p:cNvSpPr>
-          <p:nvPr/>
-        </p:nvSpPr>
-        <p:spPr>
-          <a:xfrm xmlns:a="http://schemas.openxmlformats.org/drawingml/2006/main">
+            <a:spLocks noGrp="1"/>
+          </p:cNvSpPr>
+          <p:nvPr/>
+        </p:nvSpPr>
+        <p:spPr>
+          <a:xfrm>
             <a:off x="8810625" y="2428875"/>
             <a:ext cx="5905500" cy="2095500"/>
           </a:xfrm>
-          <a:prstGeom xmlns:a="http://schemas.openxmlformats.org/drawingml/2006/main" prst="rect">
-            <a:avLst/>
-          </a:prstGeom>
-          <a:noFill xmlns:a="http://schemas.openxmlformats.org/drawingml/2006/main"/>
-          <a:ln xmlns:a="http://schemas.openxmlformats.org/drawingml/2006/main" w="0">
+          <a:prstGeom prst="rect">
+            <a:avLst/>
+          </a:prstGeom>
+          <a:noFill/>
+          <a:ln w="0">
             <a:noFill/>
           </a:ln>
         </p:spPr>
         <p:txBody>
-          <a:bodyPr xmlns:a="http://schemas.openxmlformats.org/drawingml/2006/main">
+          <a:bodyPr>
             <a:noAutofit/>
           </a:bodyPr>
-          <a:lstStyle xmlns:a="http://schemas.openxmlformats.org/drawingml/2006/main"/>
-          <a:p xmlns:a="http://schemas.openxmlformats.org/drawingml/2006/main">
+          <a:lstStyle/>
+          <a:p>
             <a:pPr>
               <a:defRPr sz="4125">
                 <a:solidFill>
@@ -2976,7 +2688,7 @@
               <a:t>Langsamer werden.</a:t>
             </a:r>
           </a:p>
-          <a:p xmlns:a="http://schemas.openxmlformats.org/drawingml/2006/main">
+          <a:p>
             <a:pPr>
               <a:defRPr sz="4125">
                 <a:solidFill>
@@ -3003,37 +2715,37 @@
       </p:sp>
       <p:sp>
         <p:nvSpPr>
-          <p:cNvPr id="7" name="">
-            <a:extLst xmlns:a="http://schemas.openxmlformats.org/drawingml/2006/main">
+          <p:cNvPr id="7" name="Rectangle 6">
+            <a:extLst>
               <a:ext uri="{FF2B5EF4-FFF2-40B4-BE49-F238E27FC236}">
                 <a16:creationId xmlns:a16="http://schemas.microsoft.com/office/drawing/2014/main" id="{A15206AF-63E4-437D-90B9-67CBBD890222}"/>
               </a:ext>
             </a:extLst>
           </p:cNvPr>
           <p:cNvSpPr>
-            <a:spLocks xmlns:a="http://schemas.openxmlformats.org/drawingml/2006/main" noGrp="1"/>
-          </p:cNvSpPr>
-          <p:nvPr/>
-        </p:nvSpPr>
-        <p:spPr>
-          <a:xfrm xmlns:a="http://schemas.openxmlformats.org/drawingml/2006/main">
+            <a:spLocks noGrp="1"/>
+          </p:cNvSpPr>
+          <p:nvPr/>
+        </p:nvSpPr>
+        <p:spPr>
+          <a:xfrm>
             <a:off x="8858250" y="5286375"/>
             <a:ext cx="5238750" cy="333375"/>
           </a:xfrm>
-          <a:prstGeom xmlns:a="http://schemas.openxmlformats.org/drawingml/2006/main" prst="rect">
-            <a:avLst/>
-          </a:prstGeom>
-          <a:noFill xmlns:a="http://schemas.openxmlformats.org/drawingml/2006/main"/>
-          <a:ln xmlns:a="http://schemas.openxmlformats.org/drawingml/2006/main" w="0">
+          <a:prstGeom prst="rect">
+            <a:avLst/>
+          </a:prstGeom>
+          <a:noFill/>
+          <a:ln w="0">
             <a:noFill/>
           </a:ln>
         </p:spPr>
         <p:txBody>
-          <a:bodyPr xmlns:a="http://schemas.openxmlformats.org/drawingml/2006/main">
+          <a:bodyPr>
             <a:noAutofit/>
           </a:bodyPr>
-          <a:lstStyle xmlns:a="http://schemas.openxmlformats.org/drawingml/2006/main"/>
-          <a:p xmlns:a="http://schemas.openxmlformats.org/drawingml/2006/main">
+          <a:lstStyle/>
+          <a:p>
             <a:pPr>
               <a:defRPr sz="1200">
                 <a:solidFill>
@@ -3060,37 +2772,37 @@
       </p:sp>
       <p:sp>
         <p:nvSpPr>
-          <p:cNvPr id="8" name="">
-            <a:extLst xmlns:a="http://schemas.openxmlformats.org/drawingml/2006/main">
+          <p:cNvPr id="8" name="Rectangle 7">
+            <a:extLst>
               <a:ext uri="{FF2B5EF4-FFF2-40B4-BE49-F238E27FC236}">
                 <a16:creationId xmlns:a16="http://schemas.microsoft.com/office/drawing/2014/main" id="{A9A9DCBD-357A-4B90-9612-F4740A84A5EE}"/>
               </a:ext>
             </a:extLst>
           </p:cNvPr>
           <p:cNvSpPr>
-            <a:spLocks xmlns:a="http://schemas.openxmlformats.org/drawingml/2006/main" noGrp="1"/>
-          </p:cNvSpPr>
-          <p:nvPr/>
-        </p:nvSpPr>
-        <p:spPr>
-          <a:xfrm xmlns:a="http://schemas.openxmlformats.org/drawingml/2006/main">
+            <a:spLocks noGrp="1"/>
+          </p:cNvSpPr>
+          <p:nvPr/>
+        </p:nvSpPr>
+        <p:spPr>
+          <a:xfrm>
             <a:off x="8810625" y="5810250"/>
             <a:ext cx="5905500" cy="1524000"/>
           </a:xfrm>
-          <a:prstGeom xmlns:a="http://schemas.openxmlformats.org/drawingml/2006/main" prst="rect">
-            <a:avLst/>
-          </a:prstGeom>
-          <a:noFill xmlns:a="http://schemas.openxmlformats.org/drawingml/2006/main"/>
-          <a:ln xmlns:a="http://schemas.openxmlformats.org/drawingml/2006/main" w="0">
+          <a:prstGeom prst="rect">
+            <a:avLst/>
+          </a:prstGeom>
+          <a:noFill/>
+          <a:ln w="0">
             <a:noFill/>
           </a:ln>
         </p:spPr>
         <p:txBody>
-          <a:bodyPr xmlns:a="http://schemas.openxmlformats.org/drawingml/2006/main">
+          <a:bodyPr>
             <a:noAutofit/>
           </a:bodyPr>
-          <a:lstStyle xmlns:a="http://schemas.openxmlformats.org/drawingml/2006/main"/>
-          <a:p xmlns:a="http://schemas.openxmlformats.org/drawingml/2006/main">
+          <a:lstStyle/>
+          <a:p>
             <a:pPr>
               <a:defRPr sz="4125">
                 <a:solidFill>
@@ -3113,7 +2825,7 @@
               <a:t>Slower days.</a:t>
             </a:r>
           </a:p>
-          <a:p xmlns:a="http://schemas.openxmlformats.org/drawingml/2006/main">
+          <a:p>
             <a:pPr>
               <a:defRPr sz="4125">
                 <a:solidFill>
@@ -3145,17 +2857,21 @@
       </p:ext>
     </p:extLst>
   </p:cSld>
+  <p:clrMapOvr>
+    <a:masterClrMapping/>
+  </p:clrMapOvr>
 </p:sld>
 </file>
 
 <file path=ppt/slides/slide12.xml><?xml version="1.0" encoding="utf-8"?>
-<p:sld xmlns:p="http://schemas.openxmlformats.org/presentationml/2006/main">
+<p:sld xmlns:a="http://schemas.openxmlformats.org/drawingml/2006/main" xmlns:r="http://schemas.openxmlformats.org/officeDocument/2006/relationships" xmlns:p="http://schemas.openxmlformats.org/presentationml/2006/main">
   <p:cSld>
     <p:bg>
       <p:bgPr>
-        <a:solidFill xmlns:a="http://schemas.openxmlformats.org/drawingml/2006/main">
+        <a:solidFill>
           <a:srgbClr val="F6F3ED"/>
         </a:solidFill>
+        <a:effectLst/>
       </p:bgPr>
     </p:bg>
     <p:spTree>
@@ -3165,41 +2881,46 @@
         <p:nvPr/>
       </p:nvGrpSpPr>
       <p:grpSpPr>
-        <a:xfrm xmlns:a="http://schemas.openxmlformats.org/drawingml/2006/main"/>
+        <a:xfrm>
+          <a:off x="0" y="0"/>
+          <a:ext cx="0" cy="0"/>
+          <a:chOff x="0" y="0"/>
+          <a:chExt cx="0" cy="0"/>
+        </a:xfrm>
       </p:grpSpPr>
       <p:sp>
         <p:nvSpPr>
-          <p:cNvPr id="7" name="">
-            <a:extLst xmlns:a="http://schemas.openxmlformats.org/drawingml/2006/main">
+          <p:cNvPr id="7" name="Rectangle 6">
+            <a:extLst>
               <a:ext uri="{FF2B5EF4-FFF2-40B4-BE49-F238E27FC236}">
                 <a16:creationId xmlns:a16="http://schemas.microsoft.com/office/drawing/2014/main" id="{E3BFE836-471D-41E7-A739-51A07A775E6E}"/>
               </a:ext>
             </a:extLst>
           </p:cNvPr>
           <p:cNvSpPr>
-            <a:spLocks xmlns:a="http://schemas.openxmlformats.org/drawingml/2006/main" noGrp="1"/>
-          </p:cNvSpPr>
-          <p:nvPr/>
-        </p:nvSpPr>
-        <p:spPr>
-          <a:xfrm xmlns:a="http://schemas.openxmlformats.org/drawingml/2006/main">
+            <a:spLocks noGrp="1"/>
+          </p:cNvSpPr>
+          <p:nvPr/>
+        </p:nvSpPr>
+        <p:spPr>
+          <a:xfrm>
             <a:off x="714375" y="457200"/>
             <a:ext cx="12858750" cy="304800"/>
           </a:xfrm>
-          <a:prstGeom xmlns:a="http://schemas.openxmlformats.org/drawingml/2006/main" prst="rect">
-            <a:avLst/>
-          </a:prstGeom>
-          <a:noFill xmlns:a="http://schemas.openxmlformats.org/drawingml/2006/main"/>
-          <a:ln xmlns:a="http://schemas.openxmlformats.org/drawingml/2006/main" w="0">
+          <a:prstGeom prst="rect">
+            <a:avLst/>
+          </a:prstGeom>
+          <a:noFill/>
+          <a:ln w="0">
             <a:noFill/>
           </a:ln>
         </p:spPr>
         <p:txBody>
-          <a:bodyPr xmlns:a="http://schemas.openxmlformats.org/drawingml/2006/main">
+          <a:bodyPr>
             <a:noAutofit/>
           </a:bodyPr>
-          <a:lstStyle xmlns:a="http://schemas.openxmlformats.org/drawingml/2006/main"/>
-          <a:p xmlns:a="http://schemas.openxmlformats.org/drawingml/2006/main">
+          <a:lstStyle/>
+          <a:p>
             <a:pPr>
               <a:defRPr sz="1125">
                 <a:solidFill>
@@ -3226,37 +2947,37 @@
       </p:sp>
       <p:sp>
         <p:nvSpPr>
-          <p:cNvPr id="2" name="">
-            <a:extLst xmlns:a="http://schemas.openxmlformats.org/drawingml/2006/main">
+          <p:cNvPr id="2" name="Rectangle 1">
+            <a:extLst>
               <a:ext uri="{FF2B5EF4-FFF2-40B4-BE49-F238E27FC236}">
                 <a16:creationId xmlns:a16="http://schemas.microsoft.com/office/drawing/2014/main" id="{61FA2855-DA6E-4A51-9A0A-0174B9669441}"/>
               </a:ext>
             </a:extLst>
           </p:cNvPr>
           <p:cNvSpPr>
-            <a:spLocks xmlns:a="http://schemas.openxmlformats.org/drawingml/2006/main" noGrp="1"/>
-          </p:cNvSpPr>
-          <p:nvPr/>
-        </p:nvSpPr>
-        <p:spPr>
-          <a:xfrm xmlns:a="http://schemas.openxmlformats.org/drawingml/2006/main">
+            <a:spLocks noGrp="1"/>
+          </p:cNvSpPr>
+          <p:nvPr/>
+        </p:nvSpPr>
+        <p:spPr>
+          <a:xfrm>
             <a:off x="13906500" y="7905750"/>
             <a:ext cx="666750" cy="285750"/>
           </a:xfrm>
-          <a:prstGeom xmlns:a="http://schemas.openxmlformats.org/drawingml/2006/main" prst="rect">
-            <a:avLst/>
-          </a:prstGeom>
-          <a:noFill xmlns:a="http://schemas.openxmlformats.org/drawingml/2006/main"/>
-          <a:ln xmlns:a="http://schemas.openxmlformats.org/drawingml/2006/main" w="0">
+          <a:prstGeom prst="rect">
+            <a:avLst/>
+          </a:prstGeom>
+          <a:noFill/>
+          <a:ln w="0">
             <a:noFill/>
           </a:ln>
         </p:spPr>
         <p:txBody>
-          <a:bodyPr xmlns:a="http://schemas.openxmlformats.org/drawingml/2006/main">
+          <a:bodyPr>
             <a:noAutofit/>
           </a:bodyPr>
-          <a:lstStyle xmlns:a="http://schemas.openxmlformats.org/drawingml/2006/main"/>
-          <a:p xmlns:a="http://schemas.openxmlformats.org/drawingml/2006/main">
+          <a:lstStyle/>
+          <a:p>
             <a:pPr>
               <a:defRPr sz="1125">
                 <a:solidFill>
@@ -3283,87 +3004,87 @@
       </p:sp>
       <p:pic>
         <p:nvPicPr>
-          <p:cNvPr id="9" name=""/>
+          <p:cNvPr id="9" name="Picture 8"/>
           <p:cNvPicPr>
-            <a:picLocks xmlns:a="http://schemas.openxmlformats.org/drawingml/2006/main" noChangeAspect="1"/>
+            <a:picLocks noChangeAspect="1"/>
           </p:cNvPicPr>
           <p:nvPr/>
         </p:nvPicPr>
         <p:blipFill>
-          <a:blip xmlns:r="http://schemas.openxmlformats.org/officeDocument/2006/relationships" xmlns:a="http://schemas.openxmlformats.org/drawingml/2006/main" r:embed="Rad75d441d82441a0"/>
-          <a:srcRect xmlns:a="http://schemas.openxmlformats.org/drawingml/2006/main" l="213" t="0" r="213" b="0"/>
-          <a:stretch xmlns:a="http://schemas.openxmlformats.org/drawingml/2006/main">
-            <a:fillRect l="0" t="0" r="0" b="0"/>
+          <a:blip r:embed="rId3"/>
+          <a:srcRect l="213" r="213"/>
+          <a:stretch>
+            <a:fillRect/>
           </a:stretch>
         </p:blipFill>
         <p:spPr>
-          <a:xfrm xmlns:a="http://schemas.openxmlformats.org/drawingml/2006/main">
+          <a:xfrm>
             <a:off x="666750" y="1476375"/>
             <a:ext cx="6381750" cy="5381625"/>
           </a:xfrm>
-          <a:prstGeom xmlns:a="http://schemas.openxmlformats.org/drawingml/2006/main" prst="rect">
+          <a:prstGeom prst="rect">
             <a:avLst/>
           </a:prstGeom>
         </p:spPr>
       </p:pic>
       <p:pic>
         <p:nvPicPr>
-          <p:cNvPr id="10" name=""/>
+          <p:cNvPr id="10" name="Picture 9"/>
           <p:cNvPicPr>
-            <a:picLocks xmlns:a="http://schemas.openxmlformats.org/drawingml/2006/main" noChangeAspect="1"/>
+            <a:picLocks noChangeAspect="1"/>
           </p:cNvPicPr>
           <p:nvPr/>
         </p:nvPicPr>
         <p:blipFill>
-          <a:blip xmlns:r="http://schemas.openxmlformats.org/officeDocument/2006/relationships" xmlns:a="http://schemas.openxmlformats.org/drawingml/2006/main" r:embed="Re260633c01574a63"/>
-          <a:srcRect xmlns:a="http://schemas.openxmlformats.org/drawingml/2006/main" l="0" t="8300" r="0" b="8300"/>
-          <a:stretch xmlns:a="http://schemas.openxmlformats.org/drawingml/2006/main">
-            <a:fillRect l="0" t="0" r="0" b="0"/>
+          <a:blip r:embed="rId4"/>
+          <a:srcRect t="8300" b="8300"/>
+          <a:stretch>
+            <a:fillRect/>
           </a:stretch>
         </p:blipFill>
         <p:spPr>
-          <a:xfrm xmlns:a="http://schemas.openxmlformats.org/drawingml/2006/main">
+          <a:xfrm>
             <a:off x="7953375" y="1476375"/>
             <a:ext cx="6572250" cy="5381625"/>
           </a:xfrm>
-          <a:prstGeom xmlns:a="http://schemas.openxmlformats.org/drawingml/2006/main" prst="rect">
+          <a:prstGeom prst="rect">
             <a:avLst/>
           </a:prstGeom>
         </p:spPr>
       </p:pic>
       <p:sp>
         <p:nvSpPr>
-          <p:cNvPr id="5" name="">
-            <a:extLst xmlns:a="http://schemas.openxmlformats.org/drawingml/2006/main">
+          <p:cNvPr id="5" name="Rectangle 4">
+            <a:extLst>
               <a:ext uri="{FF2B5EF4-FFF2-40B4-BE49-F238E27FC236}">
                 <a16:creationId xmlns:a16="http://schemas.microsoft.com/office/drawing/2014/main" id="{40E19AC8-FB0D-4971-8EC9-59FFCF10FE25}"/>
               </a:ext>
             </a:extLst>
           </p:cNvPr>
           <p:cNvSpPr>
-            <a:spLocks xmlns:a="http://schemas.openxmlformats.org/drawingml/2006/main" noGrp="1"/>
-          </p:cNvSpPr>
-          <p:nvPr/>
-        </p:nvSpPr>
-        <p:spPr>
-          <a:xfrm xmlns:a="http://schemas.openxmlformats.org/drawingml/2006/main">
+            <a:spLocks noGrp="1"/>
+          </p:cNvSpPr>
+          <p:nvPr/>
+        </p:nvSpPr>
+        <p:spPr>
+          <a:xfrm>
             <a:off x="714375" y="7239000"/>
             <a:ext cx="6572250" cy="571500"/>
           </a:xfrm>
-          <a:prstGeom xmlns:a="http://schemas.openxmlformats.org/drawingml/2006/main" prst="rect">
-            <a:avLst/>
-          </a:prstGeom>
-          <a:noFill xmlns:a="http://schemas.openxmlformats.org/drawingml/2006/main"/>
-          <a:ln xmlns:a="http://schemas.openxmlformats.org/drawingml/2006/main" w="0">
+          <a:prstGeom prst="rect">
+            <a:avLst/>
+          </a:prstGeom>
+          <a:noFill/>
+          <a:ln w="0">
             <a:noFill/>
           </a:ln>
         </p:spPr>
         <p:txBody>
-          <a:bodyPr xmlns:a="http://schemas.openxmlformats.org/drawingml/2006/main">
+          <a:bodyPr>
             <a:noAutofit/>
           </a:bodyPr>
-          <a:lstStyle xmlns:a="http://schemas.openxmlformats.org/drawingml/2006/main"/>
-          <a:p xmlns:a="http://schemas.openxmlformats.org/drawingml/2006/main">
+          <a:lstStyle/>
+          <a:p>
             <a:pPr>
               <a:defRPr sz="2250">
                 <a:solidFill>
@@ -3390,37 +3111,37 @@
       </p:sp>
       <p:sp>
         <p:nvSpPr>
-          <p:cNvPr id="6" name="">
-            <a:extLst xmlns:a="http://schemas.openxmlformats.org/drawingml/2006/main">
+          <p:cNvPr id="6" name="Rectangle 5">
+            <a:extLst>
               <a:ext uri="{FF2B5EF4-FFF2-40B4-BE49-F238E27FC236}">
                 <a16:creationId xmlns:a16="http://schemas.microsoft.com/office/drawing/2014/main" id="{9C8614F2-F8AF-4153-AE84-69138E628313}"/>
               </a:ext>
             </a:extLst>
           </p:cNvPr>
           <p:cNvSpPr>
-            <a:spLocks xmlns:a="http://schemas.openxmlformats.org/drawingml/2006/main" noGrp="1"/>
-          </p:cNvSpPr>
-          <p:nvPr/>
-        </p:nvSpPr>
-        <p:spPr>
-          <a:xfrm xmlns:a="http://schemas.openxmlformats.org/drawingml/2006/main">
+            <a:spLocks noGrp="1"/>
+          </p:cNvSpPr>
+          <p:nvPr/>
+        </p:nvSpPr>
+        <p:spPr>
+          <a:xfrm>
             <a:off x="8001000" y="7239000"/>
             <a:ext cx="6477000" cy="571500"/>
           </a:xfrm>
-          <a:prstGeom xmlns:a="http://schemas.openxmlformats.org/drawingml/2006/main" prst="rect">
-            <a:avLst/>
-          </a:prstGeom>
-          <a:noFill xmlns:a="http://schemas.openxmlformats.org/drawingml/2006/main"/>
-          <a:ln xmlns:a="http://schemas.openxmlformats.org/drawingml/2006/main" w="0">
+          <a:prstGeom prst="rect">
+            <a:avLst/>
+          </a:prstGeom>
+          <a:noFill/>
+          <a:ln w="0">
             <a:noFill/>
           </a:ln>
         </p:spPr>
         <p:txBody>
-          <a:bodyPr xmlns:a="http://schemas.openxmlformats.org/drawingml/2006/main">
+          <a:bodyPr>
             <a:noAutofit/>
           </a:bodyPr>
-          <a:lstStyle xmlns:a="http://schemas.openxmlformats.org/drawingml/2006/main"/>
-          <a:p xmlns:a="http://schemas.openxmlformats.org/drawingml/2006/main">
+          <a:lstStyle/>
+          <a:p>
             <a:pPr>
               <a:defRPr sz="2250">
                 <a:solidFill>
@@ -3452,17 +3173,21 @@
       </p:ext>
     </p:extLst>
   </p:cSld>
+  <p:clrMapOvr>
+    <a:masterClrMapping/>
+  </p:clrMapOvr>
 </p:sld>
 </file>
 
 <file path=ppt/slides/slide13.xml><?xml version="1.0" encoding="utf-8"?>
-<p:sld xmlns:p="http://schemas.openxmlformats.org/presentationml/2006/main">
+<p:sld xmlns:a="http://schemas.openxmlformats.org/drawingml/2006/main" xmlns:r="http://schemas.openxmlformats.org/officeDocument/2006/relationships" xmlns:p="http://schemas.openxmlformats.org/presentationml/2006/main">
   <p:cSld>
     <p:bg>
       <p:bgPr>
-        <a:solidFill xmlns:a="http://schemas.openxmlformats.org/drawingml/2006/main">
+        <a:solidFill>
           <a:srgbClr val="F6F3ED"/>
         </a:solidFill>
+        <a:effectLst/>
       </p:bgPr>
     </p:bg>
     <p:spTree>
@@ -3472,41 +3197,46 @@
         <p:nvPr/>
       </p:nvGrpSpPr>
       <p:grpSpPr>
-        <a:xfrm xmlns:a="http://schemas.openxmlformats.org/drawingml/2006/main"/>
+        <a:xfrm>
+          <a:off x="0" y="0"/>
+          <a:ext cx="0" cy="0"/>
+          <a:chOff x="0" y="0"/>
+          <a:chExt cx="0" cy="0"/>
+        </a:xfrm>
       </p:grpSpPr>
       <p:sp>
         <p:nvSpPr>
-          <p:cNvPr id="7" name="">
-            <a:extLst xmlns:a="http://schemas.openxmlformats.org/drawingml/2006/main">
+          <p:cNvPr id="7" name="Rectangle 6">
+            <a:extLst>
               <a:ext uri="{FF2B5EF4-FFF2-40B4-BE49-F238E27FC236}">
                 <a16:creationId xmlns:a16="http://schemas.microsoft.com/office/drawing/2014/main" id="{C1791DE3-6F13-48FD-8733-DBC7B0F93B49}"/>
               </a:ext>
             </a:extLst>
           </p:cNvPr>
           <p:cNvSpPr>
-            <a:spLocks xmlns:a="http://schemas.openxmlformats.org/drawingml/2006/main" noGrp="1"/>
-          </p:cNvSpPr>
-          <p:nvPr/>
-        </p:nvSpPr>
-        <p:spPr>
-          <a:xfrm xmlns:a="http://schemas.openxmlformats.org/drawingml/2006/main">
+            <a:spLocks noGrp="1"/>
+          </p:cNvSpPr>
+          <p:nvPr/>
+        </p:nvSpPr>
+        <p:spPr>
+          <a:xfrm>
             <a:off x="714375" y="457200"/>
             <a:ext cx="12858750" cy="304800"/>
           </a:xfrm>
-          <a:prstGeom xmlns:a="http://schemas.openxmlformats.org/drawingml/2006/main" prst="rect">
-            <a:avLst/>
-          </a:prstGeom>
-          <a:noFill xmlns:a="http://schemas.openxmlformats.org/drawingml/2006/main"/>
-          <a:ln xmlns:a="http://schemas.openxmlformats.org/drawingml/2006/main" w="0">
+          <a:prstGeom prst="rect">
+            <a:avLst/>
+          </a:prstGeom>
+          <a:noFill/>
+          <a:ln w="0">
             <a:noFill/>
           </a:ln>
         </p:spPr>
         <p:txBody>
-          <a:bodyPr xmlns:a="http://schemas.openxmlformats.org/drawingml/2006/main">
+          <a:bodyPr>
             <a:noAutofit/>
           </a:bodyPr>
-          <a:lstStyle xmlns:a="http://schemas.openxmlformats.org/drawingml/2006/main"/>
-          <a:p xmlns:a="http://schemas.openxmlformats.org/drawingml/2006/main">
+          <a:lstStyle/>
+          <a:p>
             <a:pPr>
               <a:defRPr sz="1125">
                 <a:solidFill>
@@ -3533,37 +3263,37 @@
       </p:sp>
       <p:sp>
         <p:nvSpPr>
-          <p:cNvPr id="2" name="">
-            <a:extLst xmlns:a="http://schemas.openxmlformats.org/drawingml/2006/main">
+          <p:cNvPr id="2" name="Rectangle 1">
+            <a:extLst>
               <a:ext uri="{FF2B5EF4-FFF2-40B4-BE49-F238E27FC236}">
                 <a16:creationId xmlns:a16="http://schemas.microsoft.com/office/drawing/2014/main" id="{CEF2B0AA-5416-4307-AB61-22F16EA127BA}"/>
               </a:ext>
             </a:extLst>
           </p:cNvPr>
           <p:cNvSpPr>
-            <a:spLocks xmlns:a="http://schemas.openxmlformats.org/drawingml/2006/main" noGrp="1"/>
-          </p:cNvSpPr>
-          <p:nvPr/>
-        </p:nvSpPr>
-        <p:spPr>
-          <a:xfrm xmlns:a="http://schemas.openxmlformats.org/drawingml/2006/main">
+            <a:spLocks noGrp="1"/>
+          </p:cNvSpPr>
+          <p:nvPr/>
+        </p:nvSpPr>
+        <p:spPr>
+          <a:xfrm>
             <a:off x="13906500" y="7905750"/>
             <a:ext cx="666750" cy="285750"/>
           </a:xfrm>
-          <a:prstGeom xmlns:a="http://schemas.openxmlformats.org/drawingml/2006/main" prst="rect">
-            <a:avLst/>
-          </a:prstGeom>
-          <a:noFill xmlns:a="http://schemas.openxmlformats.org/drawingml/2006/main"/>
-          <a:ln xmlns:a="http://schemas.openxmlformats.org/drawingml/2006/main" w="0">
+          <a:prstGeom prst="rect">
+            <a:avLst/>
+          </a:prstGeom>
+          <a:noFill/>
+          <a:ln w="0">
             <a:noFill/>
           </a:ln>
         </p:spPr>
         <p:txBody>
-          <a:bodyPr xmlns:a="http://schemas.openxmlformats.org/drawingml/2006/main">
+          <a:bodyPr>
             <a:noAutofit/>
           </a:bodyPr>
-          <a:lstStyle xmlns:a="http://schemas.openxmlformats.org/drawingml/2006/main"/>
-          <a:p xmlns:a="http://schemas.openxmlformats.org/drawingml/2006/main">
+          <a:lstStyle/>
+          <a:p>
             <a:pPr>
               <a:defRPr sz="1125">
                 <a:solidFill>
@@ -3590,37 +3320,37 @@
       </p:sp>
       <p:sp>
         <p:nvSpPr>
-          <p:cNvPr id="3" name="">
-            <a:extLst xmlns:a="http://schemas.openxmlformats.org/drawingml/2006/main">
+          <p:cNvPr id="3" name="Rectangle 2">
+            <a:extLst>
               <a:ext uri="{FF2B5EF4-FFF2-40B4-BE49-F238E27FC236}">
                 <a16:creationId xmlns:a16="http://schemas.microsoft.com/office/drawing/2014/main" id="{45CE18AD-ACEC-48FF-878D-345E551F1420}"/>
               </a:ext>
             </a:extLst>
           </p:cNvPr>
           <p:cNvSpPr>
-            <a:spLocks xmlns:a="http://schemas.openxmlformats.org/drawingml/2006/main" noGrp="1"/>
-          </p:cNvSpPr>
-          <p:nvPr/>
-        </p:nvSpPr>
-        <p:spPr>
-          <a:xfrm xmlns:a="http://schemas.openxmlformats.org/drawingml/2006/main">
+            <a:spLocks noGrp="1"/>
+          </p:cNvSpPr>
+          <p:nvPr/>
+        </p:nvSpPr>
+        <p:spPr>
+          <a:xfrm>
             <a:off x="714375" y="1762125"/>
             <a:ext cx="7239000" cy="2571750"/>
           </a:xfrm>
-          <a:prstGeom xmlns:a="http://schemas.openxmlformats.org/drawingml/2006/main" prst="rect">
-            <a:avLst/>
-          </a:prstGeom>
-          <a:noFill xmlns:a="http://schemas.openxmlformats.org/drawingml/2006/main"/>
-          <a:ln xmlns:a="http://schemas.openxmlformats.org/drawingml/2006/main" w="0">
+          <a:prstGeom prst="rect">
+            <a:avLst/>
+          </a:prstGeom>
+          <a:noFill/>
+          <a:ln w="0">
             <a:noFill/>
           </a:ln>
         </p:spPr>
         <p:txBody>
-          <a:bodyPr xmlns:a="http://schemas.openxmlformats.org/drawingml/2006/main">
+          <a:bodyPr>
             <a:noAutofit/>
           </a:bodyPr>
-          <a:lstStyle xmlns:a="http://schemas.openxmlformats.org/drawingml/2006/main"/>
-          <a:p xmlns:a="http://schemas.openxmlformats.org/drawingml/2006/main">
+          <a:lstStyle/>
+          <a:p>
             <a:pPr>
               <a:defRPr sz="6750">
                 <a:solidFill>
@@ -3643,7 +3373,7 @@
               <a:t>The same calm,</a:t>
             </a:r>
           </a:p>
-          <a:p xmlns:a="http://schemas.openxmlformats.org/drawingml/2006/main">
+          <a:p>
             <a:pPr>
               <a:defRPr sz="6750">
                 <a:solidFill>
@@ -3670,37 +3400,37 @@
       </p:sp>
       <p:sp>
         <p:nvSpPr>
-          <p:cNvPr id="4" name="">
-            <a:extLst xmlns:a="http://schemas.openxmlformats.org/drawingml/2006/main">
+          <p:cNvPr id="4" name="Rectangle 3">
+            <a:extLst>
               <a:ext uri="{FF2B5EF4-FFF2-40B4-BE49-F238E27FC236}">
                 <a16:creationId xmlns:a16="http://schemas.microsoft.com/office/drawing/2014/main" id="{F623E8A6-BD8B-4199-9A0A-DD2B92D61EBF}"/>
               </a:ext>
             </a:extLst>
           </p:cNvPr>
           <p:cNvSpPr>
-            <a:spLocks xmlns:a="http://schemas.openxmlformats.org/drawingml/2006/main" noGrp="1"/>
-          </p:cNvSpPr>
-          <p:nvPr/>
-        </p:nvSpPr>
-        <p:spPr>
-          <a:xfrm xmlns:a="http://schemas.openxmlformats.org/drawingml/2006/main">
+            <a:spLocks noGrp="1"/>
+          </p:cNvSpPr>
+          <p:nvPr/>
+        </p:nvSpPr>
+        <p:spPr>
+          <a:xfrm>
             <a:off x="762000" y="5191125"/>
             <a:ext cx="6762750" cy="2190750"/>
           </a:xfrm>
-          <a:prstGeom xmlns:a="http://schemas.openxmlformats.org/drawingml/2006/main" prst="rect">
-            <a:avLst/>
-          </a:prstGeom>
-          <a:noFill xmlns:a="http://schemas.openxmlformats.org/drawingml/2006/main"/>
-          <a:ln xmlns:a="http://schemas.openxmlformats.org/drawingml/2006/main" w="0">
+          <a:prstGeom prst="rect">
+            <a:avLst/>
+          </a:prstGeom>
+          <a:noFill/>
+          <a:ln w="0">
             <a:noFill/>
           </a:ln>
         </p:spPr>
         <p:txBody>
-          <a:bodyPr xmlns:a="http://schemas.openxmlformats.org/drawingml/2006/main">
+          <a:bodyPr>
             <a:noAutofit/>
           </a:bodyPr>
-          <a:lstStyle xmlns:a="http://schemas.openxmlformats.org/drawingml/2006/main"/>
-          <a:p xmlns:a="http://schemas.openxmlformats.org/drawingml/2006/main">
+          <a:lstStyle/>
+          <a:p>
             <a:pPr>
               <a:defRPr sz="2100">
                 <a:solidFill>
@@ -3723,7 +3453,7 @@
               <a:t>An ivory canvas, expressive serif type and</a:t>
             </a:r>
           </a:p>
-          <a:p xmlns:a="http://schemas.openxmlformats.org/drawingml/2006/main">
+          <a:p>
             <a:pPr>
               <a:defRPr sz="2100">
                 <a:solidFill>
@@ -3746,12 +3476,17 @@
               <a:t>careful movement carry the identity online.</a:t>
             </a:r>
           </a:p>
-          <a:p xmlns:a="http://schemas.openxmlformats.org/drawingml/2006/main">
-            <a:r>
-              <a:t/>
-            </a:r>
-          </a:p>
-          <a:p xmlns:a="http://schemas.openxmlformats.org/drawingml/2006/main">
+          <a:p>
+            <a:endParaRPr sz="2100">
+              <a:solidFill>
+                <a:srgbClr val="3A332B"/>
+              </a:solidFill>
+              <a:latin typeface="Plus Jakarta Sans"/>
+              <a:ea typeface="Plus Jakarta Sans"/>
+              <a:cs typeface="Plus Jakarta Sans"/>
+            </a:endParaRPr>
+          </a:p>
+          <a:p>
             <a:pPr>
               <a:defRPr sz="2100">
                 <a:solidFill>
@@ -3774,7 +3509,7 @@
               <a:t>Treatments, the journal and visit information</a:t>
             </a:r>
           </a:p>
-          <a:p xmlns:a="http://schemas.openxmlformats.org/drawingml/2006/main">
+          <a:p>
             <a:pPr>
               <a:defRPr sz="2100">
                 <a:solidFill>
@@ -3801,62 +3536,62 @@
       </p:sp>
       <p:pic>
         <p:nvPicPr>
-          <p:cNvPr id="11" name=""/>
+          <p:cNvPr id="11" name="Picture 10"/>
           <p:cNvPicPr>
-            <a:picLocks xmlns:a="http://schemas.openxmlformats.org/drawingml/2006/main" noChangeAspect="1"/>
+            <a:picLocks noChangeAspect="1"/>
           </p:cNvPicPr>
           <p:nvPr/>
         </p:nvPicPr>
         <p:blipFill>
-          <a:blip xmlns:r="http://schemas.openxmlformats.org/officeDocument/2006/relationships" xmlns:a="http://schemas.openxmlformats.org/drawingml/2006/main" r:embed="R0277e302b0864893"/>
-          <a:srcRect xmlns:a="http://schemas.openxmlformats.org/drawingml/2006/main" l="0" t="7874" r="0" b="7874"/>
-          <a:stretch xmlns:a="http://schemas.openxmlformats.org/drawingml/2006/main">
-            <a:fillRect l="0" t="0" r="0" b="0"/>
+          <a:blip r:embed="rId3"/>
+          <a:srcRect t="7874" b="7874"/>
+          <a:stretch>
+            <a:fillRect/>
           </a:stretch>
         </p:blipFill>
         <p:spPr>
-          <a:xfrm xmlns:a="http://schemas.openxmlformats.org/drawingml/2006/main">
+          <a:xfrm>
             <a:off x="8763000" y="1143000"/>
             <a:ext cx="5715000" cy="6191250"/>
           </a:xfrm>
-          <a:prstGeom xmlns:a="http://schemas.openxmlformats.org/drawingml/2006/main" prst="rect">
+          <a:prstGeom prst="rect">
             <a:avLst/>
           </a:prstGeom>
         </p:spPr>
       </p:pic>
       <p:sp>
         <p:nvSpPr>
-          <p:cNvPr id="6" name="">
-            <a:extLst xmlns:a="http://schemas.openxmlformats.org/drawingml/2006/main">
+          <p:cNvPr id="6" name="Rectangle 5">
+            <a:extLst>
               <a:ext uri="{FF2B5EF4-FFF2-40B4-BE49-F238E27FC236}">
                 <a16:creationId xmlns:a16="http://schemas.microsoft.com/office/drawing/2014/main" id="{256FFAC5-7DAC-45F6-AECE-68197FD23AEA}"/>
               </a:ext>
             </a:extLst>
           </p:cNvPr>
           <p:cNvSpPr>
-            <a:spLocks xmlns:a="http://schemas.openxmlformats.org/drawingml/2006/main" noGrp="1"/>
-          </p:cNvSpPr>
-          <p:nvPr/>
-        </p:nvSpPr>
-        <p:spPr>
-          <a:xfrm xmlns:a="http://schemas.openxmlformats.org/drawingml/2006/main">
+            <a:spLocks noGrp="1"/>
+          </p:cNvSpPr>
+          <p:nvPr/>
+        </p:nvSpPr>
+        <p:spPr>
+          <a:xfrm>
             <a:off x="8810625" y="7667625"/>
             <a:ext cx="5619750" cy="381000"/>
           </a:xfrm>
-          <a:prstGeom xmlns:a="http://schemas.openxmlformats.org/drawingml/2006/main" prst="rect">
-            <a:avLst/>
-          </a:prstGeom>
-          <a:noFill xmlns:a="http://schemas.openxmlformats.org/drawingml/2006/main"/>
-          <a:ln xmlns:a="http://schemas.openxmlformats.org/drawingml/2006/main" w="0">
+          <a:prstGeom prst="rect">
+            <a:avLst/>
+          </a:prstGeom>
+          <a:noFill/>
+          <a:ln w="0">
             <a:noFill/>
           </a:ln>
         </p:spPr>
         <p:txBody>
-          <a:bodyPr xmlns:a="http://schemas.openxmlformats.org/drawingml/2006/main">
+          <a:bodyPr>
             <a:noAutofit/>
           </a:bodyPr>
-          <a:lstStyle xmlns:a="http://schemas.openxmlformats.org/drawingml/2006/main"/>
-          <a:p xmlns:a="http://schemas.openxmlformats.org/drawingml/2006/main">
+          <a:lstStyle/>
+          <a:p>
             <a:pPr>
               <a:defRPr sz="1425">
                 <a:solidFill>
@@ -3888,17 +3623,21 @@
       </p:ext>
     </p:extLst>
   </p:cSld>
+  <p:clrMapOvr>
+    <a:masterClrMapping/>
+  </p:clrMapOvr>
 </p:sld>
 </file>
 
 <file path=ppt/slides/slide14.xml><?xml version="1.0" encoding="utf-8"?>
-<p:sld xmlns:p="http://schemas.openxmlformats.org/presentationml/2006/main">
+<p:sld xmlns:a="http://schemas.openxmlformats.org/drawingml/2006/main" xmlns:r="http://schemas.openxmlformats.org/officeDocument/2006/relationships" xmlns:p="http://schemas.openxmlformats.org/presentationml/2006/main">
   <p:cSld>
     <p:bg>
       <p:bgPr>
-        <a:solidFill xmlns:a="http://schemas.openxmlformats.org/drawingml/2006/main">
+        <a:solidFill>
           <a:srgbClr val="3A332B"/>
         </a:solidFill>
+        <a:effectLst/>
       </p:bgPr>
     </p:bg>
     <p:spTree>
@@ -3908,41 +3647,46 @@
         <p:nvPr/>
       </p:nvGrpSpPr>
       <p:grpSpPr>
-        <a:xfrm xmlns:a="http://schemas.openxmlformats.org/drawingml/2006/main"/>
+        <a:xfrm>
+          <a:off x="0" y="0"/>
+          <a:ext cx="0" cy="0"/>
+          <a:chOff x="0" y="0"/>
+          <a:chExt cx="0" cy="0"/>
+        </a:xfrm>
       </p:grpSpPr>
       <p:sp>
         <p:nvSpPr>
-          <p:cNvPr id="5" name="">
-            <a:extLst xmlns:a="http://schemas.openxmlformats.org/drawingml/2006/main">
+          <p:cNvPr id="5" name="Rectangle 4">
+            <a:extLst>
               <a:ext uri="{FF2B5EF4-FFF2-40B4-BE49-F238E27FC236}">
                 <a16:creationId xmlns:a16="http://schemas.microsoft.com/office/drawing/2014/main" id="{09377D37-8F6A-4D15-98DB-4DDDFF60ED3C}"/>
               </a:ext>
             </a:extLst>
           </p:cNvPr>
           <p:cNvSpPr>
-            <a:spLocks xmlns:a="http://schemas.openxmlformats.org/drawingml/2006/main" noGrp="1"/>
-          </p:cNvSpPr>
-          <p:nvPr/>
-        </p:nvSpPr>
-        <p:spPr>
-          <a:xfrm xmlns:a="http://schemas.openxmlformats.org/drawingml/2006/main">
+            <a:spLocks noGrp="1"/>
+          </p:cNvSpPr>
+          <p:nvPr/>
+        </p:nvSpPr>
+        <p:spPr>
+          <a:xfrm>
             <a:off x="714375" y="457200"/>
             <a:ext cx="12858750" cy="304800"/>
           </a:xfrm>
-          <a:prstGeom xmlns:a="http://schemas.openxmlformats.org/drawingml/2006/main" prst="rect">
-            <a:avLst/>
-          </a:prstGeom>
-          <a:noFill xmlns:a="http://schemas.openxmlformats.org/drawingml/2006/main"/>
-          <a:ln xmlns:a="http://schemas.openxmlformats.org/drawingml/2006/main" w="0">
+          <a:prstGeom prst="rect">
+            <a:avLst/>
+          </a:prstGeom>
+          <a:noFill/>
+          <a:ln w="0">
             <a:noFill/>
           </a:ln>
         </p:spPr>
         <p:txBody>
-          <a:bodyPr xmlns:a="http://schemas.openxmlformats.org/drawingml/2006/main">
+          <a:bodyPr>
             <a:noAutofit/>
           </a:bodyPr>
-          <a:lstStyle xmlns:a="http://schemas.openxmlformats.org/drawingml/2006/main"/>
-          <a:p xmlns:a="http://schemas.openxmlformats.org/drawingml/2006/main">
+          <a:lstStyle/>
+          <a:p>
             <a:pPr>
               <a:defRPr sz="1125">
                 <a:solidFill>
@@ -3969,37 +3713,37 @@
       </p:sp>
       <p:sp>
         <p:nvSpPr>
-          <p:cNvPr id="2" name="">
-            <a:extLst xmlns:a="http://schemas.openxmlformats.org/drawingml/2006/main">
+          <p:cNvPr id="2" name="Rectangle 1">
+            <a:extLst>
               <a:ext uri="{FF2B5EF4-FFF2-40B4-BE49-F238E27FC236}">
                 <a16:creationId xmlns:a16="http://schemas.microsoft.com/office/drawing/2014/main" id="{1EC9F843-A376-44A2-80DD-63F0047AA990}"/>
               </a:ext>
             </a:extLst>
           </p:cNvPr>
           <p:cNvSpPr>
-            <a:spLocks xmlns:a="http://schemas.openxmlformats.org/drawingml/2006/main" noGrp="1"/>
-          </p:cNvSpPr>
-          <p:nvPr/>
-        </p:nvSpPr>
-        <p:spPr>
-          <a:xfrm xmlns:a="http://schemas.openxmlformats.org/drawingml/2006/main">
+            <a:spLocks noGrp="1"/>
+          </p:cNvSpPr>
+          <p:nvPr/>
+        </p:nvSpPr>
+        <p:spPr>
+          <a:xfrm>
             <a:off x="13906500" y="7905750"/>
             <a:ext cx="666750" cy="285750"/>
           </a:xfrm>
-          <a:prstGeom xmlns:a="http://schemas.openxmlformats.org/drawingml/2006/main" prst="rect">
-            <a:avLst/>
-          </a:prstGeom>
-          <a:noFill xmlns:a="http://schemas.openxmlformats.org/drawingml/2006/main"/>
-          <a:ln xmlns:a="http://schemas.openxmlformats.org/drawingml/2006/main" w="0">
+          <a:prstGeom prst="rect">
+            <a:avLst/>
+          </a:prstGeom>
+          <a:noFill/>
+          <a:ln w="0">
             <a:noFill/>
           </a:ln>
         </p:spPr>
         <p:txBody>
-          <a:bodyPr xmlns:a="http://schemas.openxmlformats.org/drawingml/2006/main">
+          <a:bodyPr>
             <a:noAutofit/>
           </a:bodyPr>
-          <a:lstStyle xmlns:a="http://schemas.openxmlformats.org/drawingml/2006/main"/>
-          <a:p xmlns:a="http://schemas.openxmlformats.org/drawingml/2006/main">
+          <a:lstStyle/>
+          <a:p>
             <a:pPr>
               <a:defRPr sz="1125">
                 <a:solidFill>
@@ -4026,37 +3770,37 @@
       </p:sp>
       <p:sp>
         <p:nvSpPr>
-          <p:cNvPr id="3" name="">
-            <a:extLst xmlns:a="http://schemas.openxmlformats.org/drawingml/2006/main">
+          <p:cNvPr id="3" name="Rectangle 2">
+            <a:extLst>
               <a:ext uri="{FF2B5EF4-FFF2-40B4-BE49-F238E27FC236}">
                 <a16:creationId xmlns:a16="http://schemas.microsoft.com/office/drawing/2014/main" id="{87C209D8-9F2F-422A-A8A1-2780B52A8B64}"/>
               </a:ext>
             </a:extLst>
           </p:cNvPr>
           <p:cNvSpPr>
-            <a:spLocks xmlns:a="http://schemas.openxmlformats.org/drawingml/2006/main" noGrp="1"/>
-          </p:cNvSpPr>
-          <p:nvPr/>
-        </p:nvSpPr>
-        <p:spPr>
-          <a:xfrm xmlns:a="http://schemas.openxmlformats.org/drawingml/2006/main">
+            <a:spLocks noGrp="1"/>
+          </p:cNvSpPr>
+          <p:nvPr/>
+        </p:nvSpPr>
+        <p:spPr>
+          <a:xfrm>
             <a:off x="1428750" y="2476500"/>
             <a:ext cx="12477750" cy="3238500"/>
           </a:xfrm>
-          <a:prstGeom xmlns:a="http://schemas.openxmlformats.org/drawingml/2006/main" prst="rect">
-            <a:avLst/>
-          </a:prstGeom>
-          <a:noFill xmlns:a="http://schemas.openxmlformats.org/drawingml/2006/main"/>
-          <a:ln xmlns:a="http://schemas.openxmlformats.org/drawingml/2006/main" w="0">
+          <a:prstGeom prst="rect">
+            <a:avLst/>
+          </a:prstGeom>
+          <a:noFill/>
+          <a:ln w="0">
             <a:noFill/>
           </a:ln>
         </p:spPr>
         <p:txBody>
-          <a:bodyPr xmlns:a="http://schemas.openxmlformats.org/drawingml/2006/main">
+          <a:bodyPr>
             <a:noAutofit/>
           </a:bodyPr>
-          <a:lstStyle xmlns:a="http://schemas.openxmlformats.org/drawingml/2006/main"/>
-          <a:p xmlns:a="http://schemas.openxmlformats.org/drawingml/2006/main">
+          <a:lstStyle/>
+          <a:p>
             <a:pPr>
               <a:defRPr sz="10125">
                 <a:solidFill>
@@ -4079,7 +3823,7 @@
               <a:t>Slower days.</a:t>
             </a:r>
           </a:p>
-          <a:p xmlns:a="http://schemas.openxmlformats.org/drawingml/2006/main">
+          <a:p>
             <a:pPr>
               <a:defRPr sz="10125">
                 <a:solidFill>
@@ -4106,37 +3850,37 @@
       </p:sp>
       <p:sp>
         <p:nvSpPr>
-          <p:cNvPr id="4" name="">
-            <a:extLst xmlns:a="http://schemas.openxmlformats.org/drawingml/2006/main">
+          <p:cNvPr id="4" name="Rectangle 3">
+            <a:extLst>
               <a:ext uri="{FF2B5EF4-FFF2-40B4-BE49-F238E27FC236}">
                 <a16:creationId xmlns:a16="http://schemas.microsoft.com/office/drawing/2014/main" id="{7B31D4A0-28A5-431F-87F1-73DC99BBADD5}"/>
               </a:ext>
             </a:extLst>
           </p:cNvPr>
           <p:cNvSpPr>
-            <a:spLocks xmlns:a="http://schemas.openxmlformats.org/drawingml/2006/main" noGrp="1"/>
-          </p:cNvSpPr>
-          <p:nvPr/>
-        </p:nvSpPr>
-        <p:spPr>
-          <a:xfrm xmlns:a="http://schemas.openxmlformats.org/drawingml/2006/main">
+            <a:spLocks noGrp="1"/>
+          </p:cNvSpPr>
+          <p:nvPr/>
+        </p:nvSpPr>
+        <p:spPr>
+          <a:xfrm>
             <a:off x="1476375" y="7000875"/>
             <a:ext cx="11715750" cy="476250"/>
           </a:xfrm>
-          <a:prstGeom xmlns:a="http://schemas.openxmlformats.org/drawingml/2006/main" prst="rect">
-            <a:avLst/>
-          </a:prstGeom>
-          <a:noFill xmlns:a="http://schemas.openxmlformats.org/drawingml/2006/main"/>
-          <a:ln xmlns:a="http://schemas.openxmlformats.org/drawingml/2006/main" w="0">
+          <a:prstGeom prst="rect">
+            <a:avLst/>
+          </a:prstGeom>
+          <a:noFill/>
+          <a:ln w="0">
             <a:noFill/>
           </a:ln>
         </p:spPr>
         <p:txBody>
-          <a:bodyPr xmlns:a="http://schemas.openxmlformats.org/drawingml/2006/main">
+          <a:bodyPr>
             <a:noAutofit/>
           </a:bodyPr>
-          <a:lstStyle xmlns:a="http://schemas.openxmlformats.org/drawingml/2006/main"/>
-          <a:p xmlns:a="http://schemas.openxmlformats.org/drawingml/2006/main">
+          <a:lstStyle/>
+          <a:p>
             <a:pPr>
               <a:defRPr sz="1875">
                 <a:solidFill>
@@ -4168,17 +3912,21 @@
       </p:ext>
     </p:extLst>
   </p:cSld>
+  <p:clrMapOvr>
+    <a:masterClrMapping/>
+  </p:clrMapOvr>
 </p:sld>
 </file>
 
 <file path=ppt/slides/slide2.xml><?xml version="1.0" encoding="utf-8"?>
-<p:sld xmlns:p="http://schemas.openxmlformats.org/presentationml/2006/main">
+<p:sld xmlns:a="http://schemas.openxmlformats.org/drawingml/2006/main" xmlns:r="http://schemas.openxmlformats.org/officeDocument/2006/relationships" xmlns:p="http://schemas.openxmlformats.org/presentationml/2006/main">
   <p:cSld>
     <p:bg>
       <p:bgPr>
-        <a:solidFill xmlns:a="http://schemas.openxmlformats.org/drawingml/2006/main">
+        <a:solidFill>
           <a:srgbClr val="F6F3ED"/>
         </a:solidFill>
+        <a:effectLst/>
       </p:bgPr>
     </p:bg>
     <p:spTree>
@@ -4188,41 +3936,46 @@
         <p:nvPr/>
       </p:nvGrpSpPr>
       <p:grpSpPr>
-        <a:xfrm xmlns:a="http://schemas.openxmlformats.org/drawingml/2006/main"/>
+        <a:xfrm>
+          <a:off x="0" y="0"/>
+          <a:ext cx="0" cy="0"/>
+          <a:chOff x="0" y="0"/>
+          <a:chExt cx="0" cy="0"/>
+        </a:xfrm>
       </p:grpSpPr>
       <p:sp>
         <p:nvSpPr>
-          <p:cNvPr id="6" name="">
-            <a:extLst xmlns:a="http://schemas.openxmlformats.org/drawingml/2006/main">
+          <p:cNvPr id="6" name="Rectangle 5">
+            <a:extLst>
               <a:ext uri="{FF2B5EF4-FFF2-40B4-BE49-F238E27FC236}">
                 <a16:creationId xmlns:a16="http://schemas.microsoft.com/office/drawing/2014/main" id="{D1E28B46-F00E-4CBE-8894-A788FFF35B8F}"/>
               </a:ext>
             </a:extLst>
           </p:cNvPr>
           <p:cNvSpPr>
-            <a:spLocks xmlns:a="http://schemas.openxmlformats.org/drawingml/2006/main" noGrp="1"/>
-          </p:cNvSpPr>
-          <p:nvPr/>
-        </p:nvSpPr>
-        <p:spPr>
-          <a:xfrm xmlns:a="http://schemas.openxmlformats.org/drawingml/2006/main">
+            <a:spLocks noGrp="1"/>
+          </p:cNvSpPr>
+          <p:nvPr/>
+        </p:nvSpPr>
+        <p:spPr>
+          <a:xfrm>
             <a:off x="714375" y="457200"/>
             <a:ext cx="12858750" cy="304800"/>
           </a:xfrm>
-          <a:prstGeom xmlns:a="http://schemas.openxmlformats.org/drawingml/2006/main" prst="rect">
-            <a:avLst/>
-          </a:prstGeom>
-          <a:noFill xmlns:a="http://schemas.openxmlformats.org/drawingml/2006/main"/>
-          <a:ln xmlns:a="http://schemas.openxmlformats.org/drawingml/2006/main" w="0">
+          <a:prstGeom prst="rect">
+            <a:avLst/>
+          </a:prstGeom>
+          <a:noFill/>
+          <a:ln w="0">
             <a:noFill/>
           </a:ln>
         </p:spPr>
         <p:txBody>
-          <a:bodyPr xmlns:a="http://schemas.openxmlformats.org/drawingml/2006/main">
+          <a:bodyPr>
             <a:noAutofit/>
           </a:bodyPr>
-          <a:lstStyle xmlns:a="http://schemas.openxmlformats.org/drawingml/2006/main"/>
-          <a:p xmlns:a="http://schemas.openxmlformats.org/drawingml/2006/main">
+          <a:lstStyle/>
+          <a:p>
             <a:pPr>
               <a:defRPr sz="1125">
                 <a:solidFill>
@@ -4249,37 +4002,37 @@
       </p:sp>
       <p:sp>
         <p:nvSpPr>
-          <p:cNvPr id="2" name="">
-            <a:extLst xmlns:a="http://schemas.openxmlformats.org/drawingml/2006/main">
+          <p:cNvPr id="2" name="Rectangle 1">
+            <a:extLst>
               <a:ext uri="{FF2B5EF4-FFF2-40B4-BE49-F238E27FC236}">
                 <a16:creationId xmlns:a16="http://schemas.microsoft.com/office/drawing/2014/main" id="{F377D3C5-F4D0-45CF-8021-9381774A8699}"/>
               </a:ext>
             </a:extLst>
           </p:cNvPr>
           <p:cNvSpPr>
-            <a:spLocks xmlns:a="http://schemas.openxmlformats.org/drawingml/2006/main" noGrp="1"/>
-          </p:cNvSpPr>
-          <p:nvPr/>
-        </p:nvSpPr>
-        <p:spPr>
-          <a:xfrm xmlns:a="http://schemas.openxmlformats.org/drawingml/2006/main">
+            <a:spLocks noGrp="1"/>
+          </p:cNvSpPr>
+          <p:nvPr/>
+        </p:nvSpPr>
+        <p:spPr>
+          <a:xfrm>
             <a:off x="13906500" y="7905750"/>
             <a:ext cx="666750" cy="285750"/>
           </a:xfrm>
-          <a:prstGeom xmlns:a="http://schemas.openxmlformats.org/drawingml/2006/main" prst="rect">
-            <a:avLst/>
-          </a:prstGeom>
-          <a:noFill xmlns:a="http://schemas.openxmlformats.org/drawingml/2006/main"/>
-          <a:ln xmlns:a="http://schemas.openxmlformats.org/drawingml/2006/main" w="0">
+          <a:prstGeom prst="rect">
+            <a:avLst/>
+          </a:prstGeom>
+          <a:noFill/>
+          <a:ln w="0">
             <a:noFill/>
           </a:ln>
         </p:spPr>
         <p:txBody>
-          <a:bodyPr xmlns:a="http://schemas.openxmlformats.org/drawingml/2006/main">
+          <a:bodyPr>
             <a:noAutofit/>
           </a:bodyPr>
-          <a:lstStyle xmlns:a="http://schemas.openxmlformats.org/drawingml/2006/main"/>
-          <a:p xmlns:a="http://schemas.openxmlformats.org/drawingml/2006/main">
+          <a:lstStyle/>
+          <a:p>
             <a:pPr>
               <a:defRPr sz="1125">
                 <a:solidFill>
@@ -4306,37 +4059,37 @@
       </p:sp>
       <p:sp>
         <p:nvSpPr>
-          <p:cNvPr id="3" name="">
-            <a:extLst xmlns:a="http://schemas.openxmlformats.org/drawingml/2006/main">
+          <p:cNvPr id="3" name="Rectangle 2">
+            <a:extLst>
               <a:ext uri="{FF2B5EF4-FFF2-40B4-BE49-F238E27FC236}">
                 <a16:creationId xmlns:a16="http://schemas.microsoft.com/office/drawing/2014/main" id="{E2BDCEED-3033-447F-A589-87FFDE08F3C4}"/>
               </a:ext>
             </a:extLst>
           </p:cNvPr>
           <p:cNvSpPr>
-            <a:spLocks xmlns:a="http://schemas.openxmlformats.org/drawingml/2006/main" noGrp="1"/>
-          </p:cNvSpPr>
-          <p:nvPr/>
-        </p:nvSpPr>
-        <p:spPr>
-          <a:xfrm xmlns:a="http://schemas.openxmlformats.org/drawingml/2006/main">
+            <a:spLocks noGrp="1"/>
+          </p:cNvSpPr>
+          <p:nvPr/>
+        </p:nvSpPr>
+        <p:spPr>
+          <a:xfrm>
             <a:off x="714375" y="1809750"/>
             <a:ext cx="6286500" cy="2857500"/>
           </a:xfrm>
-          <a:prstGeom xmlns:a="http://schemas.openxmlformats.org/drawingml/2006/main" prst="rect">
-            <a:avLst/>
-          </a:prstGeom>
-          <a:noFill xmlns:a="http://schemas.openxmlformats.org/drawingml/2006/main"/>
-          <a:ln xmlns:a="http://schemas.openxmlformats.org/drawingml/2006/main" w="0">
+          <a:prstGeom prst="rect">
+            <a:avLst/>
+          </a:prstGeom>
+          <a:noFill/>
+          <a:ln w="0">
             <a:noFill/>
           </a:ln>
         </p:spPr>
         <p:txBody>
-          <a:bodyPr xmlns:a="http://schemas.openxmlformats.org/drawingml/2006/main">
+          <a:bodyPr>
             <a:noAutofit/>
           </a:bodyPr>
-          <a:lstStyle xmlns:a="http://schemas.openxmlformats.org/drawingml/2006/main"/>
-          <a:p xmlns:a="http://schemas.openxmlformats.org/drawingml/2006/main">
+          <a:lstStyle/>
+          <a:p>
             <a:pPr>
               <a:defRPr sz="8100">
                 <a:solidFill>
@@ -4359,7 +4112,7 @@
               <a:t>More than</a:t>
             </a:r>
           </a:p>
-          <a:p xmlns:a="http://schemas.openxmlformats.org/drawingml/2006/main">
+          <a:p>
             <a:pPr>
               <a:defRPr sz="8100">
                 <a:solidFill>
@@ -4386,37 +4139,37 @@
       </p:sp>
       <p:sp>
         <p:nvSpPr>
-          <p:cNvPr id="4" name="">
-            <a:extLst xmlns:a="http://schemas.openxmlformats.org/drawingml/2006/main">
+          <p:cNvPr id="4" name="Rectangle 3">
+            <a:extLst>
               <a:ext uri="{FF2B5EF4-FFF2-40B4-BE49-F238E27FC236}">
                 <a16:creationId xmlns:a16="http://schemas.microsoft.com/office/drawing/2014/main" id="{E46C47F1-2614-44EF-847C-124213F5D29C}"/>
               </a:ext>
             </a:extLst>
           </p:cNvPr>
           <p:cNvSpPr>
-            <a:spLocks xmlns:a="http://schemas.openxmlformats.org/drawingml/2006/main" noGrp="1"/>
-          </p:cNvSpPr>
-          <p:nvPr/>
-        </p:nvSpPr>
-        <p:spPr>
-          <a:xfrm xmlns:a="http://schemas.openxmlformats.org/drawingml/2006/main">
+            <a:spLocks noGrp="1"/>
+          </p:cNvSpPr>
+          <p:nvPr/>
+        </p:nvSpPr>
+        <p:spPr>
+          <a:xfrm>
             <a:off x="762000" y="5619750"/>
             <a:ext cx="5238750" cy="1238250"/>
           </a:xfrm>
-          <a:prstGeom xmlns:a="http://schemas.openxmlformats.org/drawingml/2006/main" prst="rect">
-            <a:avLst/>
-          </a:prstGeom>
-          <a:noFill xmlns:a="http://schemas.openxmlformats.org/drawingml/2006/main"/>
-          <a:ln xmlns:a="http://schemas.openxmlformats.org/drawingml/2006/main" w="0">
+          <a:prstGeom prst="rect">
+            <a:avLst/>
+          </a:prstGeom>
+          <a:noFill/>
+          <a:ln w="0">
             <a:noFill/>
           </a:ln>
         </p:spPr>
         <p:txBody>
-          <a:bodyPr xmlns:a="http://schemas.openxmlformats.org/drawingml/2006/main">
+          <a:bodyPr>
             <a:noAutofit/>
           </a:bodyPr>
-          <a:lstStyle xmlns:a="http://schemas.openxmlformats.org/drawingml/2006/main"/>
-          <a:p xmlns:a="http://schemas.openxmlformats.org/drawingml/2006/main">
+          <a:lstStyle/>
+          <a:p>
             <a:pPr>
               <a:defRPr sz="2100">
                 <a:solidFill>
@@ -4439,7 +4192,7 @@
               <a:t>Culture. People. Nature.</a:t>
             </a:r>
           </a:p>
-          <a:p xmlns:a="http://schemas.openxmlformats.org/drawingml/2006/main">
+          <a:p>
             <a:pPr>
               <a:defRPr sz="2100">
                 <a:solidFill>
@@ -4466,25 +4219,25 @@
       </p:sp>
       <p:pic>
         <p:nvPicPr>
-          <p:cNvPr id="10" name=""/>
+          <p:cNvPr id="10" name="Picture 9"/>
           <p:cNvPicPr>
-            <a:picLocks xmlns:a="http://schemas.openxmlformats.org/drawingml/2006/main" noChangeAspect="1"/>
+            <a:picLocks noChangeAspect="1"/>
           </p:cNvPicPr>
           <p:nvPr/>
         </p:nvPicPr>
         <p:blipFill>
-          <a:blip xmlns:r="http://schemas.openxmlformats.org/officeDocument/2006/relationships" xmlns:a="http://schemas.openxmlformats.org/drawingml/2006/main" r:embed="R770534cbd05a43af"/>
-          <a:srcRect xmlns:a="http://schemas.openxmlformats.org/drawingml/2006/main" l="20750" t="0" r="20750" b="0"/>
-          <a:stretch xmlns:a="http://schemas.openxmlformats.org/drawingml/2006/main">
-            <a:fillRect l="0" t="0" r="0" b="0"/>
+          <a:blip r:embed="rId3"/>
+          <a:srcRect l="20750" r="20750"/>
+          <a:stretch>
+            <a:fillRect/>
           </a:stretch>
         </p:blipFill>
         <p:spPr>
-          <a:xfrm xmlns:a="http://schemas.openxmlformats.org/drawingml/2006/main">
+          <a:xfrm>
             <a:off x="7524750" y="0"/>
             <a:ext cx="7715250" cy="8572500"/>
           </a:xfrm>
-          <a:prstGeom xmlns:a="http://schemas.openxmlformats.org/drawingml/2006/main" prst="rect">
+          <a:prstGeom prst="rect">
             <a:avLst/>
           </a:prstGeom>
         </p:spPr>
@@ -4496,17 +4249,21 @@
       </p:ext>
     </p:extLst>
   </p:cSld>
+  <p:clrMapOvr>
+    <a:masterClrMapping/>
+  </p:clrMapOvr>
 </p:sld>
 </file>
 
 <file path=ppt/slides/slide3.xml><?xml version="1.0" encoding="utf-8"?>
-<p:sld xmlns:p="http://schemas.openxmlformats.org/presentationml/2006/main">
+<p:sld xmlns:a="http://schemas.openxmlformats.org/drawingml/2006/main" xmlns:r="http://schemas.openxmlformats.org/officeDocument/2006/relationships" xmlns:p="http://schemas.openxmlformats.org/presentationml/2006/main">
   <p:cSld>
     <p:bg>
       <p:bgPr>
-        <a:solidFill xmlns:a="http://schemas.openxmlformats.org/drawingml/2006/main">
+        <a:solidFill>
           <a:srgbClr val="F6F3ED"/>
         </a:solidFill>
+        <a:effectLst/>
       </p:bgPr>
     </p:bg>
     <p:spTree>
@@ -4516,41 +4273,46 @@
         <p:nvPr/>
       </p:nvGrpSpPr>
       <p:grpSpPr>
-        <a:xfrm xmlns:a="http://schemas.openxmlformats.org/drawingml/2006/main"/>
+        <a:xfrm>
+          <a:off x="0" y="0"/>
+          <a:ext cx="0" cy="0"/>
+          <a:chOff x="0" y="0"/>
+          <a:chExt cx="0" cy="0"/>
+        </a:xfrm>
       </p:grpSpPr>
       <p:sp>
         <p:nvSpPr>
-          <p:cNvPr id="6" name="">
-            <a:extLst xmlns:a="http://schemas.openxmlformats.org/drawingml/2006/main">
+          <p:cNvPr id="6" name="Rectangle 5">
+            <a:extLst>
               <a:ext uri="{FF2B5EF4-FFF2-40B4-BE49-F238E27FC236}">
                 <a16:creationId xmlns:a16="http://schemas.microsoft.com/office/drawing/2014/main" id="{180F48BB-AEB0-4705-AB4A-CC41CAE9AFC9}"/>
               </a:ext>
             </a:extLst>
           </p:cNvPr>
           <p:cNvSpPr>
-            <a:spLocks xmlns:a="http://schemas.openxmlformats.org/drawingml/2006/main" noGrp="1"/>
-          </p:cNvSpPr>
-          <p:nvPr/>
-        </p:nvSpPr>
-        <p:spPr>
-          <a:xfrm xmlns:a="http://schemas.openxmlformats.org/drawingml/2006/main">
+            <a:spLocks noGrp="1"/>
+          </p:cNvSpPr>
+          <p:nvPr/>
+        </p:nvSpPr>
+        <p:spPr>
+          <a:xfrm>
             <a:off x="714375" y="457200"/>
             <a:ext cx="12858750" cy="304800"/>
           </a:xfrm>
-          <a:prstGeom xmlns:a="http://schemas.openxmlformats.org/drawingml/2006/main" prst="rect">
-            <a:avLst/>
-          </a:prstGeom>
-          <a:noFill xmlns:a="http://schemas.openxmlformats.org/drawingml/2006/main"/>
-          <a:ln xmlns:a="http://schemas.openxmlformats.org/drawingml/2006/main" w="0">
+          <a:prstGeom prst="rect">
+            <a:avLst/>
+          </a:prstGeom>
+          <a:noFill/>
+          <a:ln w="0">
             <a:noFill/>
           </a:ln>
         </p:spPr>
         <p:txBody>
-          <a:bodyPr xmlns:a="http://schemas.openxmlformats.org/drawingml/2006/main">
+          <a:bodyPr>
             <a:noAutofit/>
           </a:bodyPr>
-          <a:lstStyle xmlns:a="http://schemas.openxmlformats.org/drawingml/2006/main"/>
-          <a:p xmlns:a="http://schemas.openxmlformats.org/drawingml/2006/main">
+          <a:lstStyle/>
+          <a:p>
             <a:pPr>
               <a:defRPr sz="1125">
                 <a:solidFill>
@@ -4577,37 +4339,37 @@
       </p:sp>
       <p:sp>
         <p:nvSpPr>
-          <p:cNvPr id="2" name="">
-            <a:extLst xmlns:a="http://schemas.openxmlformats.org/drawingml/2006/main">
+          <p:cNvPr id="2" name="Rectangle 1">
+            <a:extLst>
               <a:ext uri="{FF2B5EF4-FFF2-40B4-BE49-F238E27FC236}">
                 <a16:creationId xmlns:a16="http://schemas.microsoft.com/office/drawing/2014/main" id="{FF89A317-334E-4D97-9A35-9FFC5232B379}"/>
               </a:ext>
             </a:extLst>
           </p:cNvPr>
           <p:cNvSpPr>
-            <a:spLocks xmlns:a="http://schemas.openxmlformats.org/drawingml/2006/main" noGrp="1"/>
-          </p:cNvSpPr>
-          <p:nvPr/>
-        </p:nvSpPr>
-        <p:spPr>
-          <a:xfrm xmlns:a="http://schemas.openxmlformats.org/drawingml/2006/main">
+            <a:spLocks noGrp="1"/>
+          </p:cNvSpPr>
+          <p:nvPr/>
+        </p:nvSpPr>
+        <p:spPr>
+          <a:xfrm>
             <a:off x="13906500" y="7905750"/>
             <a:ext cx="666750" cy="285750"/>
           </a:xfrm>
-          <a:prstGeom xmlns:a="http://schemas.openxmlformats.org/drawingml/2006/main" prst="rect">
-            <a:avLst/>
-          </a:prstGeom>
-          <a:noFill xmlns:a="http://schemas.openxmlformats.org/drawingml/2006/main"/>
-          <a:ln xmlns:a="http://schemas.openxmlformats.org/drawingml/2006/main" w="0">
+          <a:prstGeom prst="rect">
+            <a:avLst/>
+          </a:prstGeom>
+          <a:noFill/>
+          <a:ln w="0">
             <a:noFill/>
           </a:ln>
         </p:spPr>
         <p:txBody>
-          <a:bodyPr xmlns:a="http://schemas.openxmlformats.org/drawingml/2006/main">
+          <a:bodyPr>
             <a:noAutofit/>
           </a:bodyPr>
-          <a:lstStyle xmlns:a="http://schemas.openxmlformats.org/drawingml/2006/main"/>
-          <a:p xmlns:a="http://schemas.openxmlformats.org/drawingml/2006/main">
+          <a:lstStyle/>
+          <a:p>
             <a:pPr>
               <a:defRPr sz="1125">
                 <a:solidFill>
@@ -4634,37 +4396,37 @@
       </p:sp>
       <p:sp>
         <p:nvSpPr>
-          <p:cNvPr id="3" name="">
-            <a:extLst xmlns:a="http://schemas.openxmlformats.org/drawingml/2006/main">
+          <p:cNvPr id="3" name="Rectangle 2">
+            <a:extLst>
               <a:ext uri="{FF2B5EF4-FFF2-40B4-BE49-F238E27FC236}">
                 <a16:creationId xmlns:a16="http://schemas.microsoft.com/office/drawing/2014/main" id="{E070EDAE-9E1E-4A20-BAED-3B26F27FF2E9}"/>
               </a:ext>
             </a:extLst>
           </p:cNvPr>
           <p:cNvSpPr>
-            <a:spLocks xmlns:a="http://schemas.openxmlformats.org/drawingml/2006/main" noGrp="1"/>
-          </p:cNvSpPr>
-          <p:nvPr/>
-        </p:nvSpPr>
-        <p:spPr>
-          <a:xfrm xmlns:a="http://schemas.openxmlformats.org/drawingml/2006/main">
+            <a:spLocks noGrp="1"/>
+          </p:cNvSpPr>
+          <p:nvPr/>
+        </p:nvSpPr>
+        <p:spPr>
+          <a:xfrm>
             <a:off x="714375" y="1666875"/>
             <a:ext cx="7620000" cy="4095750"/>
           </a:xfrm>
-          <a:prstGeom xmlns:a="http://schemas.openxmlformats.org/drawingml/2006/main" prst="rect">
-            <a:avLst/>
-          </a:prstGeom>
-          <a:noFill xmlns:a="http://schemas.openxmlformats.org/drawingml/2006/main"/>
-          <a:ln xmlns:a="http://schemas.openxmlformats.org/drawingml/2006/main" w="0">
+          <a:prstGeom prst="rect">
+            <a:avLst/>
+          </a:prstGeom>
+          <a:noFill/>
+          <a:ln w="0">
             <a:noFill/>
           </a:ln>
         </p:spPr>
         <p:txBody>
-          <a:bodyPr xmlns:a="http://schemas.openxmlformats.org/drawingml/2006/main">
+          <a:bodyPr>
             <a:noAutofit/>
           </a:bodyPr>
-          <a:lstStyle xmlns:a="http://schemas.openxmlformats.org/drawingml/2006/main"/>
-          <a:p xmlns:a="http://schemas.openxmlformats.org/drawingml/2006/main">
+          <a:lstStyle/>
+          <a:p>
             <a:pPr>
               <a:defRPr sz="6900">
                 <a:solidFill>
@@ -4687,7 +4449,7 @@
               <a:t>Rooted in today,</a:t>
             </a:r>
           </a:p>
-          <a:p xmlns:a="http://schemas.openxmlformats.org/drawingml/2006/main">
+          <a:p>
             <a:pPr>
               <a:defRPr sz="6900">
                 <a:solidFill>
@@ -4710,7 +4472,7 @@
               <a:t>inspired by</a:t>
             </a:r>
           </a:p>
-          <a:p xmlns:a="http://schemas.openxmlformats.org/drawingml/2006/main">
+          <a:p>
             <a:pPr>
               <a:defRPr sz="6900">
                 <a:solidFill>
@@ -4737,37 +4499,37 @@
       </p:sp>
       <p:sp>
         <p:nvSpPr>
-          <p:cNvPr id="4" name="">
-            <a:extLst xmlns:a="http://schemas.openxmlformats.org/drawingml/2006/main">
+          <p:cNvPr id="4" name="Rectangle 3">
+            <a:extLst>
               <a:ext uri="{FF2B5EF4-FFF2-40B4-BE49-F238E27FC236}">
                 <a16:creationId xmlns:a16="http://schemas.microsoft.com/office/drawing/2014/main" id="{F64E9EBF-1746-4F57-8305-62601323E111}"/>
               </a:ext>
             </a:extLst>
           </p:cNvPr>
           <p:cNvSpPr>
-            <a:spLocks xmlns:a="http://schemas.openxmlformats.org/drawingml/2006/main" noGrp="1"/>
-          </p:cNvSpPr>
-          <p:nvPr/>
-        </p:nvSpPr>
-        <p:spPr>
-          <a:xfrm xmlns:a="http://schemas.openxmlformats.org/drawingml/2006/main">
+            <a:spLocks noGrp="1"/>
+          </p:cNvSpPr>
+          <p:nvPr/>
+        </p:nvSpPr>
+        <p:spPr>
+          <a:xfrm>
             <a:off x="762000" y="6238875"/>
             <a:ext cx="6667500" cy="1333500"/>
           </a:xfrm>
-          <a:prstGeom xmlns:a="http://schemas.openxmlformats.org/drawingml/2006/main" prst="rect">
-            <a:avLst/>
-          </a:prstGeom>
-          <a:noFill xmlns:a="http://schemas.openxmlformats.org/drawingml/2006/main"/>
-          <a:ln xmlns:a="http://schemas.openxmlformats.org/drawingml/2006/main" w="0">
+          <a:prstGeom prst="rect">
+            <a:avLst/>
+          </a:prstGeom>
+          <a:noFill/>
+          <a:ln w="0">
             <a:noFill/>
           </a:ln>
         </p:spPr>
         <p:txBody>
-          <a:bodyPr xmlns:a="http://schemas.openxmlformats.org/drawingml/2006/main">
+          <a:bodyPr>
             <a:noAutofit/>
           </a:bodyPr>
-          <a:lstStyle xmlns:a="http://schemas.openxmlformats.org/drawingml/2006/main"/>
-          <a:p xmlns:a="http://schemas.openxmlformats.org/drawingml/2006/main">
+          <a:lstStyle/>
+          <a:p>
             <a:pPr>
               <a:defRPr sz="1950">
                 <a:solidFill>
@@ -4790,7 +4552,7 @@
               <a:t>The same values, with a new perspective.</a:t>
             </a:r>
           </a:p>
-          <a:p xmlns:a="http://schemas.openxmlformats.org/drawingml/2006/main">
+          <a:p>
             <a:pPr>
               <a:defRPr sz="1950">
                 <a:solidFill>
@@ -4813,7 +4575,7 @@
               <a:t>A calmer world begins with the space</a:t>
             </a:r>
           </a:p>
-          <a:p xmlns:a="http://schemas.openxmlformats.org/drawingml/2006/main">
+          <a:p>
             <a:pPr>
               <a:defRPr sz="1950">
                 <a:solidFill>
@@ -4840,25 +4602,25 @@
       </p:sp>
       <p:pic>
         <p:nvPicPr>
-          <p:cNvPr id="10" name=""/>
+          <p:cNvPr id="10" name="Picture 9"/>
           <p:cNvPicPr>
-            <a:picLocks xmlns:a="http://schemas.openxmlformats.org/drawingml/2006/main" noChangeAspect="1"/>
+            <a:picLocks noChangeAspect="1"/>
           </p:cNvPicPr>
           <p:nvPr/>
         </p:nvPicPr>
         <p:blipFill>
-          <a:blip xmlns:r="http://schemas.openxmlformats.org/officeDocument/2006/relationships" xmlns:a="http://schemas.openxmlformats.org/drawingml/2006/main" r:embed="R5d35ca0723024151"/>
-          <a:srcRect xmlns:a="http://schemas.openxmlformats.org/drawingml/2006/main" l="12573" t="0" r="12573" b="0"/>
-          <a:stretch xmlns:a="http://schemas.openxmlformats.org/drawingml/2006/main">
-            <a:fillRect l="0" t="0" r="0" b="0"/>
+          <a:blip r:embed="rId3"/>
+          <a:srcRect l="12573" r="12573"/>
+          <a:stretch>
+            <a:fillRect/>
           </a:stretch>
         </p:blipFill>
         <p:spPr>
-          <a:xfrm xmlns:a="http://schemas.openxmlformats.org/drawingml/2006/main">
+          <a:xfrm>
             <a:off x="9144000" y="0"/>
             <a:ext cx="6096000" cy="8572500"/>
           </a:xfrm>
-          <a:prstGeom xmlns:a="http://schemas.openxmlformats.org/drawingml/2006/main" prst="rect">
+          <a:prstGeom prst="rect">
             <a:avLst/>
           </a:prstGeom>
         </p:spPr>
@@ -4870,17 +4632,21 @@
       </p:ext>
     </p:extLst>
   </p:cSld>
+  <p:clrMapOvr>
+    <a:masterClrMapping/>
+  </p:clrMapOvr>
 </p:sld>
 </file>
 
 <file path=ppt/slides/slide4.xml><?xml version="1.0" encoding="utf-8"?>
-<p:sld xmlns:p="http://schemas.openxmlformats.org/presentationml/2006/main">
+<p:sld xmlns:a="http://schemas.openxmlformats.org/drawingml/2006/main" xmlns:r="http://schemas.openxmlformats.org/officeDocument/2006/relationships" xmlns:p="http://schemas.openxmlformats.org/presentationml/2006/main">
   <p:cSld>
     <p:bg>
       <p:bgPr>
-        <a:solidFill xmlns:a="http://schemas.openxmlformats.org/drawingml/2006/main">
+        <a:solidFill>
           <a:srgbClr val="F6F3ED"/>
         </a:solidFill>
+        <a:effectLst/>
       </p:bgPr>
     </p:bg>
     <p:spTree>
@@ -4890,41 +4656,46 @@
         <p:nvPr/>
       </p:nvGrpSpPr>
       <p:grpSpPr>
-        <a:xfrm xmlns:a="http://schemas.openxmlformats.org/drawingml/2006/main"/>
+        <a:xfrm>
+          <a:off x="0" y="0"/>
+          <a:ext cx="0" cy="0"/>
+          <a:chOff x="0" y="0"/>
+          <a:chExt cx="0" cy="0"/>
+        </a:xfrm>
       </p:grpSpPr>
       <p:sp>
         <p:nvSpPr>
-          <p:cNvPr id="6" name="">
-            <a:extLst xmlns:a="http://schemas.openxmlformats.org/drawingml/2006/main">
+          <p:cNvPr id="6" name="Rectangle 5">
+            <a:extLst>
               <a:ext uri="{FF2B5EF4-FFF2-40B4-BE49-F238E27FC236}">
                 <a16:creationId xmlns:a16="http://schemas.microsoft.com/office/drawing/2014/main" id="{A459C0CD-DCD6-422D-9083-B1FFBE3F85F2}"/>
               </a:ext>
             </a:extLst>
           </p:cNvPr>
           <p:cNvSpPr>
-            <a:spLocks xmlns:a="http://schemas.openxmlformats.org/drawingml/2006/main" noGrp="1"/>
-          </p:cNvSpPr>
-          <p:nvPr/>
-        </p:nvSpPr>
-        <p:spPr>
-          <a:xfrm xmlns:a="http://schemas.openxmlformats.org/drawingml/2006/main">
+            <a:spLocks noGrp="1"/>
+          </p:cNvSpPr>
+          <p:nvPr/>
+        </p:nvSpPr>
+        <p:spPr>
+          <a:xfrm>
             <a:off x="714375" y="457200"/>
             <a:ext cx="12858750" cy="304800"/>
           </a:xfrm>
-          <a:prstGeom xmlns:a="http://schemas.openxmlformats.org/drawingml/2006/main" prst="rect">
-            <a:avLst/>
-          </a:prstGeom>
-          <a:noFill xmlns:a="http://schemas.openxmlformats.org/drawingml/2006/main"/>
-          <a:ln xmlns:a="http://schemas.openxmlformats.org/drawingml/2006/main" w="0">
+          <a:prstGeom prst="rect">
+            <a:avLst/>
+          </a:prstGeom>
+          <a:noFill/>
+          <a:ln w="0">
             <a:noFill/>
           </a:ln>
         </p:spPr>
         <p:txBody>
-          <a:bodyPr xmlns:a="http://schemas.openxmlformats.org/drawingml/2006/main">
+          <a:bodyPr>
             <a:noAutofit/>
           </a:bodyPr>
-          <a:lstStyle xmlns:a="http://schemas.openxmlformats.org/drawingml/2006/main"/>
-          <a:p xmlns:a="http://schemas.openxmlformats.org/drawingml/2006/main">
+          <a:lstStyle/>
+          <a:p>
             <a:pPr>
               <a:defRPr sz="1125">
                 <a:solidFill>
@@ -4951,37 +4722,37 @@
       </p:sp>
       <p:sp>
         <p:nvSpPr>
-          <p:cNvPr id="2" name="">
-            <a:extLst xmlns:a="http://schemas.openxmlformats.org/drawingml/2006/main">
+          <p:cNvPr id="2" name="Rectangle 1">
+            <a:extLst>
               <a:ext uri="{FF2B5EF4-FFF2-40B4-BE49-F238E27FC236}">
                 <a16:creationId xmlns:a16="http://schemas.microsoft.com/office/drawing/2014/main" id="{13B46B4D-ABBE-4256-802F-ECF29C5B73F0}"/>
               </a:ext>
             </a:extLst>
           </p:cNvPr>
           <p:cNvSpPr>
-            <a:spLocks xmlns:a="http://schemas.openxmlformats.org/drawingml/2006/main" noGrp="1"/>
-          </p:cNvSpPr>
-          <p:nvPr/>
-        </p:nvSpPr>
-        <p:spPr>
-          <a:xfrm xmlns:a="http://schemas.openxmlformats.org/drawingml/2006/main">
+            <a:spLocks noGrp="1"/>
+          </p:cNvSpPr>
+          <p:nvPr/>
+        </p:nvSpPr>
+        <p:spPr>
+          <a:xfrm>
             <a:off x="13906500" y="7905750"/>
             <a:ext cx="666750" cy="285750"/>
           </a:xfrm>
-          <a:prstGeom xmlns:a="http://schemas.openxmlformats.org/drawingml/2006/main" prst="rect">
-            <a:avLst/>
-          </a:prstGeom>
-          <a:noFill xmlns:a="http://schemas.openxmlformats.org/drawingml/2006/main"/>
-          <a:ln xmlns:a="http://schemas.openxmlformats.org/drawingml/2006/main" w="0">
+          <a:prstGeom prst="rect">
+            <a:avLst/>
+          </a:prstGeom>
+          <a:noFill/>
+          <a:ln w="0">
             <a:noFill/>
           </a:ln>
         </p:spPr>
         <p:txBody>
-          <a:bodyPr xmlns:a="http://schemas.openxmlformats.org/drawingml/2006/main">
+          <a:bodyPr>
             <a:noAutofit/>
           </a:bodyPr>
-          <a:lstStyle xmlns:a="http://schemas.openxmlformats.org/drawingml/2006/main"/>
-          <a:p xmlns:a="http://schemas.openxmlformats.org/drawingml/2006/main">
+          <a:lstStyle/>
+          <a:p>
             <a:pPr>
               <a:defRPr sz="1125">
                 <a:solidFill>
@@ -5008,59 +4779,59 @@
       </p:sp>
       <p:pic>
         <p:nvPicPr>
-          <p:cNvPr id="8" name=""/>
+          <p:cNvPr id="8" name="Picture 7"/>
           <p:cNvPicPr>
-            <a:picLocks xmlns:a="http://schemas.openxmlformats.org/drawingml/2006/main" noChangeAspect="1"/>
+            <a:picLocks noChangeAspect="1"/>
           </p:cNvPicPr>
           <p:nvPr/>
         </p:nvPicPr>
         <p:blipFill>
-          <a:blip xmlns:r="http://schemas.openxmlformats.org/officeDocument/2006/relationships" xmlns:a="http://schemas.openxmlformats.org/drawingml/2006/main" r:embed="R3b9c38ac3e454d1b"/>
-          <a:stretch xmlns:a="http://schemas.openxmlformats.org/drawingml/2006/main"/>
+          <a:blip r:embed="rId3"/>
+          <a:stretch/>
         </p:blipFill>
         <p:spPr>
-          <a:xfrm xmlns:a="http://schemas.openxmlformats.org/drawingml/2006/main">
+          <a:xfrm>
             <a:off x="1047750" y="2385699"/>
             <a:ext cx="6477000" cy="4591676"/>
           </a:xfrm>
-          <a:prstGeom xmlns:a="http://schemas.openxmlformats.org/drawingml/2006/main" prst="rect">
+          <a:prstGeom prst="rect">
             <a:avLst/>
           </a:prstGeom>
         </p:spPr>
       </p:pic>
       <p:sp>
         <p:nvSpPr>
-          <p:cNvPr id="4" name="">
-            <a:extLst xmlns:a="http://schemas.openxmlformats.org/drawingml/2006/main">
+          <p:cNvPr id="4" name="Rectangle 3">
+            <a:extLst>
               <a:ext uri="{FF2B5EF4-FFF2-40B4-BE49-F238E27FC236}">
                 <a16:creationId xmlns:a16="http://schemas.microsoft.com/office/drawing/2014/main" id="{8599DFC2-8A80-439E-AB57-F2DE225A24B9}"/>
               </a:ext>
             </a:extLst>
           </p:cNvPr>
           <p:cNvSpPr>
-            <a:spLocks xmlns:a="http://schemas.openxmlformats.org/drawingml/2006/main" noGrp="1"/>
-          </p:cNvSpPr>
-          <p:nvPr/>
-        </p:nvSpPr>
-        <p:spPr>
-          <a:xfrm xmlns:a="http://schemas.openxmlformats.org/drawingml/2006/main">
+            <a:spLocks noGrp="1"/>
+          </p:cNvSpPr>
+          <p:nvPr/>
+        </p:nvSpPr>
+        <p:spPr>
+          <a:xfrm>
             <a:off x="8953500" y="2095500"/>
             <a:ext cx="5429250" cy="2476500"/>
           </a:xfrm>
-          <a:prstGeom xmlns:a="http://schemas.openxmlformats.org/drawingml/2006/main" prst="rect">
-            <a:avLst/>
-          </a:prstGeom>
-          <a:noFill xmlns:a="http://schemas.openxmlformats.org/drawingml/2006/main"/>
-          <a:ln xmlns:a="http://schemas.openxmlformats.org/drawingml/2006/main" w="0">
+          <a:prstGeom prst="rect">
+            <a:avLst/>
+          </a:prstGeom>
+          <a:noFill/>
+          <a:ln w="0">
             <a:noFill/>
           </a:ln>
         </p:spPr>
         <p:txBody>
-          <a:bodyPr xmlns:a="http://schemas.openxmlformats.org/drawingml/2006/main">
+          <a:bodyPr>
             <a:noAutofit/>
           </a:bodyPr>
-          <a:lstStyle xmlns:a="http://schemas.openxmlformats.org/drawingml/2006/main"/>
-          <a:p xmlns:a="http://schemas.openxmlformats.org/drawingml/2006/main">
+          <a:lstStyle/>
+          <a:p>
             <a:pPr>
               <a:defRPr sz="4800">
                 <a:solidFill>
@@ -5083,7 +4854,7 @@
               <a:t>A familiar form.</a:t>
             </a:r>
           </a:p>
-          <a:p xmlns:a="http://schemas.openxmlformats.org/drawingml/2006/main">
+          <a:p>
             <a:pPr>
               <a:defRPr sz="4800">
                 <a:solidFill>
@@ -5110,37 +4881,37 @@
       </p:sp>
       <p:sp>
         <p:nvSpPr>
-          <p:cNvPr id="5" name="">
-            <a:extLst xmlns:a="http://schemas.openxmlformats.org/drawingml/2006/main">
+          <p:cNvPr id="5" name="Rectangle 4">
+            <a:extLst>
               <a:ext uri="{FF2B5EF4-FFF2-40B4-BE49-F238E27FC236}">
                 <a16:creationId xmlns:a16="http://schemas.microsoft.com/office/drawing/2014/main" id="{3CE80D88-E21D-43C4-B9FB-FD6CD2C2CE44}"/>
               </a:ext>
             </a:extLst>
           </p:cNvPr>
           <p:cNvSpPr>
-            <a:spLocks xmlns:a="http://schemas.openxmlformats.org/drawingml/2006/main" noGrp="1"/>
-          </p:cNvSpPr>
-          <p:nvPr/>
-        </p:nvSpPr>
-        <p:spPr>
-          <a:xfrm xmlns:a="http://schemas.openxmlformats.org/drawingml/2006/main">
+            <a:spLocks noGrp="1"/>
+          </p:cNvSpPr>
+          <p:nvPr/>
+        </p:nvSpPr>
+        <p:spPr>
+          <a:xfrm>
             <a:off x="9001125" y="5191125"/>
             <a:ext cx="5381625" cy="1619250"/>
           </a:xfrm>
-          <a:prstGeom xmlns:a="http://schemas.openxmlformats.org/drawingml/2006/main" prst="rect">
-            <a:avLst/>
-          </a:prstGeom>
-          <a:noFill xmlns:a="http://schemas.openxmlformats.org/drawingml/2006/main"/>
-          <a:ln xmlns:a="http://schemas.openxmlformats.org/drawingml/2006/main" w="0">
+          <a:prstGeom prst="rect">
+            <a:avLst/>
+          </a:prstGeom>
+          <a:noFill/>
+          <a:ln w="0">
             <a:noFill/>
           </a:ln>
         </p:spPr>
         <p:txBody>
-          <a:bodyPr xmlns:a="http://schemas.openxmlformats.org/drawingml/2006/main">
+          <a:bodyPr>
             <a:noAutofit/>
           </a:bodyPr>
-          <a:lstStyle xmlns:a="http://schemas.openxmlformats.org/drawingml/2006/main"/>
-          <a:p xmlns:a="http://schemas.openxmlformats.org/drawingml/2006/main">
+          <a:lstStyle/>
+          <a:p>
             <a:pPr>
               <a:defRPr sz="1950">
                 <a:solidFill>
@@ -5163,7 +4934,7 @@
               <a:t>Inspired by traditional Thai architecture,</a:t>
             </a:r>
           </a:p>
-          <a:p xmlns:a="http://schemas.openxmlformats.org/drawingml/2006/main">
+          <a:p>
             <a:pPr>
               <a:defRPr sz="1950">
                 <a:solidFill>
@@ -5186,7 +4957,7 @@
               <a:t>the symbol expresses balance, openness</a:t>
             </a:r>
           </a:p>
-          <a:p xmlns:a="http://schemas.openxmlformats.org/drawingml/2006/main">
+          <a:p>
             <a:pPr>
               <a:defRPr sz="1950">
                 <a:solidFill>
@@ -5218,17 +4989,21 @@
       </p:ext>
     </p:extLst>
   </p:cSld>
+  <p:clrMapOvr>
+    <a:masterClrMapping/>
+  </p:clrMapOvr>
 </p:sld>
 </file>
 
 <file path=ppt/slides/slide5.xml><?xml version="1.0" encoding="utf-8"?>
-<p:sld xmlns:p="http://schemas.openxmlformats.org/presentationml/2006/main">
+<p:sld xmlns:a="http://schemas.openxmlformats.org/drawingml/2006/main" xmlns:r="http://schemas.openxmlformats.org/officeDocument/2006/relationships" xmlns:p="http://schemas.openxmlformats.org/presentationml/2006/main">
   <p:cSld>
     <p:bg>
       <p:bgPr>
-        <a:solidFill xmlns:a="http://schemas.openxmlformats.org/drawingml/2006/main">
+        <a:solidFill>
           <a:srgbClr val="F6F3ED"/>
         </a:solidFill>
+        <a:effectLst/>
       </p:bgPr>
     </p:bg>
     <p:spTree>
@@ -5238,41 +5013,46 @@
         <p:nvPr/>
       </p:nvGrpSpPr>
       <p:grpSpPr>
-        <a:xfrm xmlns:a="http://schemas.openxmlformats.org/drawingml/2006/main"/>
+        <a:xfrm>
+          <a:off x="0" y="0"/>
+          <a:ext cx="0" cy="0"/>
+          <a:chOff x="0" y="0"/>
+          <a:chExt cx="0" cy="0"/>
+        </a:xfrm>
       </p:grpSpPr>
       <p:sp>
         <p:nvSpPr>
-          <p:cNvPr id="7" name="">
-            <a:extLst xmlns:a="http://schemas.openxmlformats.org/drawingml/2006/main">
+          <p:cNvPr id="7" name="Rectangle 6">
+            <a:extLst>
               <a:ext uri="{FF2B5EF4-FFF2-40B4-BE49-F238E27FC236}">
                 <a16:creationId xmlns:a16="http://schemas.microsoft.com/office/drawing/2014/main" id="{D79B8DBD-D535-4AF6-9F12-431059512BCD}"/>
               </a:ext>
             </a:extLst>
           </p:cNvPr>
           <p:cNvSpPr>
-            <a:spLocks xmlns:a="http://schemas.openxmlformats.org/drawingml/2006/main" noGrp="1"/>
-          </p:cNvSpPr>
-          <p:nvPr/>
-        </p:nvSpPr>
-        <p:spPr>
-          <a:xfrm xmlns:a="http://schemas.openxmlformats.org/drawingml/2006/main">
+            <a:spLocks noGrp="1"/>
+          </p:cNvSpPr>
+          <p:nvPr/>
+        </p:nvSpPr>
+        <p:spPr>
+          <a:xfrm>
             <a:off x="714375" y="457200"/>
             <a:ext cx="12858750" cy="304800"/>
           </a:xfrm>
-          <a:prstGeom xmlns:a="http://schemas.openxmlformats.org/drawingml/2006/main" prst="rect">
-            <a:avLst/>
-          </a:prstGeom>
-          <a:noFill xmlns:a="http://schemas.openxmlformats.org/drawingml/2006/main"/>
-          <a:ln xmlns:a="http://schemas.openxmlformats.org/drawingml/2006/main" w="0">
+          <a:prstGeom prst="rect">
+            <a:avLst/>
+          </a:prstGeom>
+          <a:noFill/>
+          <a:ln w="0">
             <a:noFill/>
           </a:ln>
         </p:spPr>
         <p:txBody>
-          <a:bodyPr xmlns:a="http://schemas.openxmlformats.org/drawingml/2006/main">
+          <a:bodyPr>
             <a:noAutofit/>
           </a:bodyPr>
-          <a:lstStyle xmlns:a="http://schemas.openxmlformats.org/drawingml/2006/main"/>
-          <a:p xmlns:a="http://schemas.openxmlformats.org/drawingml/2006/main">
+          <a:lstStyle/>
+          <a:p>
             <a:pPr>
               <a:defRPr sz="1125">
                 <a:solidFill>
@@ -5299,37 +5079,37 @@
       </p:sp>
       <p:sp>
         <p:nvSpPr>
-          <p:cNvPr id="2" name="">
-            <a:extLst xmlns:a="http://schemas.openxmlformats.org/drawingml/2006/main">
+          <p:cNvPr id="2" name="Rectangle 1">
+            <a:extLst>
               <a:ext uri="{FF2B5EF4-FFF2-40B4-BE49-F238E27FC236}">
                 <a16:creationId xmlns:a16="http://schemas.microsoft.com/office/drawing/2014/main" id="{3FDFB9D3-C81F-4FE6-B1BE-AC6D1C26DB19}"/>
               </a:ext>
             </a:extLst>
           </p:cNvPr>
           <p:cNvSpPr>
-            <a:spLocks xmlns:a="http://schemas.openxmlformats.org/drawingml/2006/main" noGrp="1"/>
-          </p:cNvSpPr>
-          <p:nvPr/>
-        </p:nvSpPr>
-        <p:spPr>
-          <a:xfrm xmlns:a="http://schemas.openxmlformats.org/drawingml/2006/main">
+            <a:spLocks noGrp="1"/>
+          </p:cNvSpPr>
+          <p:nvPr/>
+        </p:nvSpPr>
+        <p:spPr>
+          <a:xfrm>
             <a:off x="13906500" y="7905750"/>
             <a:ext cx="666750" cy="285750"/>
           </a:xfrm>
-          <a:prstGeom xmlns:a="http://schemas.openxmlformats.org/drawingml/2006/main" prst="rect">
-            <a:avLst/>
-          </a:prstGeom>
-          <a:noFill xmlns:a="http://schemas.openxmlformats.org/drawingml/2006/main"/>
-          <a:ln xmlns:a="http://schemas.openxmlformats.org/drawingml/2006/main" w="0">
+          <a:prstGeom prst="rect">
+            <a:avLst/>
+          </a:prstGeom>
+          <a:noFill/>
+          <a:ln w="0">
             <a:noFill/>
           </a:ln>
         </p:spPr>
         <p:txBody>
-          <a:bodyPr xmlns:a="http://schemas.openxmlformats.org/drawingml/2006/main">
+          <a:bodyPr>
             <a:noAutofit/>
           </a:bodyPr>
-          <a:lstStyle xmlns:a="http://schemas.openxmlformats.org/drawingml/2006/main"/>
-          <a:p xmlns:a="http://schemas.openxmlformats.org/drawingml/2006/main">
+          <a:lstStyle/>
+          <a:p>
             <a:pPr>
               <a:defRPr sz="1125">
                 <a:solidFill>
@@ -5356,59 +5136,59 @@
       </p:sp>
       <p:pic>
         <p:nvPicPr>
-          <p:cNvPr id="9" name=""/>
+          <p:cNvPr id="9" name="Picture 8"/>
           <p:cNvPicPr>
-            <a:picLocks xmlns:a="http://schemas.openxmlformats.org/drawingml/2006/main" noChangeAspect="1"/>
+            <a:picLocks noChangeAspect="1"/>
           </p:cNvPicPr>
           <p:nvPr/>
         </p:nvPicPr>
         <p:blipFill>
-          <a:blip xmlns:r="http://schemas.openxmlformats.org/officeDocument/2006/relationships" xmlns:a="http://schemas.openxmlformats.org/drawingml/2006/main" r:embed="R108d8b2f43a34929"/>
-          <a:stretch xmlns:a="http://schemas.openxmlformats.org/drawingml/2006/main"/>
+          <a:blip r:embed="rId3"/>
+          <a:stretch/>
         </p:blipFill>
         <p:spPr>
-          <a:xfrm xmlns:a="http://schemas.openxmlformats.org/drawingml/2006/main">
+          <a:xfrm>
             <a:off x="1428750" y="2619375"/>
             <a:ext cx="4953000" cy="2857500"/>
           </a:xfrm>
-          <a:prstGeom xmlns:a="http://schemas.openxmlformats.org/drawingml/2006/main" prst="rect">
+          <a:prstGeom prst="rect">
             <a:avLst/>
           </a:prstGeom>
         </p:spPr>
       </p:pic>
       <p:sp>
         <p:nvSpPr>
-          <p:cNvPr id="4" name="">
-            <a:extLst xmlns:a="http://schemas.openxmlformats.org/drawingml/2006/main">
+          <p:cNvPr id="4" name="Rectangle 3">
+            <a:extLst>
               <a:ext uri="{FF2B5EF4-FFF2-40B4-BE49-F238E27FC236}">
                 <a16:creationId xmlns:a16="http://schemas.microsoft.com/office/drawing/2014/main" id="{46828D51-72E2-491E-816E-63F411D11913}"/>
               </a:ext>
             </a:extLst>
           </p:cNvPr>
           <p:cNvSpPr>
-            <a:spLocks xmlns:a="http://schemas.openxmlformats.org/drawingml/2006/main" noGrp="1"/>
-          </p:cNvSpPr>
-          <p:nvPr/>
-        </p:nvSpPr>
-        <p:spPr>
-          <a:xfrm xmlns:a="http://schemas.openxmlformats.org/drawingml/2006/main">
+            <a:spLocks noGrp="1"/>
+          </p:cNvSpPr>
+          <p:nvPr/>
+        </p:nvSpPr>
+        <p:spPr>
+          <a:xfrm>
             <a:off x="8096250" y="1714500"/>
             <a:ext cx="6381750" cy="1428750"/>
           </a:xfrm>
-          <a:prstGeom xmlns:a="http://schemas.openxmlformats.org/drawingml/2006/main" prst="rect">
-            <a:avLst/>
-          </a:prstGeom>
-          <a:noFill xmlns:a="http://schemas.openxmlformats.org/drawingml/2006/main"/>
-          <a:ln xmlns:a="http://schemas.openxmlformats.org/drawingml/2006/main" w="0">
+          <a:prstGeom prst="rect">
+            <a:avLst/>
+          </a:prstGeom>
+          <a:noFill/>
+          <a:ln w="0">
             <a:noFill/>
           </a:ln>
         </p:spPr>
         <p:txBody>
-          <a:bodyPr xmlns:a="http://schemas.openxmlformats.org/drawingml/2006/main">
+          <a:bodyPr>
             <a:noAutofit/>
           </a:bodyPr>
-          <a:lstStyle xmlns:a="http://schemas.openxmlformats.org/drawingml/2006/main"/>
-          <a:p xmlns:a="http://schemas.openxmlformats.org/drawingml/2006/main">
+          <a:lstStyle/>
+          <a:p>
             <a:pPr>
               <a:defRPr sz="5250">
                 <a:solidFill>
@@ -5435,37 +5215,37 @@
       </p:sp>
       <p:sp>
         <p:nvSpPr>
-          <p:cNvPr id="5" name="">
-            <a:extLst xmlns:a="http://schemas.openxmlformats.org/drawingml/2006/main">
+          <p:cNvPr id="5" name="Rectangle 4">
+            <a:extLst>
               <a:ext uri="{FF2B5EF4-FFF2-40B4-BE49-F238E27FC236}">
                 <a16:creationId xmlns:a16="http://schemas.microsoft.com/office/drawing/2014/main" id="{6B76A208-F11F-48DA-9ED4-A9C7FD4AB725}"/>
               </a:ext>
             </a:extLst>
           </p:cNvPr>
           <p:cNvSpPr>
-            <a:spLocks xmlns:a="http://schemas.openxmlformats.org/drawingml/2006/main" noGrp="1"/>
-          </p:cNvSpPr>
-          <p:nvPr/>
-        </p:nvSpPr>
-        <p:spPr>
-          <a:xfrm xmlns:a="http://schemas.openxmlformats.org/drawingml/2006/main">
+            <a:spLocks noGrp="1"/>
+          </p:cNvSpPr>
+          <p:nvPr/>
+        </p:nvSpPr>
+        <p:spPr>
+          <a:xfrm>
             <a:off x="8143875" y="3571875"/>
             <a:ext cx="6286500" cy="2857500"/>
           </a:xfrm>
-          <a:prstGeom xmlns:a="http://schemas.openxmlformats.org/drawingml/2006/main" prst="rect">
-            <a:avLst/>
-          </a:prstGeom>
-          <a:noFill xmlns:a="http://schemas.openxmlformats.org/drawingml/2006/main"/>
-          <a:ln xmlns:a="http://schemas.openxmlformats.org/drawingml/2006/main" w="0">
+          <a:prstGeom prst="rect">
+            <a:avLst/>
+          </a:prstGeom>
+          <a:noFill/>
+          <a:ln w="0">
             <a:noFill/>
           </a:ln>
         </p:spPr>
         <p:txBody>
-          <a:bodyPr xmlns:a="http://schemas.openxmlformats.org/drawingml/2006/main">
+          <a:bodyPr>
             <a:noAutofit/>
           </a:bodyPr>
-          <a:lstStyle xmlns:a="http://schemas.openxmlformats.org/drawingml/2006/main"/>
-          <a:p xmlns:a="http://schemas.openxmlformats.org/drawingml/2006/main">
+          <a:lstStyle/>
+          <a:p>
             <a:pPr>
               <a:defRPr sz="2025">
                 <a:solidFill>
@@ -5488,7 +5268,7 @@
               <a:t>Keep the symbol and wordmark in their</a:t>
             </a:r>
           </a:p>
-          <a:p xmlns:a="http://schemas.openxmlformats.org/drawingml/2006/main">
+          <a:p>
             <a:pPr>
               <a:defRPr sz="2025">
                 <a:solidFill>
@@ -5511,7 +5291,7 @@
               <a:t>original proportions. Leave clear space</a:t>
             </a:r>
           </a:p>
-          <a:p xmlns:a="http://schemas.openxmlformats.org/drawingml/2006/main">
+          <a:p>
             <a:pPr>
               <a:defRPr sz="2025">
                 <a:solidFill>
@@ -5534,12 +5314,17 @@
               <a:t>around the complete signature.</a:t>
             </a:r>
           </a:p>
-          <a:p xmlns:a="http://schemas.openxmlformats.org/drawingml/2006/main">
-            <a:r>
-              <a:t/>
-            </a:r>
-          </a:p>
-          <a:p xmlns:a="http://schemas.openxmlformats.org/drawingml/2006/main">
+          <a:p>
+            <a:endParaRPr sz="2025">
+              <a:solidFill>
+                <a:srgbClr val="3A332B"/>
+              </a:solidFill>
+              <a:latin typeface="Plus Jakarta Sans"/>
+              <a:ea typeface="Plus Jakarta Sans"/>
+              <a:cs typeface="Plus Jakarta Sans"/>
+            </a:endParaRPr>
+          </a:p>
+          <a:p>
             <a:pPr>
               <a:defRPr sz="2025">
                 <a:solidFill>
@@ -5562,7 +5347,7 @@
               <a:t>Use earth on ivory for the primary identity.</a:t>
             </a:r>
           </a:p>
-          <a:p xmlns:a="http://schemas.openxmlformats.org/drawingml/2006/main">
+          <a:p>
             <a:pPr>
               <a:defRPr sz="2025">
                 <a:solidFill>
@@ -5585,7 +5370,7 @@
               <a:t>Use the symbol alone when the brand</a:t>
             </a:r>
           </a:p>
-          <a:p xmlns:a="http://schemas.openxmlformats.org/drawingml/2006/main">
+          <a:p>
             <a:pPr>
               <a:defRPr sz="2025">
                 <a:solidFill>
@@ -5612,37 +5397,37 @@
       </p:sp>
       <p:sp>
         <p:nvSpPr>
-          <p:cNvPr id="6" name="">
-            <a:extLst xmlns:a="http://schemas.openxmlformats.org/drawingml/2006/main">
+          <p:cNvPr id="6" name="Rectangle 5">
+            <a:extLst>
               <a:ext uri="{FF2B5EF4-FFF2-40B4-BE49-F238E27FC236}">
                 <a16:creationId xmlns:a16="http://schemas.microsoft.com/office/drawing/2014/main" id="{0486EA5B-203E-4AEC-A5A1-149A492FA1D5}"/>
               </a:ext>
             </a:extLst>
           </p:cNvPr>
           <p:cNvSpPr>
-            <a:spLocks xmlns:a="http://schemas.openxmlformats.org/drawingml/2006/main" noGrp="1"/>
-          </p:cNvSpPr>
-          <p:nvPr/>
-        </p:nvSpPr>
-        <p:spPr>
-          <a:xfrm xmlns:a="http://schemas.openxmlformats.org/drawingml/2006/main">
+            <a:spLocks noGrp="1"/>
+          </p:cNvSpPr>
+          <p:nvPr/>
+        </p:nvSpPr>
+        <p:spPr>
+          <a:xfrm>
             <a:off x="1476375" y="6810375"/>
             <a:ext cx="5810250" cy="476250"/>
           </a:xfrm>
-          <a:prstGeom xmlns:a="http://schemas.openxmlformats.org/drawingml/2006/main" prst="rect">
-            <a:avLst/>
-          </a:prstGeom>
-          <a:noFill xmlns:a="http://schemas.openxmlformats.org/drawingml/2006/main"/>
-          <a:ln xmlns:a="http://schemas.openxmlformats.org/drawingml/2006/main" w="0">
+          <a:prstGeom prst="rect">
+            <a:avLst/>
+          </a:prstGeom>
+          <a:noFill/>
+          <a:ln w="0">
             <a:noFill/>
           </a:ln>
         </p:spPr>
         <p:txBody>
-          <a:bodyPr xmlns:a="http://schemas.openxmlformats.org/drawingml/2006/main">
+          <a:bodyPr>
             <a:noAutofit/>
           </a:bodyPr>
-          <a:lstStyle xmlns:a="http://schemas.openxmlformats.org/drawingml/2006/main"/>
-          <a:p xmlns:a="http://schemas.openxmlformats.org/drawingml/2006/main">
+          <a:lstStyle/>
+          <a:p>
             <a:pPr>
               <a:defRPr sz="1350">
                 <a:solidFill>
@@ -5674,17 +5459,21 @@
       </p:ext>
     </p:extLst>
   </p:cSld>
+  <p:clrMapOvr>
+    <a:masterClrMapping/>
+  </p:clrMapOvr>
 </p:sld>
 </file>
 
 <file path=ppt/slides/slide6.xml><?xml version="1.0" encoding="utf-8"?>
-<p:sld xmlns:p="http://schemas.openxmlformats.org/presentationml/2006/main">
+<p:sld xmlns:a="http://schemas.openxmlformats.org/drawingml/2006/main" xmlns:r="http://schemas.openxmlformats.org/officeDocument/2006/relationships" xmlns:p="http://schemas.openxmlformats.org/presentationml/2006/main">
   <p:cSld>
     <p:bg>
       <p:bgPr>
-        <a:solidFill xmlns:a="http://schemas.openxmlformats.org/drawingml/2006/main">
+        <a:solidFill>
           <a:srgbClr val="3A332B"/>
         </a:solidFill>
+        <a:effectLst/>
       </p:bgPr>
     </p:bg>
     <p:spTree>
@@ -5694,41 +5483,46 @@
         <p:nvPr/>
       </p:nvGrpSpPr>
       <p:grpSpPr>
-        <a:xfrm xmlns:a="http://schemas.openxmlformats.org/drawingml/2006/main"/>
+        <a:xfrm>
+          <a:off x="0" y="0"/>
+          <a:ext cx="0" cy="0"/>
+          <a:chOff x="0" y="0"/>
+          <a:chExt cx="0" cy="0"/>
+        </a:xfrm>
       </p:grpSpPr>
       <p:sp>
         <p:nvSpPr>
-          <p:cNvPr id="6" name="">
-            <a:extLst xmlns:a="http://schemas.openxmlformats.org/drawingml/2006/main">
+          <p:cNvPr id="6" name="Rectangle 5">
+            <a:extLst>
               <a:ext uri="{FF2B5EF4-FFF2-40B4-BE49-F238E27FC236}">
                 <a16:creationId xmlns:a16="http://schemas.microsoft.com/office/drawing/2014/main" id="{10B2BA21-6056-439B-9D09-BAC5FFAEF3EA}"/>
               </a:ext>
             </a:extLst>
           </p:cNvPr>
           <p:cNvSpPr>
-            <a:spLocks xmlns:a="http://schemas.openxmlformats.org/drawingml/2006/main" noGrp="1"/>
-          </p:cNvSpPr>
-          <p:nvPr/>
-        </p:nvSpPr>
-        <p:spPr>
-          <a:xfrm xmlns:a="http://schemas.openxmlformats.org/drawingml/2006/main">
+            <a:spLocks noGrp="1"/>
+          </p:cNvSpPr>
+          <p:nvPr/>
+        </p:nvSpPr>
+        <p:spPr>
+          <a:xfrm>
             <a:off x="714375" y="457200"/>
             <a:ext cx="12858750" cy="304800"/>
           </a:xfrm>
-          <a:prstGeom xmlns:a="http://schemas.openxmlformats.org/drawingml/2006/main" prst="rect">
-            <a:avLst/>
-          </a:prstGeom>
-          <a:noFill xmlns:a="http://schemas.openxmlformats.org/drawingml/2006/main"/>
-          <a:ln xmlns:a="http://schemas.openxmlformats.org/drawingml/2006/main" w="0">
+          <a:prstGeom prst="rect">
+            <a:avLst/>
+          </a:prstGeom>
+          <a:noFill/>
+          <a:ln w="0">
             <a:noFill/>
           </a:ln>
         </p:spPr>
         <p:txBody>
-          <a:bodyPr xmlns:a="http://schemas.openxmlformats.org/drawingml/2006/main">
+          <a:bodyPr>
             <a:noAutofit/>
           </a:bodyPr>
-          <a:lstStyle xmlns:a="http://schemas.openxmlformats.org/drawingml/2006/main"/>
-          <a:p xmlns:a="http://schemas.openxmlformats.org/drawingml/2006/main">
+          <a:lstStyle/>
+          <a:p>
             <a:pPr>
               <a:defRPr sz="1125">
                 <a:solidFill>
@@ -5755,37 +5549,37 @@
       </p:sp>
       <p:sp>
         <p:nvSpPr>
-          <p:cNvPr id="2" name="">
-            <a:extLst xmlns:a="http://schemas.openxmlformats.org/drawingml/2006/main">
+          <p:cNvPr id="2" name="Rectangle 1">
+            <a:extLst>
               <a:ext uri="{FF2B5EF4-FFF2-40B4-BE49-F238E27FC236}">
                 <a16:creationId xmlns:a16="http://schemas.microsoft.com/office/drawing/2014/main" id="{30A8406D-6EF0-4F45-8275-1D01C74F07B2}"/>
               </a:ext>
             </a:extLst>
           </p:cNvPr>
           <p:cNvSpPr>
-            <a:spLocks xmlns:a="http://schemas.openxmlformats.org/drawingml/2006/main" noGrp="1"/>
-          </p:cNvSpPr>
-          <p:nvPr/>
-        </p:nvSpPr>
-        <p:spPr>
-          <a:xfrm xmlns:a="http://schemas.openxmlformats.org/drawingml/2006/main">
+            <a:spLocks noGrp="1"/>
+          </p:cNvSpPr>
+          <p:nvPr/>
+        </p:nvSpPr>
+        <p:spPr>
+          <a:xfrm>
             <a:off x="13906500" y="7905750"/>
             <a:ext cx="666750" cy="285750"/>
           </a:xfrm>
-          <a:prstGeom xmlns:a="http://schemas.openxmlformats.org/drawingml/2006/main" prst="rect">
-            <a:avLst/>
-          </a:prstGeom>
-          <a:noFill xmlns:a="http://schemas.openxmlformats.org/drawingml/2006/main"/>
-          <a:ln xmlns:a="http://schemas.openxmlformats.org/drawingml/2006/main" w="0">
+          <a:prstGeom prst="rect">
+            <a:avLst/>
+          </a:prstGeom>
+          <a:noFill/>
+          <a:ln w="0">
             <a:noFill/>
           </a:ln>
         </p:spPr>
         <p:txBody>
-          <a:bodyPr xmlns:a="http://schemas.openxmlformats.org/drawingml/2006/main">
+          <a:bodyPr>
             <a:noAutofit/>
           </a:bodyPr>
-          <a:lstStyle xmlns:a="http://schemas.openxmlformats.org/drawingml/2006/main"/>
-          <a:p xmlns:a="http://schemas.openxmlformats.org/drawingml/2006/main">
+          <a:lstStyle/>
+          <a:p>
             <a:pPr>
               <a:defRPr sz="1125">
                 <a:solidFill>
@@ -5812,62 +5606,62 @@
       </p:sp>
       <p:pic>
         <p:nvPicPr>
-          <p:cNvPr id="8" name=""/>
+          <p:cNvPr id="8" name="Picture 7"/>
           <p:cNvPicPr>
-            <a:picLocks xmlns:a="http://schemas.openxmlformats.org/drawingml/2006/main" noChangeAspect="1"/>
+            <a:picLocks noChangeAspect="1"/>
           </p:cNvPicPr>
           <p:nvPr/>
         </p:nvPicPr>
         <p:blipFill>
-          <a:blip xmlns:r="http://schemas.openxmlformats.org/officeDocument/2006/relationships" xmlns:a="http://schemas.openxmlformats.org/drawingml/2006/main" r:embed="R840963de5c5847f9"/>
-          <a:srcRect xmlns:a="http://schemas.openxmlformats.org/drawingml/2006/main" l="12828" t="0" r="12828" b="0"/>
-          <a:stretch xmlns:a="http://schemas.openxmlformats.org/drawingml/2006/main">
-            <a:fillRect l="0" t="0" r="0" b="0"/>
+          <a:blip r:embed="rId3"/>
+          <a:srcRect l="12828" r="12828"/>
+          <a:stretch>
+            <a:fillRect/>
           </a:stretch>
         </p:blipFill>
         <p:spPr>
-          <a:xfrm xmlns:a="http://schemas.openxmlformats.org/drawingml/2006/main">
+          <a:xfrm>
             <a:off x="0" y="0"/>
             <a:ext cx="8096250" cy="8572500"/>
           </a:xfrm>
-          <a:prstGeom xmlns:a="http://schemas.openxmlformats.org/drawingml/2006/main" prst="rect">
+          <a:prstGeom prst="rect">
             <a:avLst/>
           </a:prstGeom>
         </p:spPr>
       </p:pic>
       <p:sp>
         <p:nvSpPr>
-          <p:cNvPr id="4" name="">
-            <a:extLst xmlns:a="http://schemas.openxmlformats.org/drawingml/2006/main">
+          <p:cNvPr id="4" name="Rectangle 3">
+            <a:extLst>
               <a:ext uri="{FF2B5EF4-FFF2-40B4-BE49-F238E27FC236}">
                 <a16:creationId xmlns:a16="http://schemas.microsoft.com/office/drawing/2014/main" id="{A2FB41B6-7DE9-4C77-9E3A-BC8CFBD6C446}"/>
               </a:ext>
             </a:extLst>
           </p:cNvPr>
           <p:cNvSpPr>
-            <a:spLocks xmlns:a="http://schemas.openxmlformats.org/drawingml/2006/main" noGrp="1"/>
-          </p:cNvSpPr>
-          <p:nvPr/>
-        </p:nvSpPr>
-        <p:spPr>
-          <a:xfrm xmlns:a="http://schemas.openxmlformats.org/drawingml/2006/main">
+            <a:spLocks noGrp="1"/>
+          </p:cNvSpPr>
+          <p:nvPr/>
+        </p:nvSpPr>
+        <p:spPr>
+          <a:xfrm>
             <a:off x="8953500" y="1714500"/>
             <a:ext cx="5619750" cy="2762250"/>
           </a:xfrm>
-          <a:prstGeom xmlns:a="http://schemas.openxmlformats.org/drawingml/2006/main" prst="rect">
-            <a:avLst/>
-          </a:prstGeom>
-          <a:noFill xmlns:a="http://schemas.openxmlformats.org/drawingml/2006/main"/>
-          <a:ln xmlns:a="http://schemas.openxmlformats.org/drawingml/2006/main" w="0">
+          <a:prstGeom prst="rect">
+            <a:avLst/>
+          </a:prstGeom>
+          <a:noFill/>
+          <a:ln w="0">
             <a:noFill/>
           </a:ln>
         </p:spPr>
         <p:txBody>
-          <a:bodyPr xmlns:a="http://schemas.openxmlformats.org/drawingml/2006/main">
+          <a:bodyPr>
             <a:noAutofit/>
           </a:bodyPr>
-          <a:lstStyle xmlns:a="http://schemas.openxmlformats.org/drawingml/2006/main"/>
-          <a:p xmlns:a="http://schemas.openxmlformats.org/drawingml/2006/main">
+          <a:lstStyle/>
+          <a:p>
             <a:pPr>
               <a:defRPr sz="5475">
                 <a:solidFill>
@@ -5890,7 +5684,7 @@
               <a:t>One gesture.</a:t>
             </a:r>
           </a:p>
-          <a:p xmlns:a="http://schemas.openxmlformats.org/drawingml/2006/main">
+          <a:p>
             <a:pPr>
               <a:defRPr sz="5475">
                 <a:solidFill>
@@ -5917,37 +5711,37 @@
       </p:sp>
       <p:sp>
         <p:nvSpPr>
-          <p:cNvPr id="5" name="">
-            <a:extLst xmlns:a="http://schemas.openxmlformats.org/drawingml/2006/main">
+          <p:cNvPr id="5" name="Rectangle 4">
+            <a:extLst>
               <a:ext uri="{FF2B5EF4-FFF2-40B4-BE49-F238E27FC236}">
                 <a16:creationId xmlns:a16="http://schemas.microsoft.com/office/drawing/2014/main" id="{0491116D-6061-4182-8A8E-2EE3AEF129B4}"/>
               </a:ext>
             </a:extLst>
           </p:cNvPr>
           <p:cNvSpPr>
-            <a:spLocks xmlns:a="http://schemas.openxmlformats.org/drawingml/2006/main" noGrp="1"/>
-          </p:cNvSpPr>
-          <p:nvPr/>
-        </p:nvSpPr>
-        <p:spPr>
-          <a:xfrm xmlns:a="http://schemas.openxmlformats.org/drawingml/2006/main">
+            <a:spLocks noGrp="1"/>
+          </p:cNvSpPr>
+          <p:nvPr/>
+        </p:nvSpPr>
+        <p:spPr>
+          <a:xfrm>
             <a:off x="9001125" y="5476875"/>
             <a:ext cx="5334000" cy="1524000"/>
           </a:xfrm>
-          <a:prstGeom xmlns:a="http://schemas.openxmlformats.org/drawingml/2006/main" prst="rect">
-            <a:avLst/>
-          </a:prstGeom>
-          <a:noFill xmlns:a="http://schemas.openxmlformats.org/drawingml/2006/main"/>
-          <a:ln xmlns:a="http://schemas.openxmlformats.org/drawingml/2006/main" w="0">
+          <a:prstGeom prst="rect">
+            <a:avLst/>
+          </a:prstGeom>
+          <a:noFill/>
+          <a:ln w="0">
             <a:noFill/>
           </a:ln>
         </p:spPr>
         <p:txBody>
-          <a:bodyPr xmlns:a="http://schemas.openxmlformats.org/drawingml/2006/main">
+          <a:bodyPr>
             <a:noAutofit/>
           </a:bodyPr>
-          <a:lstStyle xmlns:a="http://schemas.openxmlformats.org/drawingml/2006/main"/>
-          <a:p xmlns:a="http://schemas.openxmlformats.org/drawingml/2006/main">
+          <a:lstStyle/>
+          <a:p>
             <a:pPr>
               <a:defRPr sz="2025">
                 <a:solidFill>
@@ -5970,7 +5764,7 @@
               <a:t>Let the curves extend beyond the edge.</a:t>
             </a:r>
           </a:p>
-          <a:p xmlns:a="http://schemas.openxmlformats.org/drawingml/2006/main">
+          <a:p>
             <a:pPr>
               <a:defRPr sz="2025">
                 <a:solidFill>
@@ -5993,7 +5787,7 @@
               <a:t>Use a generous crop and a quiet contrast.</a:t>
             </a:r>
           </a:p>
-          <a:p xmlns:a="http://schemas.openxmlformats.org/drawingml/2006/main">
+          <a:p>
             <a:pPr>
               <a:defRPr sz="2025">
                 <a:solidFill>
@@ -6025,17 +5819,21 @@
       </p:ext>
     </p:extLst>
   </p:cSld>
+  <p:clrMapOvr>
+    <a:masterClrMapping/>
+  </p:clrMapOvr>
 </p:sld>
 </file>
 
 <file path=ppt/slides/slide7.xml><?xml version="1.0" encoding="utf-8"?>
-<p:sld xmlns:p="http://schemas.openxmlformats.org/presentationml/2006/main">
+<p:sld xmlns:a="http://schemas.openxmlformats.org/drawingml/2006/main" xmlns:r="http://schemas.openxmlformats.org/officeDocument/2006/relationships" xmlns:p="http://schemas.openxmlformats.org/presentationml/2006/main">
   <p:cSld>
     <p:bg>
       <p:bgPr>
-        <a:solidFill xmlns:a="http://schemas.openxmlformats.org/drawingml/2006/main">
+        <a:solidFill>
           <a:srgbClr val="F6F3ED"/>
         </a:solidFill>
+        <a:effectLst/>
       </p:bgPr>
     </p:bg>
     <p:spTree>
@@ -6045,41 +5843,46 @@
         <p:nvPr/>
       </p:nvGrpSpPr>
       <p:grpSpPr>
-        <a:xfrm xmlns:a="http://schemas.openxmlformats.org/drawingml/2006/main"/>
+        <a:xfrm>
+          <a:off x="0" y="0"/>
+          <a:ext cx="0" cy="0"/>
+          <a:chOff x="0" y="0"/>
+          <a:chExt cx="0" cy="0"/>
+        </a:xfrm>
       </p:grpSpPr>
       <p:sp>
         <p:nvSpPr>
-          <p:cNvPr id="6" name="">
-            <a:extLst xmlns:a="http://schemas.openxmlformats.org/drawingml/2006/main">
+          <p:cNvPr id="6" name="Rectangle 5">
+            <a:extLst>
               <a:ext uri="{FF2B5EF4-FFF2-40B4-BE49-F238E27FC236}">
                 <a16:creationId xmlns:a16="http://schemas.microsoft.com/office/drawing/2014/main" id="{2A688278-64BF-4FEF-95F7-604C30F5C721}"/>
               </a:ext>
             </a:extLst>
           </p:cNvPr>
           <p:cNvSpPr>
-            <a:spLocks xmlns:a="http://schemas.openxmlformats.org/drawingml/2006/main" noGrp="1"/>
-          </p:cNvSpPr>
-          <p:nvPr/>
-        </p:nvSpPr>
-        <p:spPr>
-          <a:xfrm xmlns:a="http://schemas.openxmlformats.org/drawingml/2006/main">
+            <a:spLocks noGrp="1"/>
+          </p:cNvSpPr>
+          <p:nvPr/>
+        </p:nvSpPr>
+        <p:spPr>
+          <a:xfrm>
             <a:off x="714375" y="457200"/>
             <a:ext cx="12858750" cy="304800"/>
           </a:xfrm>
-          <a:prstGeom xmlns:a="http://schemas.openxmlformats.org/drawingml/2006/main" prst="rect">
-            <a:avLst/>
-          </a:prstGeom>
-          <a:noFill xmlns:a="http://schemas.openxmlformats.org/drawingml/2006/main"/>
-          <a:ln xmlns:a="http://schemas.openxmlformats.org/drawingml/2006/main" w="0">
+          <a:prstGeom prst="rect">
+            <a:avLst/>
+          </a:prstGeom>
+          <a:noFill/>
+          <a:ln w="0">
             <a:noFill/>
           </a:ln>
         </p:spPr>
         <p:txBody>
-          <a:bodyPr xmlns:a="http://schemas.openxmlformats.org/drawingml/2006/main">
+          <a:bodyPr>
             <a:noAutofit/>
           </a:bodyPr>
-          <a:lstStyle xmlns:a="http://schemas.openxmlformats.org/drawingml/2006/main"/>
-          <a:p xmlns:a="http://schemas.openxmlformats.org/drawingml/2006/main">
+          <a:lstStyle/>
+          <a:p>
             <a:pPr>
               <a:defRPr sz="1125">
                 <a:solidFill>
@@ -6106,37 +5909,37 @@
       </p:sp>
       <p:sp>
         <p:nvSpPr>
-          <p:cNvPr id="2" name="">
-            <a:extLst xmlns:a="http://schemas.openxmlformats.org/drawingml/2006/main">
+          <p:cNvPr id="2" name="Rectangle 1">
+            <a:extLst>
               <a:ext uri="{FF2B5EF4-FFF2-40B4-BE49-F238E27FC236}">
                 <a16:creationId xmlns:a16="http://schemas.microsoft.com/office/drawing/2014/main" id="{D2418A61-9AFC-41B4-A1D6-B60024D783FB}"/>
               </a:ext>
             </a:extLst>
           </p:cNvPr>
           <p:cNvSpPr>
-            <a:spLocks xmlns:a="http://schemas.openxmlformats.org/drawingml/2006/main" noGrp="1"/>
-          </p:cNvSpPr>
-          <p:nvPr/>
-        </p:nvSpPr>
-        <p:spPr>
-          <a:xfrm xmlns:a="http://schemas.openxmlformats.org/drawingml/2006/main">
+            <a:spLocks noGrp="1"/>
+          </p:cNvSpPr>
+          <p:nvPr/>
+        </p:nvSpPr>
+        <p:spPr>
+          <a:xfrm>
             <a:off x="13906500" y="7905750"/>
             <a:ext cx="666750" cy="285750"/>
           </a:xfrm>
-          <a:prstGeom xmlns:a="http://schemas.openxmlformats.org/drawingml/2006/main" prst="rect">
-            <a:avLst/>
-          </a:prstGeom>
-          <a:noFill xmlns:a="http://schemas.openxmlformats.org/drawingml/2006/main"/>
-          <a:ln xmlns:a="http://schemas.openxmlformats.org/drawingml/2006/main" w="0">
+          <a:prstGeom prst="rect">
+            <a:avLst/>
+          </a:prstGeom>
+          <a:noFill/>
+          <a:ln w="0">
             <a:noFill/>
           </a:ln>
         </p:spPr>
         <p:txBody>
-          <a:bodyPr xmlns:a="http://schemas.openxmlformats.org/drawingml/2006/main">
+          <a:bodyPr>
             <a:noAutofit/>
           </a:bodyPr>
-          <a:lstStyle xmlns:a="http://schemas.openxmlformats.org/drawingml/2006/main"/>
-          <a:p xmlns:a="http://schemas.openxmlformats.org/drawingml/2006/main">
+          <a:lstStyle/>
+          <a:p>
             <a:pPr>
               <a:defRPr sz="1125">
                 <a:solidFill>
@@ -6163,62 +5966,62 @@
       </p:sp>
       <p:pic>
         <p:nvPicPr>
-          <p:cNvPr id="8" name=""/>
+          <p:cNvPr id="8" name="Picture 7"/>
           <p:cNvPicPr>
-            <a:picLocks xmlns:a="http://schemas.openxmlformats.org/drawingml/2006/main" noChangeAspect="1"/>
+            <a:picLocks noChangeAspect="1"/>
           </p:cNvPicPr>
           <p:nvPr/>
         </p:nvPicPr>
         <p:blipFill>
-          <a:blip xmlns:r="http://schemas.openxmlformats.org/officeDocument/2006/relationships" xmlns:a="http://schemas.openxmlformats.org/drawingml/2006/main" r:embed="R047c8f45660749b8"/>
-          <a:srcRect xmlns:a="http://schemas.openxmlformats.org/drawingml/2006/main" l="4329" t="0" r="4329" b="0"/>
-          <a:stretch xmlns:a="http://schemas.openxmlformats.org/drawingml/2006/main">
-            <a:fillRect l="0" t="0" r="0" b="0"/>
+          <a:blip r:embed="rId3"/>
+          <a:srcRect l="4329" r="4329"/>
+          <a:stretch>
+            <a:fillRect/>
           </a:stretch>
         </p:blipFill>
         <p:spPr>
-          <a:xfrm xmlns:a="http://schemas.openxmlformats.org/drawingml/2006/main">
+          <a:xfrm>
             <a:off x="0" y="1047750"/>
             <a:ext cx="7810500" cy="7524750"/>
           </a:xfrm>
-          <a:prstGeom xmlns:a="http://schemas.openxmlformats.org/drawingml/2006/main" prst="rect">
+          <a:prstGeom prst="rect">
             <a:avLst/>
           </a:prstGeom>
         </p:spPr>
       </p:pic>
       <p:sp>
         <p:nvSpPr>
-          <p:cNvPr id="4" name="">
-            <a:extLst xmlns:a="http://schemas.openxmlformats.org/drawingml/2006/main">
+          <p:cNvPr id="4" name="Rectangle 3">
+            <a:extLst>
               <a:ext uri="{FF2B5EF4-FFF2-40B4-BE49-F238E27FC236}">
                 <a16:creationId xmlns:a16="http://schemas.microsoft.com/office/drawing/2014/main" id="{EF9CD13B-706D-4A49-8F83-C0B7E9115D8D}"/>
               </a:ext>
             </a:extLst>
           </p:cNvPr>
           <p:cNvSpPr>
-            <a:spLocks xmlns:a="http://schemas.openxmlformats.org/drawingml/2006/main" noGrp="1"/>
-          </p:cNvSpPr>
-          <p:nvPr/>
-        </p:nvSpPr>
-        <p:spPr>
-          <a:xfrm xmlns:a="http://schemas.openxmlformats.org/drawingml/2006/main">
+            <a:spLocks noGrp="1"/>
+          </p:cNvSpPr>
+          <p:nvPr/>
+        </p:nvSpPr>
+        <p:spPr>
+          <a:xfrm>
             <a:off x="8858250" y="1905000"/>
             <a:ext cx="5619750" cy="2381250"/>
           </a:xfrm>
-          <a:prstGeom xmlns:a="http://schemas.openxmlformats.org/drawingml/2006/main" prst="rect">
-            <a:avLst/>
-          </a:prstGeom>
-          <a:noFill xmlns:a="http://schemas.openxmlformats.org/drawingml/2006/main"/>
-          <a:ln xmlns:a="http://schemas.openxmlformats.org/drawingml/2006/main" w="0">
+          <a:prstGeom prst="rect">
+            <a:avLst/>
+          </a:prstGeom>
+          <a:noFill/>
+          <a:ln w="0">
             <a:noFill/>
           </a:ln>
         </p:spPr>
         <p:txBody>
-          <a:bodyPr xmlns:a="http://schemas.openxmlformats.org/drawingml/2006/main">
+          <a:bodyPr>
             <a:noAutofit/>
           </a:bodyPr>
-          <a:lstStyle xmlns:a="http://schemas.openxmlformats.org/drawingml/2006/main"/>
-          <a:p xmlns:a="http://schemas.openxmlformats.org/drawingml/2006/main">
+          <a:lstStyle/>
+          <a:p>
             <a:pPr>
               <a:defRPr sz="6375">
                 <a:solidFill>
@@ -6241,7 +6044,7 @@
               <a:t>A familiar</a:t>
             </a:r>
           </a:p>
-          <a:p xmlns:a="http://schemas.openxmlformats.org/drawingml/2006/main">
+          <a:p>
             <a:pPr>
               <a:defRPr sz="6375">
                 <a:solidFill>
@@ -6268,37 +6071,37 @@
       </p:sp>
       <p:sp>
         <p:nvSpPr>
-          <p:cNvPr id="5" name="">
-            <a:extLst xmlns:a="http://schemas.openxmlformats.org/drawingml/2006/main">
+          <p:cNvPr id="5" name="Rectangle 4">
+            <a:extLst>
               <a:ext uri="{FF2B5EF4-FFF2-40B4-BE49-F238E27FC236}">
                 <a16:creationId xmlns:a16="http://schemas.microsoft.com/office/drawing/2014/main" id="{672ACD8B-C8AA-45A5-A92B-553BE6BF8644}"/>
               </a:ext>
             </a:extLst>
           </p:cNvPr>
           <p:cNvSpPr>
-            <a:spLocks xmlns:a="http://schemas.openxmlformats.org/drawingml/2006/main" noGrp="1"/>
-          </p:cNvSpPr>
-          <p:nvPr/>
-        </p:nvSpPr>
-        <p:spPr>
-          <a:xfrm xmlns:a="http://schemas.openxmlformats.org/drawingml/2006/main">
+            <a:spLocks noGrp="1"/>
+          </p:cNvSpPr>
+          <p:nvPr/>
+        </p:nvSpPr>
+        <p:spPr>
+          <a:xfrm>
             <a:off x="8905875" y="5048250"/>
             <a:ext cx="5381625" cy="2286000"/>
           </a:xfrm>
-          <a:prstGeom xmlns:a="http://schemas.openxmlformats.org/drawingml/2006/main" prst="rect">
-            <a:avLst/>
-          </a:prstGeom>
-          <a:noFill xmlns:a="http://schemas.openxmlformats.org/drawingml/2006/main"/>
-          <a:ln xmlns:a="http://schemas.openxmlformats.org/drawingml/2006/main" w="0">
+          <a:prstGeom prst="rect">
+            <a:avLst/>
+          </a:prstGeom>
+          <a:noFill/>
+          <a:ln w="0">
             <a:noFill/>
           </a:ln>
         </p:spPr>
         <p:txBody>
-          <a:bodyPr xmlns:a="http://schemas.openxmlformats.org/drawingml/2006/main">
+          <a:bodyPr>
             <a:noAutofit/>
           </a:bodyPr>
-          <a:lstStyle xmlns:a="http://schemas.openxmlformats.org/drawingml/2006/main"/>
-          <a:p xmlns:a="http://schemas.openxmlformats.org/drawingml/2006/main">
+          <a:lstStyle/>
+          <a:p>
             <a:pPr>
               <a:defRPr sz="2025">
                 <a:solidFill>
@@ -6321,7 +6124,7 @@
               <a:t>A repeated gesture connects print,</a:t>
             </a:r>
           </a:p>
-          <a:p xmlns:a="http://schemas.openxmlformats.org/drawingml/2006/main">
+          <a:p>
             <a:pPr>
               <a:defRPr sz="2025">
                 <a:solidFill>
@@ -6344,12 +6147,17 @@
               <a:t>packaging and the spaces we inhabit.</a:t>
             </a:r>
           </a:p>
-          <a:p xmlns:a="http://schemas.openxmlformats.org/drawingml/2006/main">
-            <a:r>
-              <a:t/>
-            </a:r>
-          </a:p>
-          <a:p xmlns:a="http://schemas.openxmlformats.org/drawingml/2006/main">
+          <a:p>
+            <a:endParaRPr sz="2025">
+              <a:solidFill>
+                <a:srgbClr val="3A332B"/>
+              </a:solidFill>
+              <a:latin typeface="Plus Jakarta Sans"/>
+              <a:ea typeface="Plus Jakarta Sans"/>
+              <a:cs typeface="Plus Jakarta Sans"/>
+            </a:endParaRPr>
+          </a:p>
+          <a:p>
             <a:pPr>
               <a:defRPr sz="2025">
                 <a:solidFill>
@@ -6372,7 +6180,7 @@
               <a:t>Keep the pattern tonal. Leave areas</a:t>
             </a:r>
           </a:p>
-          <a:p xmlns:a="http://schemas.openxmlformats.org/drawingml/2006/main">
+          <a:p>
             <a:pPr>
               <a:defRPr sz="2025">
                 <a:solidFill>
@@ -6404,17 +6212,21 @@
       </p:ext>
     </p:extLst>
   </p:cSld>
+  <p:clrMapOvr>
+    <a:masterClrMapping/>
+  </p:clrMapOvr>
 </p:sld>
 </file>
 
 <file path=ppt/slides/slide8.xml><?xml version="1.0" encoding="utf-8"?>
-<p:sld xmlns:p="http://schemas.openxmlformats.org/presentationml/2006/main">
+<p:sld xmlns:a="http://schemas.openxmlformats.org/drawingml/2006/main" xmlns:r="http://schemas.openxmlformats.org/officeDocument/2006/relationships" xmlns:p="http://schemas.openxmlformats.org/presentationml/2006/main">
   <p:cSld>
     <p:bg>
       <p:bgPr>
-        <a:solidFill xmlns:a="http://schemas.openxmlformats.org/drawingml/2006/main">
+        <a:solidFill>
           <a:srgbClr val="F6F3ED"/>
         </a:solidFill>
+        <a:effectLst/>
       </p:bgPr>
     </p:bg>
     <p:spTree>
@@ -6424,41 +6236,46 @@
         <p:nvPr/>
       </p:nvGrpSpPr>
       <p:grpSpPr>
-        <a:xfrm xmlns:a="http://schemas.openxmlformats.org/drawingml/2006/main"/>
+        <a:xfrm>
+          <a:off x="0" y="0"/>
+          <a:ext cx="0" cy="0"/>
+          <a:chOff x="0" y="0"/>
+          <a:chExt cx="0" cy="0"/>
+        </a:xfrm>
       </p:grpSpPr>
       <p:sp>
         <p:nvSpPr>
-          <p:cNvPr id="24" name="">
-            <a:extLst xmlns:a="http://schemas.openxmlformats.org/drawingml/2006/main">
+          <p:cNvPr id="24" name="Rectangle 23">
+            <a:extLst>
               <a:ext uri="{FF2B5EF4-FFF2-40B4-BE49-F238E27FC236}">
                 <a16:creationId xmlns:a16="http://schemas.microsoft.com/office/drawing/2014/main" id="{A7841D8D-9717-48AC-8FC7-A42D53A0F7FB}"/>
               </a:ext>
             </a:extLst>
           </p:cNvPr>
           <p:cNvSpPr>
-            <a:spLocks xmlns:a="http://schemas.openxmlformats.org/drawingml/2006/main" noGrp="1"/>
-          </p:cNvSpPr>
-          <p:nvPr/>
-        </p:nvSpPr>
-        <p:spPr>
-          <a:xfrm xmlns:a="http://schemas.openxmlformats.org/drawingml/2006/main">
+            <a:spLocks noGrp="1"/>
+          </p:cNvSpPr>
+          <p:nvPr/>
+        </p:nvSpPr>
+        <p:spPr>
+          <a:xfrm>
             <a:off x="714375" y="457200"/>
             <a:ext cx="12858750" cy="304800"/>
           </a:xfrm>
-          <a:prstGeom xmlns:a="http://schemas.openxmlformats.org/drawingml/2006/main" prst="rect">
-            <a:avLst/>
-          </a:prstGeom>
-          <a:noFill xmlns:a="http://schemas.openxmlformats.org/drawingml/2006/main"/>
-          <a:ln xmlns:a="http://schemas.openxmlformats.org/drawingml/2006/main" w="0">
+          <a:prstGeom prst="rect">
+            <a:avLst/>
+          </a:prstGeom>
+          <a:noFill/>
+          <a:ln w="0">
             <a:noFill/>
           </a:ln>
         </p:spPr>
         <p:txBody>
-          <a:bodyPr xmlns:a="http://schemas.openxmlformats.org/drawingml/2006/main">
+          <a:bodyPr>
             <a:noAutofit/>
           </a:bodyPr>
-          <a:lstStyle xmlns:a="http://schemas.openxmlformats.org/drawingml/2006/main"/>
-          <a:p xmlns:a="http://schemas.openxmlformats.org/drawingml/2006/main">
+          <a:lstStyle/>
+          <a:p>
             <a:pPr>
               <a:defRPr sz="1125">
                 <a:solidFill>
@@ -6485,37 +6302,37 @@
       </p:sp>
       <p:sp>
         <p:nvSpPr>
-          <p:cNvPr id="2" name="">
-            <a:extLst xmlns:a="http://schemas.openxmlformats.org/drawingml/2006/main">
+          <p:cNvPr id="2" name="Rectangle 1">
+            <a:extLst>
               <a:ext uri="{FF2B5EF4-FFF2-40B4-BE49-F238E27FC236}">
                 <a16:creationId xmlns:a16="http://schemas.microsoft.com/office/drawing/2014/main" id="{AC8EB000-A6AB-4B03-8840-F6B8514FF364}"/>
               </a:ext>
             </a:extLst>
           </p:cNvPr>
           <p:cNvSpPr>
-            <a:spLocks xmlns:a="http://schemas.openxmlformats.org/drawingml/2006/main" noGrp="1"/>
-          </p:cNvSpPr>
-          <p:nvPr/>
-        </p:nvSpPr>
-        <p:spPr>
-          <a:xfrm xmlns:a="http://schemas.openxmlformats.org/drawingml/2006/main">
+            <a:spLocks noGrp="1"/>
+          </p:cNvSpPr>
+          <p:nvPr/>
+        </p:nvSpPr>
+        <p:spPr>
+          <a:xfrm>
             <a:off x="13906500" y="7905750"/>
             <a:ext cx="666750" cy="285750"/>
           </a:xfrm>
-          <a:prstGeom xmlns:a="http://schemas.openxmlformats.org/drawingml/2006/main" prst="rect">
-            <a:avLst/>
-          </a:prstGeom>
-          <a:noFill xmlns:a="http://schemas.openxmlformats.org/drawingml/2006/main"/>
-          <a:ln xmlns:a="http://schemas.openxmlformats.org/drawingml/2006/main" w="0">
+          <a:prstGeom prst="rect">
+            <a:avLst/>
+          </a:prstGeom>
+          <a:noFill/>
+          <a:ln w="0">
             <a:noFill/>
           </a:ln>
         </p:spPr>
         <p:txBody>
-          <a:bodyPr xmlns:a="http://schemas.openxmlformats.org/drawingml/2006/main">
+          <a:bodyPr>
             <a:noAutofit/>
           </a:bodyPr>
-          <a:lstStyle xmlns:a="http://schemas.openxmlformats.org/drawingml/2006/main"/>
-          <a:p xmlns:a="http://schemas.openxmlformats.org/drawingml/2006/main">
+          <a:lstStyle/>
+          <a:p>
             <a:pPr>
               <a:defRPr sz="1125">
                 <a:solidFill>
@@ -6542,37 +6359,37 @@
       </p:sp>
       <p:sp>
         <p:nvSpPr>
-          <p:cNvPr id="3" name="">
-            <a:extLst xmlns:a="http://schemas.openxmlformats.org/drawingml/2006/main">
+          <p:cNvPr id="3" name="Rectangle 2">
+            <a:extLst>
               <a:ext uri="{FF2B5EF4-FFF2-40B4-BE49-F238E27FC236}">
                 <a16:creationId xmlns:a16="http://schemas.microsoft.com/office/drawing/2014/main" id="{2B4E7558-2C7B-465D-B142-E856B5ED54BB}"/>
               </a:ext>
             </a:extLst>
           </p:cNvPr>
           <p:cNvSpPr>
-            <a:spLocks xmlns:a="http://schemas.openxmlformats.org/drawingml/2006/main" noGrp="1"/>
-          </p:cNvSpPr>
-          <p:nvPr/>
-        </p:nvSpPr>
-        <p:spPr>
-          <a:xfrm xmlns:a="http://schemas.openxmlformats.org/drawingml/2006/main">
+            <a:spLocks noGrp="1"/>
+          </p:cNvSpPr>
+          <p:nvPr/>
+        </p:nvSpPr>
+        <p:spPr>
+          <a:xfrm>
             <a:off x="714375" y="1285875"/>
             <a:ext cx="13335000" cy="1238250"/>
           </a:xfrm>
-          <a:prstGeom xmlns:a="http://schemas.openxmlformats.org/drawingml/2006/main" prst="rect">
-            <a:avLst/>
-          </a:prstGeom>
-          <a:noFill xmlns:a="http://schemas.openxmlformats.org/drawingml/2006/main"/>
-          <a:ln xmlns:a="http://schemas.openxmlformats.org/drawingml/2006/main" w="0">
+          <a:prstGeom prst="rect">
+            <a:avLst/>
+          </a:prstGeom>
+          <a:noFill/>
+          <a:ln w="0">
             <a:noFill/>
           </a:ln>
         </p:spPr>
         <p:txBody>
-          <a:bodyPr xmlns:a="http://schemas.openxmlformats.org/drawingml/2006/main">
+          <a:bodyPr>
             <a:noAutofit/>
           </a:bodyPr>
-          <a:lstStyle xmlns:a="http://schemas.openxmlformats.org/drawingml/2006/main"/>
-          <a:p xmlns:a="http://schemas.openxmlformats.org/drawingml/2006/main">
+          <a:lstStyle/>
+          <a:p>
             <a:pPr>
               <a:defRPr sz="6225">
                 <a:solidFill>
@@ -6599,69 +6416,76 @@
       </p:sp>
       <p:sp>
         <p:nvSpPr>
-          <p:cNvPr id="4" name="">
-            <a:extLst xmlns:a="http://schemas.openxmlformats.org/drawingml/2006/main">
+          <p:cNvPr id="4" name="Rectangle 3">
+            <a:extLst>
               <a:ext uri="{FF2B5EF4-FFF2-40B4-BE49-F238E27FC236}">
                 <a16:creationId xmlns:a16="http://schemas.microsoft.com/office/drawing/2014/main" id="{8C771E4B-1306-49EB-A6EE-A57973121948}"/>
               </a:ext>
             </a:extLst>
           </p:cNvPr>
           <p:cNvSpPr>
-            <a:spLocks xmlns:a="http://schemas.openxmlformats.org/drawingml/2006/main" noGrp="1"/>
-          </p:cNvSpPr>
-          <p:nvPr/>
-        </p:nvSpPr>
-        <p:spPr>
-          <a:xfrm xmlns:a="http://schemas.openxmlformats.org/drawingml/2006/main">
+            <a:spLocks noGrp="1"/>
+          </p:cNvSpPr>
+          <p:nvPr/>
+        </p:nvSpPr>
+        <p:spPr>
+          <a:xfrm>
             <a:off x="714375" y="3286125"/>
             <a:ext cx="2476500" cy="2428875"/>
           </a:xfrm>
-          <a:prstGeom xmlns:a="http://schemas.openxmlformats.org/drawingml/2006/main" prst="rect">
-            <a:avLst/>
-          </a:prstGeom>
-          <a:solidFill xmlns:a="http://schemas.openxmlformats.org/drawingml/2006/main">
+          <a:prstGeom prst="rect">
+            <a:avLst/>
+          </a:prstGeom>
+          <a:solidFill>
             <a:srgbClr val="3A332B"/>
           </a:solidFill>
-          <a:ln xmlns:a="http://schemas.openxmlformats.org/drawingml/2006/main" w="9525">
+          <a:ln w="9525">
             <a:solidFill>
               <a:srgbClr val="D9CEC2"/>
             </a:solidFill>
           </a:ln>
         </p:spPr>
-      </p:sp>
-      <p:sp>
-        <p:nvSpPr>
-          <p:cNvPr id="5" name="">
-            <a:extLst xmlns:a="http://schemas.openxmlformats.org/drawingml/2006/main">
+        <p:txBody>
+          <a:bodyPr/>
+          <a:lstStyle/>
+          <a:p>
+            <a:endParaRPr lang="de-DE"/>
+          </a:p>
+        </p:txBody>
+      </p:sp>
+      <p:sp>
+        <p:nvSpPr>
+          <p:cNvPr id="5" name="Rectangle 4">
+            <a:extLst>
               <a:ext uri="{FF2B5EF4-FFF2-40B4-BE49-F238E27FC236}">
                 <a16:creationId xmlns:a16="http://schemas.microsoft.com/office/drawing/2014/main" id="{A40EA3CC-E8F8-4DF8-BECC-78B2188A9D6F}"/>
               </a:ext>
             </a:extLst>
           </p:cNvPr>
           <p:cNvSpPr>
-            <a:spLocks xmlns:a="http://schemas.openxmlformats.org/drawingml/2006/main" noGrp="1"/>
-          </p:cNvSpPr>
-          <p:nvPr/>
-        </p:nvSpPr>
-        <p:spPr>
-          <a:xfrm xmlns:a="http://schemas.openxmlformats.org/drawingml/2006/main">
+            <a:spLocks noGrp="1"/>
+          </p:cNvSpPr>
+          <p:nvPr/>
+        </p:nvSpPr>
+        <p:spPr>
+          <a:xfrm>
             <a:off x="714375" y="6048375"/>
             <a:ext cx="2571750" cy="333375"/>
           </a:xfrm>
-          <a:prstGeom xmlns:a="http://schemas.openxmlformats.org/drawingml/2006/main" prst="rect">
-            <a:avLst/>
-          </a:prstGeom>
-          <a:noFill xmlns:a="http://schemas.openxmlformats.org/drawingml/2006/main"/>
-          <a:ln xmlns:a="http://schemas.openxmlformats.org/drawingml/2006/main" w="0">
+          <a:prstGeom prst="rect">
+            <a:avLst/>
+          </a:prstGeom>
+          <a:noFill/>
+          <a:ln w="0">
             <a:noFill/>
           </a:ln>
         </p:spPr>
         <p:txBody>
-          <a:bodyPr xmlns:a="http://schemas.openxmlformats.org/drawingml/2006/main">
+          <a:bodyPr>
             <a:noAutofit/>
           </a:bodyPr>
-          <a:lstStyle xmlns:a="http://schemas.openxmlformats.org/drawingml/2006/main"/>
-          <a:p xmlns:a="http://schemas.openxmlformats.org/drawingml/2006/main">
+          <a:lstStyle/>
+          <a:p>
             <a:pPr>
               <a:defRPr sz="1575">
                 <a:solidFill>
@@ -6688,37 +6512,37 @@
       </p:sp>
       <p:sp>
         <p:nvSpPr>
-          <p:cNvPr id="6" name="">
-            <a:extLst xmlns:a="http://schemas.openxmlformats.org/drawingml/2006/main">
+          <p:cNvPr id="6" name="Rectangle 5">
+            <a:extLst>
               <a:ext uri="{FF2B5EF4-FFF2-40B4-BE49-F238E27FC236}">
                 <a16:creationId xmlns:a16="http://schemas.microsoft.com/office/drawing/2014/main" id="{8CF9A95A-4732-4A59-B521-C9AB9021082E}"/>
               </a:ext>
             </a:extLst>
           </p:cNvPr>
           <p:cNvSpPr>
-            <a:spLocks xmlns:a="http://schemas.openxmlformats.org/drawingml/2006/main" noGrp="1"/>
-          </p:cNvSpPr>
-          <p:nvPr/>
-        </p:nvSpPr>
-        <p:spPr>
-          <a:xfrm xmlns:a="http://schemas.openxmlformats.org/drawingml/2006/main">
+            <a:spLocks noGrp="1"/>
+          </p:cNvSpPr>
+          <p:nvPr/>
+        </p:nvSpPr>
+        <p:spPr>
+          <a:xfrm>
             <a:off x="714375" y="6524625"/>
             <a:ext cx="2571750" cy="333375"/>
           </a:xfrm>
-          <a:prstGeom xmlns:a="http://schemas.openxmlformats.org/drawingml/2006/main" prst="rect">
-            <a:avLst/>
-          </a:prstGeom>
-          <a:noFill xmlns:a="http://schemas.openxmlformats.org/drawingml/2006/main"/>
-          <a:ln xmlns:a="http://schemas.openxmlformats.org/drawingml/2006/main" w="0">
+          <a:prstGeom prst="rect">
+            <a:avLst/>
+          </a:prstGeom>
+          <a:noFill/>
+          <a:ln w="0">
             <a:noFill/>
           </a:ln>
         </p:spPr>
         <p:txBody>
-          <a:bodyPr xmlns:a="http://schemas.openxmlformats.org/drawingml/2006/main">
+          <a:bodyPr>
             <a:noAutofit/>
           </a:bodyPr>
-          <a:lstStyle xmlns:a="http://schemas.openxmlformats.org/drawingml/2006/main"/>
-          <a:p xmlns:a="http://schemas.openxmlformats.org/drawingml/2006/main">
+          <a:lstStyle/>
+          <a:p>
             <a:pPr>
               <a:defRPr sz="1650">
                 <a:solidFill>
@@ -6745,37 +6569,37 @@
       </p:sp>
       <p:sp>
         <p:nvSpPr>
-          <p:cNvPr id="7" name="">
-            <a:extLst xmlns:a="http://schemas.openxmlformats.org/drawingml/2006/main">
+          <p:cNvPr id="7" name="Rectangle 6">
+            <a:extLst>
               <a:ext uri="{FF2B5EF4-FFF2-40B4-BE49-F238E27FC236}">
                 <a16:creationId xmlns:a16="http://schemas.microsoft.com/office/drawing/2014/main" id="{E8A63610-6FCE-4711-8E6A-69D3D4759FEB}"/>
               </a:ext>
             </a:extLst>
           </p:cNvPr>
           <p:cNvSpPr>
-            <a:spLocks xmlns:a="http://schemas.openxmlformats.org/drawingml/2006/main" noGrp="1"/>
-          </p:cNvSpPr>
-          <p:nvPr/>
-        </p:nvSpPr>
-        <p:spPr>
-          <a:xfrm xmlns:a="http://schemas.openxmlformats.org/drawingml/2006/main">
+            <a:spLocks noGrp="1"/>
+          </p:cNvSpPr>
+          <p:nvPr/>
+        </p:nvSpPr>
+        <p:spPr>
+          <a:xfrm>
             <a:off x="714375" y="7048500"/>
             <a:ext cx="2667000" cy="666750"/>
           </a:xfrm>
-          <a:prstGeom xmlns:a="http://schemas.openxmlformats.org/drawingml/2006/main" prst="rect">
-            <a:avLst/>
-          </a:prstGeom>
-          <a:noFill xmlns:a="http://schemas.openxmlformats.org/drawingml/2006/main"/>
-          <a:ln xmlns:a="http://schemas.openxmlformats.org/drawingml/2006/main" w="0">
+          <a:prstGeom prst="rect">
+            <a:avLst/>
+          </a:prstGeom>
+          <a:noFill/>
+          <a:ln w="0">
             <a:noFill/>
           </a:ln>
         </p:spPr>
         <p:txBody>
-          <a:bodyPr xmlns:a="http://schemas.openxmlformats.org/drawingml/2006/main">
+          <a:bodyPr>
             <a:noAutofit/>
           </a:bodyPr>
-          <a:lstStyle xmlns:a="http://schemas.openxmlformats.org/drawingml/2006/main"/>
-          <a:p xmlns:a="http://schemas.openxmlformats.org/drawingml/2006/main">
+          <a:lstStyle/>
+          <a:p>
             <a:pPr>
               <a:defRPr sz="1350">
                 <a:solidFill>
@@ -6802,69 +6626,76 @@
       </p:sp>
       <p:sp>
         <p:nvSpPr>
-          <p:cNvPr id="8" name="">
-            <a:extLst xmlns:a="http://schemas.openxmlformats.org/drawingml/2006/main">
+          <p:cNvPr id="8" name="Rectangle 7">
+            <a:extLst>
               <a:ext uri="{FF2B5EF4-FFF2-40B4-BE49-F238E27FC236}">
                 <a16:creationId xmlns:a16="http://schemas.microsoft.com/office/drawing/2014/main" id="{1BBE51E3-F125-49A3-89CB-E80A5C729B38}"/>
               </a:ext>
             </a:extLst>
           </p:cNvPr>
           <p:cNvSpPr>
-            <a:spLocks xmlns:a="http://schemas.openxmlformats.org/drawingml/2006/main" noGrp="1"/>
-          </p:cNvSpPr>
-          <p:nvPr/>
-        </p:nvSpPr>
-        <p:spPr>
-          <a:xfrm xmlns:a="http://schemas.openxmlformats.org/drawingml/2006/main">
+            <a:spLocks noGrp="1"/>
+          </p:cNvSpPr>
+          <p:nvPr/>
+        </p:nvSpPr>
+        <p:spPr>
+          <a:xfrm>
             <a:off x="3505200" y="3286125"/>
             <a:ext cx="2476500" cy="2428875"/>
           </a:xfrm>
-          <a:prstGeom xmlns:a="http://schemas.openxmlformats.org/drawingml/2006/main" prst="rect">
-            <a:avLst/>
-          </a:prstGeom>
-          <a:solidFill xmlns:a="http://schemas.openxmlformats.org/drawingml/2006/main">
+          <a:prstGeom prst="rect">
+            <a:avLst/>
+          </a:prstGeom>
+          <a:solidFill>
             <a:srgbClr val="A69A8C"/>
           </a:solidFill>
-          <a:ln xmlns:a="http://schemas.openxmlformats.org/drawingml/2006/main" w="9525">
+          <a:ln w="9525">
             <a:solidFill>
               <a:srgbClr val="D9CEC2"/>
             </a:solidFill>
           </a:ln>
         </p:spPr>
-      </p:sp>
-      <p:sp>
-        <p:nvSpPr>
-          <p:cNvPr id="9" name="">
-            <a:extLst xmlns:a="http://schemas.openxmlformats.org/drawingml/2006/main">
+        <p:txBody>
+          <a:bodyPr/>
+          <a:lstStyle/>
+          <a:p>
+            <a:endParaRPr lang="de-DE"/>
+          </a:p>
+        </p:txBody>
+      </p:sp>
+      <p:sp>
+        <p:nvSpPr>
+          <p:cNvPr id="9" name="Rectangle 8">
+            <a:extLst>
               <a:ext uri="{FF2B5EF4-FFF2-40B4-BE49-F238E27FC236}">
                 <a16:creationId xmlns:a16="http://schemas.microsoft.com/office/drawing/2014/main" id="{27123568-B684-4CD0-9C83-FD08B0332ACE}"/>
               </a:ext>
             </a:extLst>
           </p:cNvPr>
           <p:cNvSpPr>
-            <a:spLocks xmlns:a="http://schemas.openxmlformats.org/drawingml/2006/main" noGrp="1"/>
-          </p:cNvSpPr>
-          <p:nvPr/>
-        </p:nvSpPr>
-        <p:spPr>
-          <a:xfrm xmlns:a="http://schemas.openxmlformats.org/drawingml/2006/main">
+            <a:spLocks noGrp="1"/>
+          </p:cNvSpPr>
+          <p:nvPr/>
+        </p:nvSpPr>
+        <p:spPr>
+          <a:xfrm>
             <a:off x="3505200" y="6048375"/>
             <a:ext cx="2571750" cy="333375"/>
           </a:xfrm>
-          <a:prstGeom xmlns:a="http://schemas.openxmlformats.org/drawingml/2006/main" prst="rect">
-            <a:avLst/>
-          </a:prstGeom>
-          <a:noFill xmlns:a="http://schemas.openxmlformats.org/drawingml/2006/main"/>
-          <a:ln xmlns:a="http://schemas.openxmlformats.org/drawingml/2006/main" w="0">
+          <a:prstGeom prst="rect">
+            <a:avLst/>
+          </a:prstGeom>
+          <a:noFill/>
+          <a:ln w="0">
             <a:noFill/>
           </a:ln>
         </p:spPr>
         <p:txBody>
-          <a:bodyPr xmlns:a="http://schemas.openxmlformats.org/drawingml/2006/main">
+          <a:bodyPr>
             <a:noAutofit/>
           </a:bodyPr>
-          <a:lstStyle xmlns:a="http://schemas.openxmlformats.org/drawingml/2006/main"/>
-          <a:p xmlns:a="http://schemas.openxmlformats.org/drawingml/2006/main">
+          <a:lstStyle/>
+          <a:p>
             <a:pPr>
               <a:defRPr sz="1575">
                 <a:solidFill>
@@ -6891,37 +6722,37 @@
       </p:sp>
       <p:sp>
         <p:nvSpPr>
-          <p:cNvPr id="10" name="">
-            <a:extLst xmlns:a="http://schemas.openxmlformats.org/drawingml/2006/main">
+          <p:cNvPr id="10" name="Rectangle 9">
+            <a:extLst>
               <a:ext uri="{FF2B5EF4-FFF2-40B4-BE49-F238E27FC236}">
                 <a16:creationId xmlns:a16="http://schemas.microsoft.com/office/drawing/2014/main" id="{C9FB09E4-38DC-428C-8022-A41D3B3CBE9C}"/>
               </a:ext>
             </a:extLst>
           </p:cNvPr>
           <p:cNvSpPr>
-            <a:spLocks xmlns:a="http://schemas.openxmlformats.org/drawingml/2006/main" noGrp="1"/>
-          </p:cNvSpPr>
-          <p:nvPr/>
-        </p:nvSpPr>
-        <p:spPr>
-          <a:xfrm xmlns:a="http://schemas.openxmlformats.org/drawingml/2006/main">
+            <a:spLocks noGrp="1"/>
+          </p:cNvSpPr>
+          <p:nvPr/>
+        </p:nvSpPr>
+        <p:spPr>
+          <a:xfrm>
             <a:off x="3505200" y="6524625"/>
             <a:ext cx="2571750" cy="333375"/>
           </a:xfrm>
-          <a:prstGeom xmlns:a="http://schemas.openxmlformats.org/drawingml/2006/main" prst="rect">
-            <a:avLst/>
-          </a:prstGeom>
-          <a:noFill xmlns:a="http://schemas.openxmlformats.org/drawingml/2006/main"/>
-          <a:ln xmlns:a="http://schemas.openxmlformats.org/drawingml/2006/main" w="0">
+          <a:prstGeom prst="rect">
+            <a:avLst/>
+          </a:prstGeom>
+          <a:noFill/>
+          <a:ln w="0">
             <a:noFill/>
           </a:ln>
         </p:spPr>
         <p:txBody>
-          <a:bodyPr xmlns:a="http://schemas.openxmlformats.org/drawingml/2006/main">
+          <a:bodyPr>
             <a:noAutofit/>
           </a:bodyPr>
-          <a:lstStyle xmlns:a="http://schemas.openxmlformats.org/drawingml/2006/main"/>
-          <a:p xmlns:a="http://schemas.openxmlformats.org/drawingml/2006/main">
+          <a:lstStyle/>
+          <a:p>
             <a:pPr>
               <a:defRPr sz="1650">
                 <a:solidFill>
@@ -6948,37 +6779,37 @@
       </p:sp>
       <p:sp>
         <p:nvSpPr>
-          <p:cNvPr id="11" name="">
-            <a:extLst xmlns:a="http://schemas.openxmlformats.org/drawingml/2006/main">
+          <p:cNvPr id="11" name="Rectangle 10">
+            <a:extLst>
               <a:ext uri="{FF2B5EF4-FFF2-40B4-BE49-F238E27FC236}">
                 <a16:creationId xmlns:a16="http://schemas.microsoft.com/office/drawing/2014/main" id="{87D410D5-4104-40BE-92B1-ECEF50A37963}"/>
               </a:ext>
             </a:extLst>
           </p:cNvPr>
           <p:cNvSpPr>
-            <a:spLocks xmlns:a="http://schemas.openxmlformats.org/drawingml/2006/main" noGrp="1"/>
-          </p:cNvSpPr>
-          <p:nvPr/>
-        </p:nvSpPr>
-        <p:spPr>
-          <a:xfrm xmlns:a="http://schemas.openxmlformats.org/drawingml/2006/main">
+            <a:spLocks noGrp="1"/>
+          </p:cNvSpPr>
+          <p:nvPr/>
+        </p:nvSpPr>
+        <p:spPr>
+          <a:xfrm>
             <a:off x="3505200" y="7048500"/>
             <a:ext cx="2667000" cy="666750"/>
           </a:xfrm>
-          <a:prstGeom xmlns:a="http://schemas.openxmlformats.org/drawingml/2006/main" prst="rect">
-            <a:avLst/>
-          </a:prstGeom>
-          <a:noFill xmlns:a="http://schemas.openxmlformats.org/drawingml/2006/main"/>
-          <a:ln xmlns:a="http://schemas.openxmlformats.org/drawingml/2006/main" w="0">
+          <a:prstGeom prst="rect">
+            <a:avLst/>
+          </a:prstGeom>
+          <a:noFill/>
+          <a:ln w="0">
             <a:noFill/>
           </a:ln>
         </p:spPr>
         <p:txBody>
-          <a:bodyPr xmlns:a="http://schemas.openxmlformats.org/drawingml/2006/main">
+          <a:bodyPr>
             <a:noAutofit/>
           </a:bodyPr>
-          <a:lstStyle xmlns:a="http://schemas.openxmlformats.org/drawingml/2006/main"/>
-          <a:p xmlns:a="http://schemas.openxmlformats.org/drawingml/2006/main">
+          <a:lstStyle/>
+          <a:p>
             <a:pPr>
               <a:defRPr sz="1350">
                 <a:solidFill>
@@ -7005,69 +6836,76 @@
       </p:sp>
       <p:sp>
         <p:nvSpPr>
-          <p:cNvPr id="12" name="">
-            <a:extLst xmlns:a="http://schemas.openxmlformats.org/drawingml/2006/main">
+          <p:cNvPr id="12" name="Rectangle 11">
+            <a:extLst>
               <a:ext uri="{FF2B5EF4-FFF2-40B4-BE49-F238E27FC236}">
                 <a16:creationId xmlns:a16="http://schemas.microsoft.com/office/drawing/2014/main" id="{1C616D8A-E544-4A7F-82F6-5044A1A0666E}"/>
               </a:ext>
             </a:extLst>
           </p:cNvPr>
           <p:cNvSpPr>
-            <a:spLocks xmlns:a="http://schemas.openxmlformats.org/drawingml/2006/main" noGrp="1"/>
-          </p:cNvSpPr>
-          <p:nvPr/>
-        </p:nvSpPr>
-        <p:spPr>
-          <a:xfrm xmlns:a="http://schemas.openxmlformats.org/drawingml/2006/main">
+            <a:spLocks noGrp="1"/>
+          </p:cNvSpPr>
+          <p:nvPr/>
+        </p:nvSpPr>
+        <p:spPr>
+          <a:xfrm>
             <a:off x="6296025" y="3286125"/>
             <a:ext cx="2476500" cy="2428875"/>
           </a:xfrm>
-          <a:prstGeom xmlns:a="http://schemas.openxmlformats.org/drawingml/2006/main" prst="rect">
-            <a:avLst/>
-          </a:prstGeom>
-          <a:solidFill xmlns:a="http://schemas.openxmlformats.org/drawingml/2006/main">
+          <a:prstGeom prst="rect">
+            <a:avLst/>
+          </a:prstGeom>
+          <a:solidFill>
             <a:srgbClr val="D9CEC2"/>
           </a:solidFill>
-          <a:ln xmlns:a="http://schemas.openxmlformats.org/drawingml/2006/main" w="9525">
+          <a:ln w="9525">
             <a:solidFill>
               <a:srgbClr val="D9CEC2"/>
             </a:solidFill>
           </a:ln>
         </p:spPr>
-      </p:sp>
-      <p:sp>
-        <p:nvSpPr>
-          <p:cNvPr id="13" name="">
-            <a:extLst xmlns:a="http://schemas.openxmlformats.org/drawingml/2006/main">
+        <p:txBody>
+          <a:bodyPr/>
+          <a:lstStyle/>
+          <a:p>
+            <a:endParaRPr lang="de-DE"/>
+          </a:p>
+        </p:txBody>
+      </p:sp>
+      <p:sp>
+        <p:nvSpPr>
+          <p:cNvPr id="13" name="Rectangle 12">
+            <a:extLst>
               <a:ext uri="{FF2B5EF4-FFF2-40B4-BE49-F238E27FC236}">
                 <a16:creationId xmlns:a16="http://schemas.microsoft.com/office/drawing/2014/main" id="{51201ED0-65C7-44AF-ABBA-A2D7F59E213C}"/>
               </a:ext>
             </a:extLst>
           </p:cNvPr>
           <p:cNvSpPr>
-            <a:spLocks xmlns:a="http://schemas.openxmlformats.org/drawingml/2006/main" noGrp="1"/>
-          </p:cNvSpPr>
-          <p:nvPr/>
-        </p:nvSpPr>
-        <p:spPr>
-          <a:xfrm xmlns:a="http://schemas.openxmlformats.org/drawingml/2006/main">
+            <a:spLocks noGrp="1"/>
+          </p:cNvSpPr>
+          <p:nvPr/>
+        </p:nvSpPr>
+        <p:spPr>
+          <a:xfrm>
             <a:off x="6296025" y="6048375"/>
             <a:ext cx="2571750" cy="333375"/>
           </a:xfrm>
-          <a:prstGeom xmlns:a="http://schemas.openxmlformats.org/drawingml/2006/main" prst="rect">
-            <a:avLst/>
-          </a:prstGeom>
-          <a:noFill xmlns:a="http://schemas.openxmlformats.org/drawingml/2006/main"/>
-          <a:ln xmlns:a="http://schemas.openxmlformats.org/drawingml/2006/main" w="0">
+          <a:prstGeom prst="rect">
+            <a:avLst/>
+          </a:prstGeom>
+          <a:noFill/>
+          <a:ln w="0">
             <a:noFill/>
           </a:ln>
         </p:spPr>
         <p:txBody>
-          <a:bodyPr xmlns:a="http://schemas.openxmlformats.org/drawingml/2006/main">
+          <a:bodyPr>
             <a:noAutofit/>
           </a:bodyPr>
-          <a:lstStyle xmlns:a="http://schemas.openxmlformats.org/drawingml/2006/main"/>
-          <a:p xmlns:a="http://schemas.openxmlformats.org/drawingml/2006/main">
+          <a:lstStyle/>
+          <a:p>
             <a:pPr>
               <a:defRPr sz="1575">
                 <a:solidFill>
@@ -7094,37 +6932,37 @@
       </p:sp>
       <p:sp>
         <p:nvSpPr>
-          <p:cNvPr id="14" name="">
-            <a:extLst xmlns:a="http://schemas.openxmlformats.org/drawingml/2006/main">
+          <p:cNvPr id="14" name="Rectangle 13">
+            <a:extLst>
               <a:ext uri="{FF2B5EF4-FFF2-40B4-BE49-F238E27FC236}">
                 <a16:creationId xmlns:a16="http://schemas.microsoft.com/office/drawing/2014/main" id="{C28A26D6-BADC-456D-A5C5-8F49A9EA9388}"/>
               </a:ext>
             </a:extLst>
           </p:cNvPr>
           <p:cNvSpPr>
-            <a:spLocks xmlns:a="http://schemas.openxmlformats.org/drawingml/2006/main" noGrp="1"/>
-          </p:cNvSpPr>
-          <p:nvPr/>
-        </p:nvSpPr>
-        <p:spPr>
-          <a:xfrm xmlns:a="http://schemas.openxmlformats.org/drawingml/2006/main">
+            <a:spLocks noGrp="1"/>
+          </p:cNvSpPr>
+          <p:nvPr/>
+        </p:nvSpPr>
+        <p:spPr>
+          <a:xfrm>
             <a:off x="6296025" y="6524625"/>
             <a:ext cx="2571750" cy="333375"/>
           </a:xfrm>
-          <a:prstGeom xmlns:a="http://schemas.openxmlformats.org/drawingml/2006/main" prst="rect">
-            <a:avLst/>
-          </a:prstGeom>
-          <a:noFill xmlns:a="http://schemas.openxmlformats.org/drawingml/2006/main"/>
-          <a:ln xmlns:a="http://schemas.openxmlformats.org/drawingml/2006/main" w="0">
+          <a:prstGeom prst="rect">
+            <a:avLst/>
+          </a:prstGeom>
+          <a:noFill/>
+          <a:ln w="0">
             <a:noFill/>
           </a:ln>
         </p:spPr>
         <p:txBody>
-          <a:bodyPr xmlns:a="http://schemas.openxmlformats.org/drawingml/2006/main">
+          <a:bodyPr>
             <a:noAutofit/>
           </a:bodyPr>
-          <a:lstStyle xmlns:a="http://schemas.openxmlformats.org/drawingml/2006/main"/>
-          <a:p xmlns:a="http://schemas.openxmlformats.org/drawingml/2006/main">
+          <a:lstStyle/>
+          <a:p>
             <a:pPr>
               <a:defRPr sz="1650">
                 <a:solidFill>
@@ -7151,37 +6989,37 @@
       </p:sp>
       <p:sp>
         <p:nvSpPr>
-          <p:cNvPr id="15" name="">
-            <a:extLst xmlns:a="http://schemas.openxmlformats.org/drawingml/2006/main">
+          <p:cNvPr id="15" name="Rectangle 14">
+            <a:extLst>
               <a:ext uri="{FF2B5EF4-FFF2-40B4-BE49-F238E27FC236}">
                 <a16:creationId xmlns:a16="http://schemas.microsoft.com/office/drawing/2014/main" id="{A19E490D-54AB-45AD-8112-1885702EA892}"/>
               </a:ext>
             </a:extLst>
           </p:cNvPr>
           <p:cNvSpPr>
-            <a:spLocks xmlns:a="http://schemas.openxmlformats.org/drawingml/2006/main" noGrp="1"/>
-          </p:cNvSpPr>
-          <p:nvPr/>
-        </p:nvSpPr>
-        <p:spPr>
-          <a:xfrm xmlns:a="http://schemas.openxmlformats.org/drawingml/2006/main">
+            <a:spLocks noGrp="1"/>
+          </p:cNvSpPr>
+          <p:nvPr/>
+        </p:nvSpPr>
+        <p:spPr>
+          <a:xfrm>
             <a:off x="6296025" y="7048500"/>
             <a:ext cx="2667000" cy="666750"/>
           </a:xfrm>
-          <a:prstGeom xmlns:a="http://schemas.openxmlformats.org/drawingml/2006/main" prst="rect">
-            <a:avLst/>
-          </a:prstGeom>
-          <a:noFill xmlns:a="http://schemas.openxmlformats.org/drawingml/2006/main"/>
-          <a:ln xmlns:a="http://schemas.openxmlformats.org/drawingml/2006/main" w="0">
+          <a:prstGeom prst="rect">
+            <a:avLst/>
+          </a:prstGeom>
+          <a:noFill/>
+          <a:ln w="0">
             <a:noFill/>
           </a:ln>
         </p:spPr>
         <p:txBody>
-          <a:bodyPr xmlns:a="http://schemas.openxmlformats.org/drawingml/2006/main">
+          <a:bodyPr>
             <a:noAutofit/>
           </a:bodyPr>
-          <a:lstStyle xmlns:a="http://schemas.openxmlformats.org/drawingml/2006/main"/>
-          <a:p xmlns:a="http://schemas.openxmlformats.org/drawingml/2006/main">
+          <a:lstStyle/>
+          <a:p>
             <a:pPr>
               <a:defRPr sz="1350">
                 <a:solidFill>
@@ -7208,69 +7046,76 @@
       </p:sp>
       <p:sp>
         <p:nvSpPr>
-          <p:cNvPr id="16" name="">
-            <a:extLst xmlns:a="http://schemas.openxmlformats.org/drawingml/2006/main">
+          <p:cNvPr id="16" name="Rectangle 15">
+            <a:extLst>
               <a:ext uri="{FF2B5EF4-FFF2-40B4-BE49-F238E27FC236}">
                 <a16:creationId xmlns:a16="http://schemas.microsoft.com/office/drawing/2014/main" id="{F80BB1C4-E84A-4360-9209-D70C4C22E75C}"/>
               </a:ext>
             </a:extLst>
           </p:cNvPr>
           <p:cNvSpPr>
-            <a:spLocks xmlns:a="http://schemas.openxmlformats.org/drawingml/2006/main" noGrp="1"/>
-          </p:cNvSpPr>
-          <p:nvPr/>
-        </p:nvSpPr>
-        <p:spPr>
-          <a:xfrm xmlns:a="http://schemas.openxmlformats.org/drawingml/2006/main">
+            <a:spLocks noGrp="1"/>
+          </p:cNvSpPr>
+          <p:nvPr/>
+        </p:nvSpPr>
+        <p:spPr>
+          <a:xfrm>
             <a:off x="9086850" y="3286125"/>
             <a:ext cx="2476500" cy="2428875"/>
           </a:xfrm>
-          <a:prstGeom xmlns:a="http://schemas.openxmlformats.org/drawingml/2006/main" prst="rect">
-            <a:avLst/>
-          </a:prstGeom>
-          <a:solidFill xmlns:a="http://schemas.openxmlformats.org/drawingml/2006/main">
+          <a:prstGeom prst="rect">
+            <a:avLst/>
+          </a:prstGeom>
+          <a:solidFill>
             <a:srgbClr val="F6F3ED"/>
           </a:solidFill>
-          <a:ln xmlns:a="http://schemas.openxmlformats.org/drawingml/2006/main" w="9525">
+          <a:ln w="9525">
             <a:solidFill>
               <a:srgbClr val="D9CEC2"/>
             </a:solidFill>
           </a:ln>
         </p:spPr>
-      </p:sp>
-      <p:sp>
-        <p:nvSpPr>
-          <p:cNvPr id="17" name="">
-            <a:extLst xmlns:a="http://schemas.openxmlformats.org/drawingml/2006/main">
+        <p:txBody>
+          <a:bodyPr/>
+          <a:lstStyle/>
+          <a:p>
+            <a:endParaRPr lang="de-DE"/>
+          </a:p>
+        </p:txBody>
+      </p:sp>
+      <p:sp>
+        <p:nvSpPr>
+          <p:cNvPr id="17" name="Rectangle 16">
+            <a:extLst>
               <a:ext uri="{FF2B5EF4-FFF2-40B4-BE49-F238E27FC236}">
                 <a16:creationId xmlns:a16="http://schemas.microsoft.com/office/drawing/2014/main" id="{1C719BF4-4CA3-4BF4-9ED0-D3028B36029E}"/>
               </a:ext>
             </a:extLst>
           </p:cNvPr>
           <p:cNvSpPr>
-            <a:spLocks xmlns:a="http://schemas.openxmlformats.org/drawingml/2006/main" noGrp="1"/>
-          </p:cNvSpPr>
-          <p:nvPr/>
-        </p:nvSpPr>
-        <p:spPr>
-          <a:xfrm xmlns:a="http://schemas.openxmlformats.org/drawingml/2006/main">
+            <a:spLocks noGrp="1"/>
+          </p:cNvSpPr>
+          <p:nvPr/>
+        </p:nvSpPr>
+        <p:spPr>
+          <a:xfrm>
             <a:off x="9086850" y="6048375"/>
             <a:ext cx="2571750" cy="333375"/>
           </a:xfrm>
-          <a:prstGeom xmlns:a="http://schemas.openxmlformats.org/drawingml/2006/main" prst="rect">
-            <a:avLst/>
-          </a:prstGeom>
-          <a:noFill xmlns:a="http://schemas.openxmlformats.org/drawingml/2006/main"/>
-          <a:ln xmlns:a="http://schemas.openxmlformats.org/drawingml/2006/main" w="0">
+          <a:prstGeom prst="rect">
+            <a:avLst/>
+          </a:prstGeom>
+          <a:noFill/>
+          <a:ln w="0">
             <a:noFill/>
           </a:ln>
         </p:spPr>
         <p:txBody>
-          <a:bodyPr xmlns:a="http://schemas.openxmlformats.org/drawingml/2006/main">
+          <a:bodyPr>
             <a:noAutofit/>
           </a:bodyPr>
-          <a:lstStyle xmlns:a="http://schemas.openxmlformats.org/drawingml/2006/main"/>
-          <a:p xmlns:a="http://schemas.openxmlformats.org/drawingml/2006/main">
+          <a:lstStyle/>
+          <a:p>
             <a:pPr>
               <a:defRPr sz="1575">
                 <a:solidFill>
@@ -7297,37 +7142,37 @@
       </p:sp>
       <p:sp>
         <p:nvSpPr>
-          <p:cNvPr id="18" name="">
-            <a:extLst xmlns:a="http://schemas.openxmlformats.org/drawingml/2006/main">
+          <p:cNvPr id="18" name="Rectangle 17">
+            <a:extLst>
               <a:ext uri="{FF2B5EF4-FFF2-40B4-BE49-F238E27FC236}">
                 <a16:creationId xmlns:a16="http://schemas.microsoft.com/office/drawing/2014/main" id="{89D0EDCF-1E4E-4270-92A0-B7B1E6E39FA1}"/>
               </a:ext>
             </a:extLst>
           </p:cNvPr>
           <p:cNvSpPr>
-            <a:spLocks xmlns:a="http://schemas.openxmlformats.org/drawingml/2006/main" noGrp="1"/>
-          </p:cNvSpPr>
-          <p:nvPr/>
-        </p:nvSpPr>
-        <p:spPr>
-          <a:xfrm xmlns:a="http://schemas.openxmlformats.org/drawingml/2006/main">
+            <a:spLocks noGrp="1"/>
+          </p:cNvSpPr>
+          <p:nvPr/>
+        </p:nvSpPr>
+        <p:spPr>
+          <a:xfrm>
             <a:off x="9086850" y="6524625"/>
             <a:ext cx="2571750" cy="333375"/>
           </a:xfrm>
-          <a:prstGeom xmlns:a="http://schemas.openxmlformats.org/drawingml/2006/main" prst="rect">
-            <a:avLst/>
-          </a:prstGeom>
-          <a:noFill xmlns:a="http://schemas.openxmlformats.org/drawingml/2006/main"/>
-          <a:ln xmlns:a="http://schemas.openxmlformats.org/drawingml/2006/main" w="0">
+          <a:prstGeom prst="rect">
+            <a:avLst/>
+          </a:prstGeom>
+          <a:noFill/>
+          <a:ln w="0">
             <a:noFill/>
           </a:ln>
         </p:spPr>
         <p:txBody>
-          <a:bodyPr xmlns:a="http://schemas.openxmlformats.org/drawingml/2006/main">
+          <a:bodyPr>
             <a:noAutofit/>
           </a:bodyPr>
-          <a:lstStyle xmlns:a="http://schemas.openxmlformats.org/drawingml/2006/main"/>
-          <a:p xmlns:a="http://schemas.openxmlformats.org/drawingml/2006/main">
+          <a:lstStyle/>
+          <a:p>
             <a:pPr>
               <a:defRPr sz="1650">
                 <a:solidFill>
@@ -7354,37 +7199,37 @@
       </p:sp>
       <p:sp>
         <p:nvSpPr>
-          <p:cNvPr id="19" name="">
-            <a:extLst xmlns:a="http://schemas.openxmlformats.org/drawingml/2006/main">
+          <p:cNvPr id="19" name="Rectangle 18">
+            <a:extLst>
               <a:ext uri="{FF2B5EF4-FFF2-40B4-BE49-F238E27FC236}">
                 <a16:creationId xmlns:a16="http://schemas.microsoft.com/office/drawing/2014/main" id="{7B00D91B-F0B2-431B-B055-8F104970713A}"/>
               </a:ext>
             </a:extLst>
           </p:cNvPr>
           <p:cNvSpPr>
-            <a:spLocks xmlns:a="http://schemas.openxmlformats.org/drawingml/2006/main" noGrp="1"/>
-          </p:cNvSpPr>
-          <p:nvPr/>
-        </p:nvSpPr>
-        <p:spPr>
-          <a:xfrm xmlns:a="http://schemas.openxmlformats.org/drawingml/2006/main">
+            <a:spLocks noGrp="1"/>
+          </p:cNvSpPr>
+          <p:nvPr/>
+        </p:nvSpPr>
+        <p:spPr>
+          <a:xfrm>
             <a:off x="9086850" y="7048500"/>
             <a:ext cx="2667000" cy="666750"/>
           </a:xfrm>
-          <a:prstGeom xmlns:a="http://schemas.openxmlformats.org/drawingml/2006/main" prst="rect">
-            <a:avLst/>
-          </a:prstGeom>
-          <a:noFill xmlns:a="http://schemas.openxmlformats.org/drawingml/2006/main"/>
-          <a:ln xmlns:a="http://schemas.openxmlformats.org/drawingml/2006/main" w="0">
+          <a:prstGeom prst="rect">
+            <a:avLst/>
+          </a:prstGeom>
+          <a:noFill/>
+          <a:ln w="0">
             <a:noFill/>
           </a:ln>
         </p:spPr>
         <p:txBody>
-          <a:bodyPr xmlns:a="http://schemas.openxmlformats.org/drawingml/2006/main">
+          <a:bodyPr>
             <a:noAutofit/>
           </a:bodyPr>
-          <a:lstStyle xmlns:a="http://schemas.openxmlformats.org/drawingml/2006/main"/>
-          <a:p xmlns:a="http://schemas.openxmlformats.org/drawingml/2006/main">
+          <a:lstStyle/>
+          <a:p>
             <a:pPr>
               <a:defRPr sz="1350">
                 <a:solidFill>
@@ -7411,69 +7256,76 @@
       </p:sp>
       <p:sp>
         <p:nvSpPr>
-          <p:cNvPr id="20" name="">
-            <a:extLst xmlns:a="http://schemas.openxmlformats.org/drawingml/2006/main">
+          <p:cNvPr id="20" name="Rectangle 19">
+            <a:extLst>
               <a:ext uri="{FF2B5EF4-FFF2-40B4-BE49-F238E27FC236}">
                 <a16:creationId xmlns:a16="http://schemas.microsoft.com/office/drawing/2014/main" id="{99F1653F-64D5-4248-95ED-7DE4D0885F93}"/>
               </a:ext>
             </a:extLst>
           </p:cNvPr>
           <p:cNvSpPr>
-            <a:spLocks xmlns:a="http://schemas.openxmlformats.org/drawingml/2006/main" noGrp="1"/>
-          </p:cNvSpPr>
-          <p:nvPr/>
-        </p:nvSpPr>
-        <p:spPr>
-          <a:xfrm xmlns:a="http://schemas.openxmlformats.org/drawingml/2006/main">
+            <a:spLocks noGrp="1"/>
+          </p:cNvSpPr>
+          <p:nvPr/>
+        </p:nvSpPr>
+        <p:spPr>
+          <a:xfrm>
             <a:off x="11877675" y="3286125"/>
             <a:ext cx="2476500" cy="2428875"/>
           </a:xfrm>
-          <a:prstGeom xmlns:a="http://schemas.openxmlformats.org/drawingml/2006/main" prst="rect">
-            <a:avLst/>
-          </a:prstGeom>
-          <a:solidFill xmlns:a="http://schemas.openxmlformats.org/drawingml/2006/main">
+          <a:prstGeom prst="rect">
+            <a:avLst/>
+          </a:prstGeom>
+          <a:solidFill>
             <a:srgbClr val="1B1B1B"/>
           </a:solidFill>
-          <a:ln xmlns:a="http://schemas.openxmlformats.org/drawingml/2006/main" w="9525">
+          <a:ln w="9525">
             <a:solidFill>
               <a:srgbClr val="D9CEC2"/>
             </a:solidFill>
           </a:ln>
         </p:spPr>
-      </p:sp>
-      <p:sp>
-        <p:nvSpPr>
-          <p:cNvPr id="21" name="">
-            <a:extLst xmlns:a="http://schemas.openxmlformats.org/drawingml/2006/main">
+        <p:txBody>
+          <a:bodyPr/>
+          <a:lstStyle/>
+          <a:p>
+            <a:endParaRPr lang="de-DE"/>
+          </a:p>
+        </p:txBody>
+      </p:sp>
+      <p:sp>
+        <p:nvSpPr>
+          <p:cNvPr id="21" name="Rectangle 20">
+            <a:extLst>
               <a:ext uri="{FF2B5EF4-FFF2-40B4-BE49-F238E27FC236}">
                 <a16:creationId xmlns:a16="http://schemas.microsoft.com/office/drawing/2014/main" id="{BEB770B7-9365-4C09-9870-F7B65B7FE39F}"/>
               </a:ext>
             </a:extLst>
           </p:cNvPr>
           <p:cNvSpPr>
-            <a:spLocks xmlns:a="http://schemas.openxmlformats.org/drawingml/2006/main" noGrp="1"/>
-          </p:cNvSpPr>
-          <p:nvPr/>
-        </p:nvSpPr>
-        <p:spPr>
-          <a:xfrm xmlns:a="http://schemas.openxmlformats.org/drawingml/2006/main">
+            <a:spLocks noGrp="1"/>
+          </p:cNvSpPr>
+          <p:nvPr/>
+        </p:nvSpPr>
+        <p:spPr>
+          <a:xfrm>
             <a:off x="11877675" y="6048375"/>
             <a:ext cx="2571750" cy="333375"/>
           </a:xfrm>
-          <a:prstGeom xmlns:a="http://schemas.openxmlformats.org/drawingml/2006/main" prst="rect">
-            <a:avLst/>
-          </a:prstGeom>
-          <a:noFill xmlns:a="http://schemas.openxmlformats.org/drawingml/2006/main"/>
-          <a:ln xmlns:a="http://schemas.openxmlformats.org/drawingml/2006/main" w="0">
+          <a:prstGeom prst="rect">
+            <a:avLst/>
+          </a:prstGeom>
+          <a:noFill/>
+          <a:ln w="0">
             <a:noFill/>
           </a:ln>
         </p:spPr>
         <p:txBody>
-          <a:bodyPr xmlns:a="http://schemas.openxmlformats.org/drawingml/2006/main">
+          <a:bodyPr>
             <a:noAutofit/>
           </a:bodyPr>
-          <a:lstStyle xmlns:a="http://schemas.openxmlformats.org/drawingml/2006/main"/>
-          <a:p xmlns:a="http://schemas.openxmlformats.org/drawingml/2006/main">
+          <a:lstStyle/>
+          <a:p>
             <a:pPr>
               <a:defRPr sz="1575">
                 <a:solidFill>
@@ -7500,37 +7352,37 @@
       </p:sp>
       <p:sp>
         <p:nvSpPr>
-          <p:cNvPr id="22" name="">
-            <a:extLst xmlns:a="http://schemas.openxmlformats.org/drawingml/2006/main">
+          <p:cNvPr id="22" name="Rectangle 21">
+            <a:extLst>
               <a:ext uri="{FF2B5EF4-FFF2-40B4-BE49-F238E27FC236}">
                 <a16:creationId xmlns:a16="http://schemas.microsoft.com/office/drawing/2014/main" id="{988DB082-F650-4833-A9CE-FFE10B10143B}"/>
               </a:ext>
             </a:extLst>
           </p:cNvPr>
           <p:cNvSpPr>
-            <a:spLocks xmlns:a="http://schemas.openxmlformats.org/drawingml/2006/main" noGrp="1"/>
-          </p:cNvSpPr>
-          <p:nvPr/>
-        </p:nvSpPr>
-        <p:spPr>
-          <a:xfrm xmlns:a="http://schemas.openxmlformats.org/drawingml/2006/main">
+            <a:spLocks noGrp="1"/>
+          </p:cNvSpPr>
+          <p:nvPr/>
+        </p:nvSpPr>
+        <p:spPr>
+          <a:xfrm>
             <a:off x="11877675" y="6524625"/>
             <a:ext cx="2571750" cy="333375"/>
           </a:xfrm>
-          <a:prstGeom xmlns:a="http://schemas.openxmlformats.org/drawingml/2006/main" prst="rect">
-            <a:avLst/>
-          </a:prstGeom>
-          <a:noFill xmlns:a="http://schemas.openxmlformats.org/drawingml/2006/main"/>
-          <a:ln xmlns:a="http://schemas.openxmlformats.org/drawingml/2006/main" w="0">
+          <a:prstGeom prst="rect">
+            <a:avLst/>
+          </a:prstGeom>
+          <a:noFill/>
+          <a:ln w="0">
             <a:noFill/>
           </a:ln>
         </p:spPr>
         <p:txBody>
-          <a:bodyPr xmlns:a="http://schemas.openxmlformats.org/drawingml/2006/main">
+          <a:bodyPr>
             <a:noAutofit/>
           </a:bodyPr>
-          <a:lstStyle xmlns:a="http://schemas.openxmlformats.org/drawingml/2006/main"/>
-          <a:p xmlns:a="http://schemas.openxmlformats.org/drawingml/2006/main">
+          <a:lstStyle/>
+          <a:p>
             <a:pPr>
               <a:defRPr sz="1650">
                 <a:solidFill>
@@ -7557,37 +7409,37 @@
       </p:sp>
       <p:sp>
         <p:nvSpPr>
-          <p:cNvPr id="23" name="">
-            <a:extLst xmlns:a="http://schemas.openxmlformats.org/drawingml/2006/main">
+          <p:cNvPr id="23" name="Rectangle 22">
+            <a:extLst>
               <a:ext uri="{FF2B5EF4-FFF2-40B4-BE49-F238E27FC236}">
                 <a16:creationId xmlns:a16="http://schemas.microsoft.com/office/drawing/2014/main" id="{C0B68932-488C-4092-ADA4-886EBB1B914F}"/>
               </a:ext>
             </a:extLst>
           </p:cNvPr>
           <p:cNvSpPr>
-            <a:spLocks xmlns:a="http://schemas.openxmlformats.org/drawingml/2006/main" noGrp="1"/>
-          </p:cNvSpPr>
-          <p:nvPr/>
-        </p:nvSpPr>
-        <p:spPr>
-          <a:xfrm xmlns:a="http://schemas.openxmlformats.org/drawingml/2006/main">
+            <a:spLocks noGrp="1"/>
+          </p:cNvSpPr>
+          <p:nvPr/>
+        </p:nvSpPr>
+        <p:spPr>
+          <a:xfrm>
             <a:off x="11877675" y="7048500"/>
             <a:ext cx="2667000" cy="666750"/>
           </a:xfrm>
-          <a:prstGeom xmlns:a="http://schemas.openxmlformats.org/drawingml/2006/main" prst="rect">
-            <a:avLst/>
-          </a:prstGeom>
-          <a:noFill xmlns:a="http://schemas.openxmlformats.org/drawingml/2006/main"/>
-          <a:ln xmlns:a="http://schemas.openxmlformats.org/drawingml/2006/main" w="0">
+          <a:prstGeom prst="rect">
+            <a:avLst/>
+          </a:prstGeom>
+          <a:noFill/>
+          <a:ln w="0">
             <a:noFill/>
           </a:ln>
         </p:spPr>
         <p:txBody>
-          <a:bodyPr xmlns:a="http://schemas.openxmlformats.org/drawingml/2006/main">
+          <a:bodyPr>
             <a:noAutofit/>
           </a:bodyPr>
-          <a:lstStyle xmlns:a="http://schemas.openxmlformats.org/drawingml/2006/main"/>
-          <a:p xmlns:a="http://schemas.openxmlformats.org/drawingml/2006/main">
+          <a:lstStyle/>
+          <a:p>
             <a:pPr>
               <a:defRPr sz="1350">
                 <a:solidFill>
@@ -7619,17 +7471,21 @@
       </p:ext>
     </p:extLst>
   </p:cSld>
+  <p:clrMapOvr>
+    <a:masterClrMapping/>
+  </p:clrMapOvr>
 </p:sld>
 </file>
 
 <file path=ppt/slides/slide9.xml><?xml version="1.0" encoding="utf-8"?>
-<p:sld xmlns:p="http://schemas.openxmlformats.org/presentationml/2006/main">
+<p:sld xmlns:a="http://schemas.openxmlformats.org/drawingml/2006/main" xmlns:r="http://schemas.openxmlformats.org/officeDocument/2006/relationships" xmlns:p="http://schemas.openxmlformats.org/presentationml/2006/main">
   <p:cSld>
     <p:bg>
       <p:bgPr>
-        <a:solidFill xmlns:a="http://schemas.openxmlformats.org/drawingml/2006/main">
+        <a:solidFill>
           <a:srgbClr val="F6F3ED"/>
         </a:solidFill>
+        <a:effectLst/>
       </p:bgPr>
     </p:bg>
     <p:spTree>
@@ -7639,41 +7495,46 @@
         <p:nvPr/>
       </p:nvGrpSpPr>
       <p:grpSpPr>
-        <a:xfrm xmlns:a="http://schemas.openxmlformats.org/drawingml/2006/main"/>
+        <a:xfrm>
+          <a:off x="0" y="0"/>
+          <a:ext cx="0" cy="0"/>
+          <a:chOff x="0" y="0"/>
+          <a:chExt cx="0" cy="0"/>
+        </a:xfrm>
       </p:grpSpPr>
       <p:sp>
         <p:nvSpPr>
-          <p:cNvPr id="10" name="">
-            <a:extLst xmlns:a="http://schemas.openxmlformats.org/drawingml/2006/main">
+          <p:cNvPr id="10" name="Rectangle 9">
+            <a:extLst>
               <a:ext uri="{FF2B5EF4-FFF2-40B4-BE49-F238E27FC236}">
                 <a16:creationId xmlns:a16="http://schemas.microsoft.com/office/drawing/2014/main" id="{3D2F1882-C3F6-4095-8787-DD1E899963C2}"/>
               </a:ext>
             </a:extLst>
           </p:cNvPr>
           <p:cNvSpPr>
-            <a:spLocks xmlns:a="http://schemas.openxmlformats.org/drawingml/2006/main" noGrp="1"/>
-          </p:cNvSpPr>
-          <p:nvPr/>
-        </p:nvSpPr>
-        <p:spPr>
-          <a:xfrm xmlns:a="http://schemas.openxmlformats.org/drawingml/2006/main">
+            <a:spLocks noGrp="1"/>
+          </p:cNvSpPr>
+          <p:nvPr/>
+        </p:nvSpPr>
+        <p:spPr>
+          <a:xfrm>
             <a:off x="714375" y="457200"/>
             <a:ext cx="12858750" cy="304800"/>
           </a:xfrm>
-          <a:prstGeom xmlns:a="http://schemas.openxmlformats.org/drawingml/2006/main" prst="rect">
-            <a:avLst/>
-          </a:prstGeom>
-          <a:noFill xmlns:a="http://schemas.openxmlformats.org/drawingml/2006/main"/>
-          <a:ln xmlns:a="http://schemas.openxmlformats.org/drawingml/2006/main" w="0">
+          <a:prstGeom prst="rect">
+            <a:avLst/>
+          </a:prstGeom>
+          <a:noFill/>
+          <a:ln w="0">
             <a:noFill/>
           </a:ln>
         </p:spPr>
         <p:txBody>
-          <a:bodyPr xmlns:a="http://schemas.openxmlformats.org/drawingml/2006/main">
+          <a:bodyPr>
             <a:noAutofit/>
           </a:bodyPr>
-          <a:lstStyle xmlns:a="http://schemas.openxmlformats.org/drawingml/2006/main"/>
-          <a:p xmlns:a="http://schemas.openxmlformats.org/drawingml/2006/main">
+          <a:lstStyle/>
+          <a:p>
             <a:pPr>
               <a:defRPr sz="1125">
                 <a:solidFill>
@@ -7700,37 +7561,37 @@
       </p:sp>
       <p:sp>
         <p:nvSpPr>
-          <p:cNvPr id="2" name="">
-            <a:extLst xmlns:a="http://schemas.openxmlformats.org/drawingml/2006/main">
+          <p:cNvPr id="2" name="Rectangle 1">
+            <a:extLst>
               <a:ext uri="{FF2B5EF4-FFF2-40B4-BE49-F238E27FC236}">
                 <a16:creationId xmlns:a16="http://schemas.microsoft.com/office/drawing/2014/main" id="{940E74B3-1971-4C05-90F6-80B52977E8E5}"/>
               </a:ext>
             </a:extLst>
           </p:cNvPr>
           <p:cNvSpPr>
-            <a:spLocks xmlns:a="http://schemas.openxmlformats.org/drawingml/2006/main" noGrp="1"/>
-          </p:cNvSpPr>
-          <p:nvPr/>
-        </p:nvSpPr>
-        <p:spPr>
-          <a:xfrm xmlns:a="http://schemas.openxmlformats.org/drawingml/2006/main">
+            <a:spLocks noGrp="1"/>
+          </p:cNvSpPr>
+          <p:nvPr/>
+        </p:nvSpPr>
+        <p:spPr>
+          <a:xfrm>
             <a:off x="13906500" y="7905750"/>
             <a:ext cx="666750" cy="285750"/>
           </a:xfrm>
-          <a:prstGeom xmlns:a="http://schemas.openxmlformats.org/drawingml/2006/main" prst="rect">
-            <a:avLst/>
-          </a:prstGeom>
-          <a:noFill xmlns:a="http://schemas.openxmlformats.org/drawingml/2006/main"/>
-          <a:ln xmlns:a="http://schemas.openxmlformats.org/drawingml/2006/main" w="0">
+          <a:prstGeom prst="rect">
+            <a:avLst/>
+          </a:prstGeom>
+          <a:noFill/>
+          <a:ln w="0">
             <a:noFill/>
           </a:ln>
         </p:spPr>
         <p:txBody>
-          <a:bodyPr xmlns:a="http://schemas.openxmlformats.org/drawingml/2006/main">
+          <a:bodyPr>
             <a:noAutofit/>
           </a:bodyPr>
-          <a:lstStyle xmlns:a="http://schemas.openxmlformats.org/drawingml/2006/main"/>
-          <a:p xmlns:a="http://schemas.openxmlformats.org/drawingml/2006/main">
+          <a:lstStyle/>
+          <a:p>
             <a:pPr>
               <a:defRPr sz="1125">
                 <a:solidFill>
@@ -7757,37 +7618,37 @@
       </p:sp>
       <p:sp>
         <p:nvSpPr>
-          <p:cNvPr id="3" name="">
-            <a:extLst xmlns:a="http://schemas.openxmlformats.org/drawingml/2006/main">
+          <p:cNvPr id="3" name="Rectangle 2">
+            <a:extLst>
               <a:ext uri="{FF2B5EF4-FFF2-40B4-BE49-F238E27FC236}">
                 <a16:creationId xmlns:a16="http://schemas.microsoft.com/office/drawing/2014/main" id="{47B0FE49-6B83-4CBF-AE5F-8C208DE90A48}"/>
               </a:ext>
             </a:extLst>
           </p:cNvPr>
           <p:cNvSpPr>
-            <a:spLocks xmlns:a="http://schemas.openxmlformats.org/drawingml/2006/main" noGrp="1"/>
-          </p:cNvSpPr>
-          <p:nvPr/>
-        </p:nvSpPr>
-        <p:spPr>
-          <a:xfrm xmlns:a="http://schemas.openxmlformats.org/drawingml/2006/main">
+            <a:spLocks noGrp="1"/>
+          </p:cNvSpPr>
+          <p:nvPr/>
+        </p:nvSpPr>
+        <p:spPr>
+          <a:xfrm>
             <a:off x="714375" y="1285875"/>
             <a:ext cx="12382500" cy="1333500"/>
           </a:xfrm>
-          <a:prstGeom xmlns:a="http://schemas.openxmlformats.org/drawingml/2006/main" prst="rect">
-            <a:avLst/>
-          </a:prstGeom>
-          <a:noFill xmlns:a="http://schemas.openxmlformats.org/drawingml/2006/main"/>
-          <a:ln xmlns:a="http://schemas.openxmlformats.org/drawingml/2006/main" w="0">
+          <a:prstGeom prst="rect">
+            <a:avLst/>
+          </a:prstGeom>
+          <a:noFill/>
+          <a:ln w="0">
             <a:noFill/>
           </a:ln>
         </p:spPr>
         <p:txBody>
-          <a:bodyPr xmlns:a="http://schemas.openxmlformats.org/drawingml/2006/main">
+          <a:bodyPr>
             <a:noAutofit/>
           </a:bodyPr>
-          <a:lstStyle xmlns:a="http://schemas.openxmlformats.org/drawingml/2006/main"/>
-          <a:p xmlns:a="http://schemas.openxmlformats.org/drawingml/2006/main">
+          <a:lstStyle/>
+          <a:p>
             <a:pPr>
               <a:defRPr sz="6450">
                 <a:solidFill>
@@ -7814,37 +7675,37 @@
       </p:sp>
       <p:sp>
         <p:nvSpPr>
-          <p:cNvPr id="4" name="">
-            <a:extLst xmlns:a="http://schemas.openxmlformats.org/drawingml/2006/main">
+          <p:cNvPr id="4" name="Rectangle 3">
+            <a:extLst>
               <a:ext uri="{FF2B5EF4-FFF2-40B4-BE49-F238E27FC236}">
                 <a16:creationId xmlns:a16="http://schemas.microsoft.com/office/drawing/2014/main" id="{E5C55AE4-6C7E-41DF-817E-F2907EE72DA9}"/>
               </a:ext>
             </a:extLst>
           </p:cNvPr>
           <p:cNvSpPr>
-            <a:spLocks xmlns:a="http://schemas.openxmlformats.org/drawingml/2006/main" noGrp="1"/>
-          </p:cNvSpPr>
-          <p:nvPr/>
-        </p:nvSpPr>
-        <p:spPr>
-          <a:xfrm xmlns:a="http://schemas.openxmlformats.org/drawingml/2006/main">
+            <a:spLocks noGrp="1"/>
+          </p:cNvSpPr>
+          <p:nvPr/>
+        </p:nvSpPr>
+        <p:spPr>
+          <a:xfrm>
             <a:off x="762000" y="3238500"/>
             <a:ext cx="6191250" cy="1905000"/>
           </a:xfrm>
-          <a:prstGeom xmlns:a="http://schemas.openxmlformats.org/drawingml/2006/main" prst="rect">
-            <a:avLst/>
-          </a:prstGeom>
-          <a:noFill xmlns:a="http://schemas.openxmlformats.org/drawingml/2006/main"/>
-          <a:ln xmlns:a="http://schemas.openxmlformats.org/drawingml/2006/main" w="0">
+          <a:prstGeom prst="rect">
+            <a:avLst/>
+          </a:prstGeom>
+          <a:noFill/>
+          <a:ln w="0">
             <a:noFill/>
           </a:ln>
         </p:spPr>
         <p:txBody>
-          <a:bodyPr xmlns:a="http://schemas.openxmlformats.org/drawingml/2006/main">
+          <a:bodyPr>
             <a:noAutofit/>
           </a:bodyPr>
-          <a:lstStyle xmlns:a="http://schemas.openxmlformats.org/drawingml/2006/main"/>
-          <a:p xmlns:a="http://schemas.openxmlformats.org/drawingml/2006/main">
+          <a:lstStyle/>
+          <a:p>
             <a:pPr>
               <a:defRPr sz="12375">
                 <a:solidFill>
@@ -7871,37 +7732,37 @@
       </p:sp>
       <p:sp>
         <p:nvSpPr>
-          <p:cNvPr id="5" name="">
-            <a:extLst xmlns:a="http://schemas.openxmlformats.org/drawingml/2006/main">
+          <p:cNvPr id="5" name="Rectangle 4">
+            <a:extLst>
               <a:ext uri="{FF2B5EF4-FFF2-40B4-BE49-F238E27FC236}">
                 <a16:creationId xmlns:a16="http://schemas.microsoft.com/office/drawing/2014/main" id="{497DF3CA-B903-4305-8AB3-288F0BF53C92}"/>
               </a:ext>
             </a:extLst>
           </p:cNvPr>
           <p:cNvSpPr>
-            <a:spLocks xmlns:a="http://schemas.openxmlformats.org/drawingml/2006/main" noGrp="1"/>
-          </p:cNvSpPr>
-          <p:nvPr/>
-        </p:nvSpPr>
-        <p:spPr>
-          <a:xfrm xmlns:a="http://schemas.openxmlformats.org/drawingml/2006/main">
+            <a:spLocks noGrp="1"/>
+          </p:cNvSpPr>
+          <p:nvPr/>
+        </p:nvSpPr>
+        <p:spPr>
+          <a:xfrm>
             <a:off x="809625" y="5524500"/>
             <a:ext cx="5715000" cy="571500"/>
           </a:xfrm>
-          <a:prstGeom xmlns:a="http://schemas.openxmlformats.org/drawingml/2006/main" prst="rect">
-            <a:avLst/>
-          </a:prstGeom>
-          <a:noFill xmlns:a="http://schemas.openxmlformats.org/drawingml/2006/main"/>
-          <a:ln xmlns:a="http://schemas.openxmlformats.org/drawingml/2006/main" w="0">
+          <a:prstGeom prst="rect">
+            <a:avLst/>
+          </a:prstGeom>
+          <a:noFill/>
+          <a:ln w="0">
             <a:noFill/>
           </a:ln>
         </p:spPr>
         <p:txBody>
-          <a:bodyPr xmlns:a="http://schemas.openxmlformats.org/drawingml/2006/main">
+          <a:bodyPr>
             <a:noAutofit/>
           </a:bodyPr>
-          <a:lstStyle xmlns:a="http://schemas.openxmlformats.org/drawingml/2006/main"/>
-          <a:p xmlns:a="http://schemas.openxmlformats.org/drawingml/2006/main">
+          <a:lstStyle/>
+          <a:p>
             <a:pPr>
               <a:defRPr sz="2550">
                 <a:solidFill>
@@ -7928,37 +7789,37 @@
       </p:sp>
       <p:sp>
         <p:nvSpPr>
-          <p:cNvPr id="6" name="">
-            <a:extLst xmlns:a="http://schemas.openxmlformats.org/drawingml/2006/main">
+          <p:cNvPr id="6" name="Rectangle 5">
+            <a:extLst>
               <a:ext uri="{FF2B5EF4-FFF2-40B4-BE49-F238E27FC236}">
                 <a16:creationId xmlns:a16="http://schemas.microsoft.com/office/drawing/2014/main" id="{18A501C5-AD31-4D70-B874-C53C1FB1546D}"/>
               </a:ext>
             </a:extLst>
           </p:cNvPr>
           <p:cNvSpPr>
-            <a:spLocks xmlns:a="http://schemas.openxmlformats.org/drawingml/2006/main" noGrp="1"/>
-          </p:cNvSpPr>
-          <p:nvPr/>
-        </p:nvSpPr>
-        <p:spPr>
-          <a:xfrm xmlns:a="http://schemas.openxmlformats.org/drawingml/2006/main">
+            <a:spLocks noGrp="1"/>
+          </p:cNvSpPr>
+          <p:nvPr/>
+        </p:nvSpPr>
+        <p:spPr>
+          <a:xfrm>
             <a:off x="809625" y="6477000"/>
             <a:ext cx="6096000" cy="1238250"/>
           </a:xfrm>
-          <a:prstGeom xmlns:a="http://schemas.openxmlformats.org/drawingml/2006/main" prst="rect">
-            <a:avLst/>
-          </a:prstGeom>
-          <a:noFill xmlns:a="http://schemas.openxmlformats.org/drawingml/2006/main"/>
-          <a:ln xmlns:a="http://schemas.openxmlformats.org/drawingml/2006/main" w="0">
+          <a:prstGeom prst="rect">
+            <a:avLst/>
+          </a:prstGeom>
+          <a:noFill/>
+          <a:ln w="0">
             <a:noFill/>
           </a:ln>
         </p:spPr>
         <p:txBody>
-          <a:bodyPr xmlns:a="http://schemas.openxmlformats.org/drawingml/2006/main">
+          <a:bodyPr>
             <a:noAutofit/>
           </a:bodyPr>
-          <a:lstStyle xmlns:a="http://schemas.openxmlformats.org/drawingml/2006/main"/>
-          <a:p xmlns:a="http://schemas.openxmlformats.org/drawingml/2006/main">
+          <a:lstStyle/>
+          <a:p>
             <a:pPr>
               <a:defRPr sz="1725">
                 <a:solidFill>
@@ -7981,7 +7842,7 @@
               <a:t>Editorial headlines and quiet, expressive statements.</a:t>
             </a:r>
           </a:p>
-          <a:p xmlns:a="http://schemas.openxmlformats.org/drawingml/2006/main">
+          <a:p>
             <a:pPr>
               <a:defRPr sz="1725">
                 <a:solidFill>
@@ -8008,37 +7869,37 @@
       </p:sp>
       <p:sp>
         <p:nvSpPr>
-          <p:cNvPr id="7" name="">
-            <a:extLst xmlns:a="http://schemas.openxmlformats.org/drawingml/2006/main">
+          <p:cNvPr id="7" name="Rectangle 6">
+            <a:extLst>
               <a:ext uri="{FF2B5EF4-FFF2-40B4-BE49-F238E27FC236}">
                 <a16:creationId xmlns:a16="http://schemas.microsoft.com/office/drawing/2014/main" id="{BDBA4D98-3C01-4061-A9F6-865F8204DC48}"/>
               </a:ext>
             </a:extLst>
           </p:cNvPr>
           <p:cNvSpPr>
-            <a:spLocks xmlns:a="http://schemas.openxmlformats.org/drawingml/2006/main" noGrp="1"/>
-          </p:cNvSpPr>
-          <p:nvPr/>
-        </p:nvSpPr>
-        <p:spPr>
-          <a:xfrm xmlns:a="http://schemas.openxmlformats.org/drawingml/2006/main">
+            <a:spLocks noGrp="1"/>
+          </p:cNvSpPr>
+          <p:nvPr/>
+        </p:nvSpPr>
+        <p:spPr>
+          <a:xfrm>
             <a:off x="8477250" y="3190875"/>
             <a:ext cx="6191250" cy="2000250"/>
           </a:xfrm>
-          <a:prstGeom xmlns:a="http://schemas.openxmlformats.org/drawingml/2006/main" prst="rect">
-            <a:avLst/>
-          </a:prstGeom>
-          <a:noFill xmlns:a="http://schemas.openxmlformats.org/drawingml/2006/main"/>
-          <a:ln xmlns:a="http://schemas.openxmlformats.org/drawingml/2006/main" w="0">
+          <a:prstGeom prst="rect">
+            <a:avLst/>
+          </a:prstGeom>
+          <a:noFill/>
+          <a:ln w="0">
             <a:noFill/>
           </a:ln>
         </p:spPr>
         <p:txBody>
-          <a:bodyPr xmlns:a="http://schemas.openxmlformats.org/drawingml/2006/main">
+          <a:bodyPr>
             <a:noAutofit/>
           </a:bodyPr>
-          <a:lstStyle xmlns:a="http://schemas.openxmlformats.org/drawingml/2006/main"/>
-          <a:p xmlns:a="http://schemas.openxmlformats.org/drawingml/2006/main">
+          <a:lstStyle/>
+          <a:p>
             <a:pPr>
               <a:defRPr sz="12750">
                 <a:solidFill>
@@ -8065,37 +7926,37 @@
       </p:sp>
       <p:sp>
         <p:nvSpPr>
-          <p:cNvPr id="8" name="">
-            <a:extLst xmlns:a="http://schemas.openxmlformats.org/drawingml/2006/main">
+          <p:cNvPr id="8" name="Rectangle 7">
+            <a:extLst>
               <a:ext uri="{FF2B5EF4-FFF2-40B4-BE49-F238E27FC236}">
                 <a16:creationId xmlns:a16="http://schemas.microsoft.com/office/drawing/2014/main" id="{2AB0E3D4-7E6D-4C88-AF5F-42DE37961881}"/>
               </a:ext>
             </a:extLst>
           </p:cNvPr>
           <p:cNvSpPr>
-            <a:spLocks xmlns:a="http://schemas.openxmlformats.org/drawingml/2006/main" noGrp="1"/>
-          </p:cNvSpPr>
-          <p:nvPr/>
-        </p:nvSpPr>
-        <p:spPr>
-          <a:xfrm xmlns:a="http://schemas.openxmlformats.org/drawingml/2006/main">
+            <a:spLocks noGrp="1"/>
+          </p:cNvSpPr>
+          <p:nvPr/>
+        </p:nvSpPr>
+        <p:spPr>
+          <a:xfrm>
             <a:off x="8524875" y="5524500"/>
             <a:ext cx="6000750" cy="571500"/>
           </a:xfrm>
-          <a:prstGeom xmlns:a="http://schemas.openxmlformats.org/drawingml/2006/main" prst="rect">
-            <a:avLst/>
-          </a:prstGeom>
-          <a:noFill xmlns:a="http://schemas.openxmlformats.org/drawingml/2006/main"/>
-          <a:ln xmlns:a="http://schemas.openxmlformats.org/drawingml/2006/main" w="0">
+          <a:prstGeom prst="rect">
+            <a:avLst/>
+          </a:prstGeom>
+          <a:noFill/>
+          <a:ln w="0">
             <a:noFill/>
           </a:ln>
         </p:spPr>
         <p:txBody>
-          <a:bodyPr xmlns:a="http://schemas.openxmlformats.org/drawingml/2006/main">
+          <a:bodyPr>
             <a:noAutofit/>
           </a:bodyPr>
-          <a:lstStyle xmlns:a="http://schemas.openxmlformats.org/drawingml/2006/main"/>
-          <a:p xmlns:a="http://schemas.openxmlformats.org/drawingml/2006/main">
+          <a:lstStyle/>
+          <a:p>
             <a:pPr>
               <a:defRPr sz="2550">
                 <a:solidFill>
@@ -8122,37 +7983,37 @@
       </p:sp>
       <p:sp>
         <p:nvSpPr>
-          <p:cNvPr id="9" name="">
-            <a:extLst xmlns:a="http://schemas.openxmlformats.org/drawingml/2006/main">
+          <p:cNvPr id="9" name="Rectangle 8">
+            <a:extLst>
               <a:ext uri="{FF2B5EF4-FFF2-40B4-BE49-F238E27FC236}">
                 <a16:creationId xmlns:a16="http://schemas.microsoft.com/office/drawing/2014/main" id="{C2C9411D-2717-4890-8084-093FACDD383F}"/>
               </a:ext>
             </a:extLst>
           </p:cNvPr>
           <p:cNvSpPr>
-            <a:spLocks xmlns:a="http://schemas.openxmlformats.org/drawingml/2006/main" noGrp="1"/>
-          </p:cNvSpPr>
-          <p:nvPr/>
-        </p:nvSpPr>
-        <p:spPr>
-          <a:xfrm xmlns:a="http://schemas.openxmlformats.org/drawingml/2006/main">
+            <a:spLocks noGrp="1"/>
+          </p:cNvSpPr>
+          <p:nvPr/>
+        </p:nvSpPr>
+        <p:spPr>
+          <a:xfrm>
             <a:off x="8524875" y="6477000"/>
             <a:ext cx="5810250" cy="1238250"/>
           </a:xfrm>
-          <a:prstGeom xmlns:a="http://schemas.openxmlformats.org/drawingml/2006/main" prst="rect">
-            <a:avLst/>
-          </a:prstGeom>
-          <a:noFill xmlns:a="http://schemas.openxmlformats.org/drawingml/2006/main"/>
-          <a:ln xmlns:a="http://schemas.openxmlformats.org/drawingml/2006/main" w="0">
+          <a:prstGeom prst="rect">
+            <a:avLst/>
+          </a:prstGeom>
+          <a:noFill/>
+          <a:ln w="0">
             <a:noFill/>
           </a:ln>
         </p:spPr>
         <p:txBody>
-          <a:bodyPr xmlns:a="http://schemas.openxmlformats.org/drawingml/2006/main">
+          <a:bodyPr>
             <a:noAutofit/>
           </a:bodyPr>
-          <a:lstStyle xmlns:a="http://schemas.openxmlformats.org/drawingml/2006/main"/>
-          <a:p xmlns:a="http://schemas.openxmlformats.org/drawingml/2006/main">
+          <a:lstStyle/>
+          <a:p>
             <a:pPr>
               <a:defRPr sz="1725">
                 <a:solidFill>
@@ -8175,7 +8036,7 @@
               <a:t>Navigation, body copy and practical information.</a:t>
             </a:r>
           </a:p>
-          <a:p xmlns:a="http://schemas.openxmlformats.org/drawingml/2006/main">
+          <a:p>
             <a:pPr>
               <a:defRPr sz="1725">
                 <a:solidFill>
@@ -8207,6 +8068,9 @@
       </p:ext>
     </p:extLst>
   </p:cSld>
+  <p:clrMapOvr>
+    <a:masterClrMapping/>
+  </p:clrMapOvr>
 </p:sld>
 </file>
 
@@ -8452,5 +8316,254 @@
       </a:bgFillStyleLst>
     </a:fmtScheme>
   </a:themeElements>
+  <a:objectDefaults/>
+  <a:extraClrSchemeLst/>
+</a:theme>
+</file>
+
+<file path=ppt/theme/theme2.xml><?xml version="1.0" encoding="utf-8"?>
+<a:theme xmlns:a="http://schemas.openxmlformats.org/drawingml/2006/main" name="ChatGPT">
+  <a:themeElements>
+    <a:clrScheme name="ChatGPT">
+      <a:dk1>
+        <a:srgbClr val="000000"/>
+      </a:dk1>
+      <a:lt1>
+        <a:srgbClr val="FFFFFF"/>
+      </a:lt1>
+      <a:dk2>
+        <a:srgbClr val="0E2841"/>
+      </a:dk2>
+      <a:lt2>
+        <a:srgbClr val="E8E8E8"/>
+      </a:lt2>
+      <a:accent1>
+        <a:srgbClr val="156082"/>
+      </a:accent1>
+      <a:accent2>
+        <a:srgbClr val="E97132"/>
+      </a:accent2>
+      <a:accent3>
+        <a:srgbClr val="196B24"/>
+      </a:accent3>
+      <a:accent4>
+        <a:srgbClr val="0F9ED5"/>
+      </a:accent4>
+      <a:accent5>
+        <a:srgbClr val="A02B93"/>
+      </a:accent5>
+      <a:accent6>
+        <a:srgbClr val="4EA72E"/>
+      </a:accent6>
+      <a:hlink>
+        <a:srgbClr val="467886"/>
+      </a:hlink>
+      <a:folHlink>
+        <a:srgbClr val="96607D"/>
+      </a:folHlink>
+    </a:clrScheme>
+    <a:fontScheme name="Office">
+      <a:majorFont>
+        <a:latin typeface="Calibri Light"/>
+        <a:ea typeface="Calibri Light"/>
+        <a:cs typeface="Calibri Light"/>
+      </a:majorFont>
+      <a:minorFont>
+        <a:latin typeface="Calibri"/>
+        <a:ea typeface="Calibri"/>
+        <a:cs typeface="Calibri"/>
+      </a:minorFont>
+    </a:fontScheme>
+    <a:fmtScheme name="ChatGPT">
+      <a:fillStyleLst>
+        <a:solidFill>
+          <a:schemeClr val="phClr"/>
+        </a:solidFill>
+        <a:gradFill>
+          <a:gsLst>
+            <a:gs pos="0">
+              <a:schemeClr val="phClr">
+                <a:tint val="67000"/>
+                <a:lumMod val="110000"/>
+                <a:satMod val="105000"/>
+              </a:schemeClr>
+            </a:gs>
+            <a:gs pos="50000">
+              <a:schemeClr val="phClr">
+                <a:tint val="73000"/>
+                <a:lumMod val="105000"/>
+                <a:satMod val="103000"/>
+              </a:schemeClr>
+            </a:gs>
+            <a:gs pos="100000">
+              <a:schemeClr val="phClr">
+                <a:tint val="81000"/>
+                <a:lumMod val="105000"/>
+                <a:satMod val="109000"/>
+              </a:schemeClr>
+            </a:gs>
+          </a:gsLst>
+          <a:lin ang="5400000" scaled="0"/>
+        </a:gradFill>
+        <a:gradFill>
+          <a:gsLst>
+            <a:gs pos="0">
+              <a:schemeClr val="phClr">
+                <a:tint val="94000"/>
+                <a:lumMod val="102000"/>
+                <a:satMod val="103000"/>
+              </a:schemeClr>
+            </a:gs>
+            <a:gs pos="50000">
+              <a:schemeClr val="phClr">
+                <a:shade val="100000"/>
+                <a:lumMod val="100000"/>
+                <a:satMod val="110000"/>
+              </a:schemeClr>
+            </a:gs>
+            <a:gs pos="100000">
+              <a:schemeClr val="phClr">
+                <a:shade val="78000"/>
+                <a:lumMod val="99000"/>
+                <a:satMod val="120000"/>
+              </a:schemeClr>
+            </a:gs>
+          </a:gsLst>
+          <a:lin ang="5400000" scaled="0"/>
+        </a:gradFill>
+      </a:fillStyleLst>
+      <a:lnStyleLst>
+        <a:ln w="12700">
+          <a:solidFill>
+            <a:schemeClr val="phClr"/>
+          </a:solidFill>
+          <a:prstDash val="solid"/>
+        </a:ln>
+        <a:ln w="19050">
+          <a:solidFill>
+            <a:schemeClr val="phClr"/>
+          </a:solidFill>
+          <a:prstDash val="solid"/>
+        </a:ln>
+        <a:ln w="25400">
+          <a:solidFill>
+            <a:schemeClr val="phClr"/>
+          </a:solidFill>
+          <a:prstDash val="solid"/>
+        </a:ln>
+      </a:lnStyleLst>
+      <a:effectStyleLst>
+        <a:effectStyle>
+          <a:effectLst/>
+        </a:effectStyle>
+        <a:effectStyle>
+          <a:effectLst/>
+        </a:effectStyle>
+        <a:effectStyle>
+          <a:effectLst>
+            <a:outerShdw blurRad="57150" dist="19050" dir="5400000">
+              <a:srgbClr val="000000">
+                <a:alpha val="16000"/>
+              </a:srgbClr>
+            </a:outerShdw>
+          </a:effectLst>
+        </a:effectStyle>
+        <a:effectStyle>
+          <a:effectLst>
+            <a:outerShdw blurRad="19050" dist="9525" dir="5400000">
+              <a:srgbClr val="000000">
+                <a:alpha val="6000"/>
+              </a:srgbClr>
+            </a:outerShdw>
+          </a:effectLst>
+        </a:effectStyle>
+        <a:effectStyle>
+          <a:effectLst>
+            <a:outerShdw blurRad="28575" dist="9525" dir="5400000">
+              <a:srgbClr val="000000">
+                <a:alpha val="8000"/>
+              </a:srgbClr>
+            </a:outerShdw>
+          </a:effectLst>
+        </a:effectStyle>
+        <a:effectStyle>
+          <a:effectLst>
+            <a:outerShdw blurRad="57150" dist="19050" dir="5400000">
+              <a:srgbClr val="000000">
+                <a:alpha val="10000"/>
+              </a:srgbClr>
+            </a:outerShdw>
+          </a:effectLst>
+        </a:effectStyle>
+        <a:effectStyle>
+          <a:effectLst>
+            <a:outerShdw blurRad="114300" dist="38100" dir="5400000">
+              <a:srgbClr val="000000">
+                <a:alpha val="12000"/>
+              </a:srgbClr>
+            </a:outerShdw>
+          </a:effectLst>
+        </a:effectStyle>
+        <a:effectStyle>
+          <a:effectLst>
+            <a:outerShdw blurRad="171450" dist="57150" dir="5400000">
+              <a:srgbClr val="000000">
+                <a:alpha val="16000"/>
+              </a:srgbClr>
+            </a:outerShdw>
+          </a:effectLst>
+        </a:effectStyle>
+        <a:effectStyle>
+          <a:effectLst>
+            <a:outerShdw blurRad="266700" dist="95250" dir="5400000">
+              <a:srgbClr val="000000">
+                <a:alpha val="24000"/>
+              </a:srgbClr>
+            </a:outerShdw>
+          </a:effectLst>
+        </a:effectStyle>
+      </a:effectStyleLst>
+      <a:bgFillStyleLst>
+        <a:solidFill>
+          <a:schemeClr val="phClr"/>
+        </a:solidFill>
+        <a:solidFill>
+          <a:schemeClr val="phClr">
+            <a:tint val="95000"/>
+            <a:satMod val="170000"/>
+          </a:schemeClr>
+        </a:solidFill>
+        <a:gradFill>
+          <a:gsLst>
+            <a:gs pos="0">
+              <a:schemeClr val="phClr">
+                <a:tint val="93000"/>
+                <a:shade val="98000"/>
+                <a:lumMod val="102000"/>
+                <a:satMod val="150000"/>
+              </a:schemeClr>
+            </a:gs>
+            <a:gs pos="50000">
+              <a:schemeClr val="phClr">
+                <a:tint val="98000"/>
+                <a:shade val="90000"/>
+                <a:lumMod val="103000"/>
+                <a:satMod val="130000"/>
+              </a:schemeClr>
+            </a:gs>
+            <a:gs pos="100000">
+              <a:schemeClr val="phClr">
+                <a:shade val="63000"/>
+                <a:satMod val="120000"/>
+              </a:schemeClr>
+            </a:gs>
+          </a:gsLst>
+          <a:lin ang="5400000" scaled="0"/>
+        </a:gradFill>
+      </a:bgFillStyleLst>
+    </a:fmtScheme>
+  </a:themeElements>
+  <a:objectDefaults/>
+  <a:extraClrSchemeLst/>
 </a:theme>
 </file>